--- a/.lessons/21 Fundamental CRUD/9 Updating Specific Row with eloquent (Part -2)/1.pptx
+++ b/.lessons/21 Fundamental CRUD/9 Updating Specific Row with eloquent (Part -2)/1.pptx
@@ -9,6 +9,25 @@
     <p:sldId id="402" r:id="rId3"/>
     <p:sldId id="403" r:id="rId4"/>
     <p:sldId id="400" r:id="rId5"/>
+    <p:sldId id="404" r:id="rId6"/>
+    <p:sldId id="405" r:id="rId7"/>
+    <p:sldId id="406" r:id="rId8"/>
+    <p:sldId id="408" r:id="rId9"/>
+    <p:sldId id="407" r:id="rId10"/>
+    <p:sldId id="409" r:id="rId11"/>
+    <p:sldId id="411" r:id="rId12"/>
+    <p:sldId id="412" r:id="rId13"/>
+    <p:sldId id="413" r:id="rId14"/>
+    <p:sldId id="414" r:id="rId15"/>
+    <p:sldId id="410" r:id="rId16"/>
+    <p:sldId id="415" r:id="rId17"/>
+    <p:sldId id="416" r:id="rId18"/>
+    <p:sldId id="417" r:id="rId19"/>
+    <p:sldId id="418" r:id="rId20"/>
+    <p:sldId id="419" r:id="rId21"/>
+    <p:sldId id="420" r:id="rId22"/>
+    <p:sldId id="421" r:id="rId23"/>
+    <p:sldId id="422" r:id="rId24"/>
   </p:sldIdLst>
   <p:sldSz cx="12192000" cy="6858000"/>
   <p:notesSz cx="6858000" cy="9144000"/>
@@ -262,7 +281,7 @@
           <a:p>
             <a:fld id="{3E102D2E-813C-461C-9963-687A650C48C0}" type="datetimeFigureOut">
               <a:rPr lang="en-US" smtClean="0"/>
-              <a:t>4/26/2025</a:t>
+              <a:t>5/18/2025</a:t>
             </a:fld>
             <a:endParaRPr lang="en-US"/>
           </a:p>
@@ -460,7 +479,7 @@
           <a:p>
             <a:fld id="{3E102D2E-813C-461C-9963-687A650C48C0}" type="datetimeFigureOut">
               <a:rPr lang="en-US" smtClean="0"/>
-              <a:t>4/26/2025</a:t>
+              <a:t>5/18/2025</a:t>
             </a:fld>
             <a:endParaRPr lang="en-US"/>
           </a:p>
@@ -668,7 +687,7 @@
           <a:p>
             <a:fld id="{3E102D2E-813C-461C-9963-687A650C48C0}" type="datetimeFigureOut">
               <a:rPr lang="en-US" smtClean="0"/>
-              <a:t>4/26/2025</a:t>
+              <a:t>5/18/2025</a:t>
             </a:fld>
             <a:endParaRPr lang="en-US"/>
           </a:p>
@@ -866,7 +885,7 @@
           <a:p>
             <a:fld id="{3E102D2E-813C-461C-9963-687A650C48C0}" type="datetimeFigureOut">
               <a:rPr lang="en-US" smtClean="0"/>
-              <a:t>4/26/2025</a:t>
+              <a:t>5/18/2025</a:t>
             </a:fld>
             <a:endParaRPr lang="en-US"/>
           </a:p>
@@ -1141,7 +1160,7 @@
           <a:p>
             <a:fld id="{3E102D2E-813C-461C-9963-687A650C48C0}" type="datetimeFigureOut">
               <a:rPr lang="en-US" smtClean="0"/>
-              <a:t>4/26/2025</a:t>
+              <a:t>5/18/2025</a:t>
             </a:fld>
             <a:endParaRPr lang="en-US"/>
           </a:p>
@@ -1406,7 +1425,7 @@
           <a:p>
             <a:fld id="{3E102D2E-813C-461C-9963-687A650C48C0}" type="datetimeFigureOut">
               <a:rPr lang="en-US" smtClean="0"/>
-              <a:t>4/26/2025</a:t>
+              <a:t>5/18/2025</a:t>
             </a:fld>
             <a:endParaRPr lang="en-US"/>
           </a:p>
@@ -1818,7 +1837,7 @@
           <a:p>
             <a:fld id="{3E102D2E-813C-461C-9963-687A650C48C0}" type="datetimeFigureOut">
               <a:rPr lang="en-US" smtClean="0"/>
-              <a:t>4/26/2025</a:t>
+              <a:t>5/18/2025</a:t>
             </a:fld>
             <a:endParaRPr lang="en-US"/>
           </a:p>
@@ -1959,7 +1978,7 @@
           <a:p>
             <a:fld id="{3E102D2E-813C-461C-9963-687A650C48C0}" type="datetimeFigureOut">
               <a:rPr lang="en-US" smtClean="0"/>
-              <a:t>4/26/2025</a:t>
+              <a:t>5/18/2025</a:t>
             </a:fld>
             <a:endParaRPr lang="en-US"/>
           </a:p>
@@ -2072,7 +2091,7 @@
           <a:p>
             <a:fld id="{3E102D2E-813C-461C-9963-687A650C48C0}" type="datetimeFigureOut">
               <a:rPr lang="en-US" smtClean="0"/>
-              <a:t>4/26/2025</a:t>
+              <a:t>5/18/2025</a:t>
             </a:fld>
             <a:endParaRPr lang="en-US"/>
           </a:p>
@@ -2383,7 +2402,7 @@
           <a:p>
             <a:fld id="{3E102D2E-813C-461C-9963-687A650C48C0}" type="datetimeFigureOut">
               <a:rPr lang="en-US" smtClean="0"/>
-              <a:t>4/26/2025</a:t>
+              <a:t>5/18/2025</a:t>
             </a:fld>
             <a:endParaRPr lang="en-US"/>
           </a:p>
@@ -2671,7 +2690,7 @@
           <a:p>
             <a:fld id="{3E102D2E-813C-461C-9963-687A650C48C0}" type="datetimeFigureOut">
               <a:rPr lang="en-US" smtClean="0"/>
-              <a:t>4/26/2025</a:t>
+              <a:t>5/18/2025</a:t>
             </a:fld>
             <a:endParaRPr lang="en-US"/>
           </a:p>
@@ -2912,7 +2931,7 @@
           <a:p>
             <a:fld id="{3E102D2E-813C-461C-9963-687A650C48C0}" type="datetimeFigureOut">
               <a:rPr lang="en-US" smtClean="0"/>
-              <a:t>4/26/2025</a:t>
+              <a:t>5/18/2025</a:t>
             </a:fld>
             <a:endParaRPr lang="en-US"/>
           </a:p>
@@ -3350,6 +3369,912 @@
         <p:spPr>
           <a:xfrm>
             <a:off x="217714" y="255046"/>
+            <a:ext cx="11756571" cy="5321137"/>
+          </a:xfrm>
+          <a:prstGeom prst="rect">
+            <a:avLst/>
+          </a:prstGeom>
+          <a:noFill/>
+        </p:spPr>
+        <p:txBody>
+          <a:bodyPr wrap="square">
+            <a:spAutoFit/>
+          </a:bodyPr>
+          <a:lstStyle/>
+          <a:p>
+            <a:pPr>
+              <a:lnSpc>
+                <a:spcPct val="150000"/>
+              </a:lnSpc>
+              <a:buNone/>
+            </a:pPr>
+            <a:r>
+              <a:rPr lang="en-US" altLang="en-US" sz="1200" b="1">
+                <a:latin typeface="Arial" panose="020B0604020202020204" pitchFamily="34" charset="0"/>
+              </a:rPr>
+              <a:t>Post</a:t>
+            </a:r>
+            <a:r>
+              <a:rPr lang="en-US" altLang="en-US" sz="1200">
+                <a:latin typeface="Arial" panose="020B0604020202020204" pitchFamily="34" charset="0"/>
+              </a:rPr>
+              <a:t> -u </a:t>
+            </a:r>
+            <a:r>
+              <a:rPr lang="en-US" altLang="en-US" sz="1200" b="1">
+                <a:solidFill>
+                  <a:srgbClr val="FF0000"/>
+                </a:solidFill>
+                <a:latin typeface="Arial" panose="020B0604020202020204" pitchFamily="34" charset="0"/>
+              </a:rPr>
+              <a:t>update</a:t>
+            </a:r>
+            <a:r>
+              <a:rPr lang="en-US" altLang="en-US" sz="1200">
+                <a:latin typeface="Arial" panose="020B0604020202020204" pitchFamily="34" charset="0"/>
+              </a:rPr>
+              <a:t> </a:t>
+            </a:r>
+            <a:r>
+              <a:rPr lang="az-Latn-AZ" altLang="en-US" sz="1200">
+                <a:latin typeface="Arial" panose="020B0604020202020204" pitchFamily="34" charset="0"/>
+              </a:rPr>
+              <a:t>etmək üçün </a:t>
+            </a:r>
+            <a:r>
+              <a:rPr lang="az-Latn-AZ" altLang="en-US" sz="1200" b="1">
+                <a:latin typeface="Arial" panose="020B0604020202020204" pitchFamily="34" charset="0"/>
+              </a:rPr>
+              <a:t>FORM</a:t>
+            </a:r>
+            <a:r>
+              <a:rPr lang="az-Latn-AZ" altLang="en-US" sz="1200">
+                <a:latin typeface="Arial" panose="020B0604020202020204" pitchFamily="34" charset="0"/>
+              </a:rPr>
+              <a:t> elementinə uyğun </a:t>
+            </a:r>
+            <a:r>
+              <a:rPr lang="az-Latn-AZ" altLang="en-US" sz="1200" b="1">
+                <a:latin typeface="Arial" panose="020B0604020202020204" pitchFamily="34" charset="0"/>
+              </a:rPr>
+              <a:t>route</a:t>
+            </a:r>
+            <a:r>
+              <a:rPr lang="az-Latn-AZ" altLang="en-US" sz="1200">
+                <a:latin typeface="Arial" panose="020B0604020202020204" pitchFamily="34" charset="0"/>
+              </a:rPr>
+              <a:t> -u vermək lazımdır. </a:t>
+            </a:r>
+            <a:r>
+              <a:rPr lang="az-Latn-AZ" altLang="en-US" sz="1200" b="1">
+                <a:latin typeface="Arial" panose="020B0604020202020204" pitchFamily="34" charset="0"/>
+              </a:rPr>
+              <a:t>Route</a:t>
+            </a:r>
+            <a:r>
+              <a:rPr lang="az-Latn-AZ" altLang="en-US" sz="1200">
+                <a:latin typeface="Arial" panose="020B0604020202020204" pitchFamily="34" charset="0"/>
+              </a:rPr>
+              <a:t> ilə birlikdə hansı </a:t>
+            </a:r>
+            <a:r>
+              <a:rPr lang="az-Latn-AZ" altLang="en-US" sz="1200" b="1">
+                <a:latin typeface="Arial" panose="020B0604020202020204" pitchFamily="34" charset="0"/>
+              </a:rPr>
+              <a:t>postu</a:t>
+            </a:r>
+            <a:r>
+              <a:rPr lang="az-Latn-AZ" altLang="en-US" sz="1200">
+                <a:latin typeface="Arial" panose="020B0604020202020204" pitchFamily="34" charset="0"/>
+              </a:rPr>
+              <a:t> dəyişdirəcəyini başa düşsün deyə </a:t>
+            </a:r>
+            <a:r>
+              <a:rPr lang="az-Latn-AZ" altLang="en-US" sz="1200" b="1">
+                <a:latin typeface="Arial" panose="020B0604020202020204" pitchFamily="34" charset="0"/>
+              </a:rPr>
+              <a:t>postun identifikatorunuda </a:t>
+            </a:r>
+            <a:r>
+              <a:rPr lang="az-Latn-AZ" altLang="en-US" sz="1200">
+                <a:latin typeface="Arial" panose="020B0604020202020204" pitchFamily="34" charset="0"/>
+              </a:rPr>
+              <a:t>yazmaq lazımdır: </a:t>
+            </a:r>
+            <a:r>
+              <a:rPr lang="en-US" altLang="en-US" sz="1200" b="1">
+                <a:solidFill>
+                  <a:srgbClr val="00B050"/>
+                </a:solidFill>
+                <a:latin typeface="Arial" panose="020B0604020202020204" pitchFamily="34" charset="0"/>
+              </a:rPr>
+              <a:t>$post-&gt;id</a:t>
+            </a:r>
+          </a:p>
+          <a:p>
+            <a:pPr>
+              <a:lnSpc>
+                <a:spcPct val="150000"/>
+              </a:lnSpc>
+              <a:buNone/>
+            </a:pPr>
+            <a:endParaRPr kumimoji="0" lang="en-US" altLang="en-US" sz="1200" b="0" i="0" u="none" strike="noStrike" cap="none" normalizeH="0" baseline="0">
+              <a:ln>
+                <a:noFill/>
+              </a:ln>
+              <a:solidFill>
+                <a:schemeClr val="tx1"/>
+              </a:solidFill>
+              <a:effectLst/>
+              <a:latin typeface="Arial" panose="020B0604020202020204" pitchFamily="34" charset="0"/>
+            </a:endParaRPr>
+          </a:p>
+          <a:p>
+            <a:pPr>
+              <a:lnSpc>
+                <a:spcPct val="150000"/>
+              </a:lnSpc>
+              <a:buNone/>
+            </a:pPr>
+            <a:r>
+              <a:rPr lang="az-Latn-AZ" altLang="en-US" sz="1200">
+                <a:latin typeface="Arial" panose="020B0604020202020204" pitchFamily="34" charset="0"/>
+              </a:rPr>
+              <a:t>Əlavə olaraq </a:t>
+            </a:r>
+            <a:r>
+              <a:rPr lang="az-Latn-AZ" altLang="en-US" sz="1200" b="1">
+                <a:latin typeface="Arial" panose="020B0604020202020204" pitchFamily="34" charset="0"/>
+              </a:rPr>
+              <a:t>UPDATE</a:t>
+            </a:r>
+            <a:r>
+              <a:rPr lang="az-Latn-AZ" altLang="en-US" sz="1200">
+                <a:latin typeface="Arial" panose="020B0604020202020204" pitchFamily="34" charset="0"/>
+              </a:rPr>
+              <a:t> proseslərində </a:t>
+            </a:r>
+            <a:r>
+              <a:rPr lang="az-Latn-AZ" altLang="en-US" sz="1200" b="1">
+                <a:solidFill>
+                  <a:srgbClr val="FF0000"/>
+                </a:solidFill>
+                <a:latin typeface="Arial" panose="020B0604020202020204" pitchFamily="34" charset="0"/>
+              </a:rPr>
+              <a:t>PUT</a:t>
+            </a:r>
+            <a:r>
+              <a:rPr lang="az-Latn-AZ" altLang="en-US" sz="1200">
+                <a:latin typeface="Arial" panose="020B0604020202020204" pitchFamily="34" charset="0"/>
+              </a:rPr>
+              <a:t>  metodundan istifadə edilir. Bunu </a:t>
+            </a:r>
+            <a:r>
+              <a:rPr lang="az-Latn-AZ" altLang="en-US" sz="1200" b="1">
+                <a:latin typeface="Arial" panose="020B0604020202020204" pitchFamily="34" charset="0"/>
+              </a:rPr>
+              <a:t>ROUTE</a:t>
+            </a:r>
+            <a:r>
+              <a:rPr lang="az-Latn-AZ" altLang="en-US" sz="1200">
+                <a:latin typeface="Arial" panose="020B0604020202020204" pitchFamily="34" charset="0"/>
+              </a:rPr>
+              <a:t> -a baxaraq başa düşürük. Soldakı şəkil. Şəkil tam </a:t>
+            </a:r>
+            <a:r>
+              <a:rPr lang="az-Latn-AZ" altLang="en-US" sz="1200" b="1">
+                <a:latin typeface="Arial" panose="020B0604020202020204" pitchFamily="34" charset="0"/>
+              </a:rPr>
+              <a:t>SS</a:t>
+            </a:r>
+            <a:r>
+              <a:rPr lang="az-Latn-AZ" altLang="en-US" sz="1200">
+                <a:latin typeface="Arial" panose="020B0604020202020204" pitchFamily="34" charset="0"/>
+              </a:rPr>
+              <a:t> etmədim ancaq bunu artıq dəfələrlə görmüşük deyə özünüzdə terminalda </a:t>
+            </a:r>
+            <a:r>
+              <a:rPr lang="az-Latn-AZ" altLang="en-US" sz="1200" b="1">
+                <a:latin typeface="Arial" panose="020B0604020202020204" pitchFamily="34" charset="0"/>
+              </a:rPr>
+              <a:t>route listinə </a:t>
+            </a:r>
+            <a:r>
+              <a:rPr lang="az-Latn-AZ" altLang="en-US" sz="1200">
+                <a:latin typeface="Arial" panose="020B0604020202020204" pitchFamily="34" charset="0"/>
+              </a:rPr>
+              <a:t>baxa bilərsiz. </a:t>
+            </a:r>
+          </a:p>
+          <a:p>
+            <a:pPr>
+              <a:lnSpc>
+                <a:spcPct val="150000"/>
+              </a:lnSpc>
+              <a:buNone/>
+            </a:pPr>
+            <a:endParaRPr lang="az-Latn-AZ" altLang="en-US" sz="1200">
+              <a:latin typeface="Arial" panose="020B0604020202020204" pitchFamily="34" charset="0"/>
+            </a:endParaRPr>
+          </a:p>
+          <a:p>
+            <a:pPr>
+              <a:lnSpc>
+                <a:spcPct val="150000"/>
+              </a:lnSpc>
+              <a:buNone/>
+            </a:pPr>
+            <a:endParaRPr lang="az-Latn-AZ" altLang="en-US" sz="1200">
+              <a:latin typeface="Arial" panose="020B0604020202020204" pitchFamily="34" charset="0"/>
+            </a:endParaRPr>
+          </a:p>
+          <a:p>
+            <a:pPr>
+              <a:lnSpc>
+                <a:spcPct val="150000"/>
+              </a:lnSpc>
+              <a:buNone/>
+            </a:pPr>
+            <a:endParaRPr lang="az-Latn-AZ" altLang="en-US" sz="1200">
+              <a:latin typeface="Arial" panose="020B0604020202020204" pitchFamily="34" charset="0"/>
+            </a:endParaRPr>
+          </a:p>
+          <a:p>
+            <a:pPr>
+              <a:lnSpc>
+                <a:spcPct val="150000"/>
+              </a:lnSpc>
+              <a:buNone/>
+            </a:pPr>
+            <a:endParaRPr lang="az-Latn-AZ" altLang="en-US" sz="1200">
+              <a:latin typeface="Arial" panose="020B0604020202020204" pitchFamily="34" charset="0"/>
+            </a:endParaRPr>
+          </a:p>
+          <a:p>
+            <a:pPr>
+              <a:lnSpc>
+                <a:spcPct val="150000"/>
+              </a:lnSpc>
+              <a:buNone/>
+            </a:pPr>
+            <a:endParaRPr lang="az-Latn-AZ" altLang="en-US" sz="1200">
+              <a:latin typeface="Arial" panose="020B0604020202020204" pitchFamily="34" charset="0"/>
+            </a:endParaRPr>
+          </a:p>
+          <a:p>
+            <a:pPr>
+              <a:lnSpc>
+                <a:spcPct val="150000"/>
+              </a:lnSpc>
+              <a:buNone/>
+            </a:pPr>
+            <a:endParaRPr lang="az-Latn-AZ" altLang="en-US" sz="1200">
+              <a:latin typeface="Arial" panose="020B0604020202020204" pitchFamily="34" charset="0"/>
+            </a:endParaRPr>
+          </a:p>
+          <a:p>
+            <a:pPr>
+              <a:lnSpc>
+                <a:spcPct val="150000"/>
+              </a:lnSpc>
+              <a:buNone/>
+            </a:pPr>
+            <a:endParaRPr lang="az-Latn-AZ" altLang="en-US" sz="1200">
+              <a:latin typeface="Arial" panose="020B0604020202020204" pitchFamily="34" charset="0"/>
+            </a:endParaRPr>
+          </a:p>
+          <a:p>
+            <a:pPr>
+              <a:lnSpc>
+                <a:spcPct val="150000"/>
+              </a:lnSpc>
+              <a:buNone/>
+            </a:pPr>
+            <a:endParaRPr lang="az-Latn-AZ" altLang="en-US" sz="1200">
+              <a:latin typeface="Arial" panose="020B0604020202020204" pitchFamily="34" charset="0"/>
+            </a:endParaRPr>
+          </a:p>
+          <a:p>
+            <a:pPr>
+              <a:lnSpc>
+                <a:spcPct val="150000"/>
+              </a:lnSpc>
+              <a:buNone/>
+            </a:pPr>
+            <a:endParaRPr lang="az-Latn-AZ" altLang="en-US" sz="1200">
+              <a:latin typeface="Arial" panose="020B0604020202020204" pitchFamily="34" charset="0"/>
+            </a:endParaRPr>
+          </a:p>
+          <a:p>
+            <a:pPr>
+              <a:lnSpc>
+                <a:spcPct val="150000"/>
+              </a:lnSpc>
+              <a:buNone/>
+            </a:pPr>
+            <a:endParaRPr lang="az-Latn-AZ" altLang="en-US" sz="1200">
+              <a:latin typeface="Arial" panose="020B0604020202020204" pitchFamily="34" charset="0"/>
+            </a:endParaRPr>
+          </a:p>
+          <a:p>
+            <a:pPr>
+              <a:lnSpc>
+                <a:spcPct val="150000"/>
+              </a:lnSpc>
+              <a:buNone/>
+            </a:pPr>
+            <a:endParaRPr lang="az-Latn-AZ" altLang="en-US" sz="1200">
+              <a:latin typeface="Arial" panose="020B0604020202020204" pitchFamily="34" charset="0"/>
+            </a:endParaRPr>
+          </a:p>
+          <a:p>
+            <a:pPr>
+              <a:lnSpc>
+                <a:spcPct val="150000"/>
+              </a:lnSpc>
+              <a:buNone/>
+            </a:pPr>
+            <a:endParaRPr lang="az-Latn-AZ" altLang="en-US" sz="1200">
+              <a:latin typeface="Arial" panose="020B0604020202020204" pitchFamily="34" charset="0"/>
+            </a:endParaRPr>
+          </a:p>
+          <a:p>
+            <a:pPr>
+              <a:lnSpc>
+                <a:spcPct val="150000"/>
+              </a:lnSpc>
+              <a:buNone/>
+            </a:pPr>
+            <a:r>
+              <a:rPr lang="az-Latn-AZ" altLang="en-US" sz="1200" b="1">
+                <a:latin typeface="Arial" panose="020B0604020202020204" pitchFamily="34" charset="0"/>
+              </a:rPr>
+              <a:t>NOT</a:t>
+            </a:r>
+            <a:r>
+              <a:rPr lang="az-Latn-AZ" altLang="en-US" sz="1200">
+                <a:latin typeface="Arial" panose="020B0604020202020204" pitchFamily="34" charset="0"/>
+              </a:rPr>
+              <a:t>: </a:t>
+            </a:r>
+            <a:r>
+              <a:rPr lang="az-Latn-AZ" altLang="en-US" sz="1200" b="1">
+                <a:solidFill>
+                  <a:srgbClr val="0070C0"/>
+                </a:solidFill>
+                <a:latin typeface="Arial" panose="020B0604020202020204" pitchFamily="34" charset="0"/>
+              </a:rPr>
+              <a:t>name</a:t>
+            </a:r>
+            <a:r>
+              <a:rPr lang="az-Latn-AZ" altLang="en-US" sz="1200">
+                <a:latin typeface="Arial" panose="020B0604020202020204" pitchFamily="34" charset="0"/>
+              </a:rPr>
+              <a:t> atributlarına </a:t>
+            </a:r>
+            <a:r>
+              <a:rPr lang="az-Latn-AZ" altLang="en-US" sz="1200" b="1">
+                <a:latin typeface="Arial" panose="020B0604020202020204" pitchFamily="34" charset="0"/>
+              </a:rPr>
+              <a:t>7ci </a:t>
+            </a:r>
+            <a:r>
+              <a:rPr lang="az-Latn-AZ" altLang="en-US" sz="1200">
+                <a:latin typeface="Arial" panose="020B0604020202020204" pitchFamily="34" charset="0"/>
+              </a:rPr>
+              <a:t>slaydda dəyər veririk.</a:t>
+            </a:r>
+            <a:endParaRPr lang="en-US" altLang="en-US" sz="1200">
+              <a:latin typeface="Arial" panose="020B0604020202020204" pitchFamily="34" charset="0"/>
+            </a:endParaRPr>
+          </a:p>
+          <a:p>
+            <a:pPr>
+              <a:lnSpc>
+                <a:spcPct val="150000"/>
+              </a:lnSpc>
+              <a:buNone/>
+            </a:pPr>
+            <a:endParaRPr kumimoji="0" lang="en-US" altLang="en-US" sz="1200" b="0" i="0" u="none" strike="noStrike" cap="none" normalizeH="0" baseline="0">
+              <a:ln>
+                <a:noFill/>
+              </a:ln>
+              <a:solidFill>
+                <a:schemeClr val="tx1"/>
+              </a:solidFill>
+              <a:effectLst/>
+              <a:latin typeface="Arial" panose="020B0604020202020204" pitchFamily="34" charset="0"/>
+            </a:endParaRPr>
+          </a:p>
+        </p:txBody>
+      </p:sp>
+      <p:pic>
+        <p:nvPicPr>
+          <p:cNvPr id="8" name="Picture 7">
+            <a:extLst>
+              <a:ext uri="{FF2B5EF4-FFF2-40B4-BE49-F238E27FC236}">
+                <a16:creationId xmlns:a16="http://schemas.microsoft.com/office/drawing/2014/main" id="{F25A5490-4545-CE7F-46E0-42E519F72869}"/>
+              </a:ext>
+            </a:extLst>
+          </p:cNvPr>
+          <p:cNvPicPr>
+            <a:picLocks noChangeAspect="1"/>
+          </p:cNvPicPr>
+          <p:nvPr/>
+        </p:nvPicPr>
+        <p:blipFill>
+          <a:blip r:embed="rId2"/>
+          <a:stretch>
+            <a:fillRect/>
+          </a:stretch>
+        </p:blipFill>
+        <p:spPr>
+          <a:xfrm>
+            <a:off x="0" y="1975196"/>
+            <a:ext cx="4820323" cy="2629267"/>
+          </a:xfrm>
+          <a:prstGeom prst="rect">
+            <a:avLst/>
+          </a:prstGeom>
+        </p:spPr>
+      </p:pic>
+      <p:pic>
+        <p:nvPicPr>
+          <p:cNvPr id="10" name="Picture 9">
+            <a:extLst>
+              <a:ext uri="{FF2B5EF4-FFF2-40B4-BE49-F238E27FC236}">
+                <a16:creationId xmlns:a16="http://schemas.microsoft.com/office/drawing/2014/main" id="{04DFBE94-4657-6661-6D3B-66B0BB4CB71E}"/>
+              </a:ext>
+            </a:extLst>
+          </p:cNvPr>
+          <p:cNvPicPr>
+            <a:picLocks noChangeAspect="1"/>
+          </p:cNvPicPr>
+          <p:nvPr/>
+        </p:nvPicPr>
+        <p:blipFill>
+          <a:blip r:embed="rId3"/>
+          <a:stretch>
+            <a:fillRect/>
+          </a:stretch>
+        </p:blipFill>
+        <p:spPr>
+          <a:xfrm>
+            <a:off x="5335571" y="1973520"/>
+            <a:ext cx="6833021" cy="4884480"/>
+          </a:xfrm>
+          <a:prstGeom prst="rect">
+            <a:avLst/>
+          </a:prstGeom>
+        </p:spPr>
+      </p:pic>
+    </p:spTree>
+    <p:extLst>
+      <p:ext uri="{BB962C8B-B14F-4D97-AF65-F5344CB8AC3E}">
+        <p14:creationId xmlns:p14="http://schemas.microsoft.com/office/powerpoint/2010/main" val="4240944397"/>
+      </p:ext>
+    </p:extLst>
+  </p:cSld>
+  <p:clrMapOvr>
+    <a:masterClrMapping/>
+  </p:clrMapOvr>
+</p:sld>
+</file>
+
+<file path=ppt/slides/slide10.xml><?xml version="1.0" encoding="utf-8"?>
+<p:sld xmlns:a="http://schemas.openxmlformats.org/drawingml/2006/main" xmlns:r="http://schemas.openxmlformats.org/officeDocument/2006/relationships" xmlns:p="http://schemas.openxmlformats.org/presentationml/2006/main">
+  <p:cSld>
+    <p:spTree>
+      <p:nvGrpSpPr>
+        <p:cNvPr id="1" name="">
+          <a:extLst>
+            <a:ext uri="{FF2B5EF4-FFF2-40B4-BE49-F238E27FC236}">
+              <a16:creationId xmlns:a16="http://schemas.microsoft.com/office/drawing/2014/main" id="{081B7449-16FF-57FB-C7B0-73B380F14922}"/>
+            </a:ext>
+          </a:extLst>
+        </p:cNvPr>
+        <p:cNvGrpSpPr/>
+        <p:nvPr/>
+      </p:nvGrpSpPr>
+      <p:grpSpPr>
+        <a:xfrm>
+          <a:off x="0" y="0"/>
+          <a:ext cx="0" cy="0"/>
+          <a:chOff x="0" y="0"/>
+          <a:chExt cx="0" cy="0"/>
+        </a:xfrm>
+      </p:grpSpPr>
+      <p:sp>
+        <p:nvSpPr>
+          <p:cNvPr id="3" name="TextBox 2">
+            <a:extLst>
+              <a:ext uri="{FF2B5EF4-FFF2-40B4-BE49-F238E27FC236}">
+                <a16:creationId xmlns:a16="http://schemas.microsoft.com/office/drawing/2014/main" id="{E92A4115-E2A1-0E8C-2A32-96DFDE2F3492}"/>
+              </a:ext>
+            </a:extLst>
+          </p:cNvPr>
+          <p:cNvSpPr txBox="1"/>
+          <p:nvPr/>
+        </p:nvSpPr>
+        <p:spPr>
+          <a:xfrm>
+            <a:off x="217715" y="255046"/>
+            <a:ext cx="6135952" cy="3956339"/>
+          </a:xfrm>
+          <a:prstGeom prst="rect">
+            <a:avLst/>
+          </a:prstGeom>
+          <a:noFill/>
+        </p:spPr>
+        <p:txBody>
+          <a:bodyPr wrap="square">
+            <a:spAutoFit/>
+          </a:bodyPr>
+          <a:lstStyle/>
+          <a:p>
+            <a:pPr>
+              <a:lnSpc>
+                <a:spcPct val="150000"/>
+              </a:lnSpc>
+              <a:buNone/>
+            </a:pPr>
+            <a:r>
+              <a:rPr lang="az-Latn-AZ" altLang="en-US" sz="1300">
+                <a:latin typeface="Arial" panose="020B0604020202020204" pitchFamily="34" charset="0"/>
+              </a:rPr>
+              <a:t>İndi </a:t>
+            </a:r>
+            <a:r>
+              <a:rPr lang="az-Latn-AZ" altLang="en-US" sz="1300" b="1">
+                <a:latin typeface="Arial" panose="020B0604020202020204" pitchFamily="34" charset="0"/>
+              </a:rPr>
+              <a:t>PostController</a:t>
+            </a:r>
+            <a:r>
+              <a:rPr lang="az-Latn-AZ" altLang="en-US" sz="1300">
+                <a:latin typeface="Arial" panose="020B0604020202020204" pitchFamily="34" charset="0"/>
+              </a:rPr>
+              <a:t> -in </a:t>
+            </a:r>
+            <a:r>
+              <a:rPr lang="az-Latn-AZ" altLang="en-US" sz="1300" b="1">
+                <a:latin typeface="Arial" panose="020B0604020202020204" pitchFamily="34" charset="0"/>
+              </a:rPr>
+              <a:t>store()</a:t>
+            </a:r>
+            <a:r>
+              <a:rPr lang="az-Latn-AZ" altLang="en-US" sz="1300">
+                <a:latin typeface="Arial" panose="020B0604020202020204" pitchFamily="34" charset="0"/>
+              </a:rPr>
+              <a:t> funksiyasında yazılan kodları </a:t>
+            </a:r>
+            <a:r>
+              <a:rPr lang="az-Latn-AZ" altLang="en-US" sz="1300" b="1">
+                <a:latin typeface="Arial" panose="020B0604020202020204" pitchFamily="34" charset="0"/>
+              </a:rPr>
+              <a:t>update() </a:t>
+            </a:r>
+            <a:r>
+              <a:rPr lang="az-Latn-AZ" altLang="en-US" sz="1300">
+                <a:latin typeface="Arial" panose="020B0604020202020204" pitchFamily="34" charset="0"/>
+              </a:rPr>
+              <a:t>metodu içində yazırıq. copy past yəni. </a:t>
+            </a:r>
+          </a:p>
+          <a:p>
+            <a:pPr>
+              <a:lnSpc>
+                <a:spcPct val="150000"/>
+              </a:lnSpc>
+              <a:buNone/>
+            </a:pPr>
+            <a:endParaRPr kumimoji="0" lang="az-Latn-AZ" altLang="en-US" sz="1300" b="0" i="0" u="none" strike="noStrike" cap="none" normalizeH="0" baseline="0">
+              <a:ln>
+                <a:noFill/>
+              </a:ln>
+              <a:solidFill>
+                <a:schemeClr val="tx1"/>
+              </a:solidFill>
+              <a:effectLst/>
+              <a:latin typeface="Arial" panose="020B0604020202020204" pitchFamily="34" charset="0"/>
+            </a:endParaRPr>
+          </a:p>
+          <a:p>
+            <a:pPr>
+              <a:lnSpc>
+                <a:spcPct val="150000"/>
+              </a:lnSpc>
+              <a:buNone/>
+            </a:pPr>
+            <a:r>
+              <a:rPr lang="az-Latn-AZ" altLang="en-US" sz="1300" b="1">
+                <a:solidFill>
+                  <a:srgbClr val="FF0000"/>
+                </a:solidFill>
+                <a:latin typeface="Arial" panose="020B0604020202020204" pitchFamily="34" charset="0"/>
+              </a:rPr>
+              <a:t>validate() </a:t>
+            </a:r>
+            <a:r>
+              <a:rPr lang="az-Latn-AZ" altLang="en-US" sz="1300">
+                <a:latin typeface="Arial" panose="020B0604020202020204" pitchFamily="34" charset="0"/>
+              </a:rPr>
+              <a:t>funksiyasındakı </a:t>
+            </a:r>
+            <a:r>
+              <a:rPr lang="az-Latn-AZ" altLang="en-US" sz="1300" b="1">
+                <a:latin typeface="Arial" panose="020B0604020202020204" pitchFamily="34" charset="0"/>
+              </a:rPr>
+              <a:t>İMAGE</a:t>
+            </a:r>
+            <a:r>
+              <a:rPr lang="az-Latn-AZ" altLang="en-US" sz="1300">
+                <a:latin typeface="Arial" panose="020B0604020202020204" pitchFamily="34" charset="0"/>
+              </a:rPr>
+              <a:t> olan hissəni çıxarmaq lazımdır. Əks halda xəbərdarlıq mesajı görəcəyik və postu yeniləmək mümkün olmayacaq. Çünki şəkli post yaradan zaman əlavə edirik və sonradan bəlkə dəyişmək istəmirik ? Bəlkə eyni şəkil qalacaq və biz sadəcə TİTLE olan hissəni dəyişəcəyik ? </a:t>
+            </a:r>
+          </a:p>
+          <a:p>
+            <a:pPr>
+              <a:lnSpc>
+                <a:spcPct val="150000"/>
+              </a:lnSpc>
+              <a:buNone/>
+            </a:pPr>
+            <a:endParaRPr kumimoji="0" lang="az-Latn-AZ" altLang="en-US" sz="1300" b="0" i="0" u="none" strike="noStrike" cap="none" normalizeH="0" baseline="0">
+              <a:ln>
+                <a:noFill/>
+              </a:ln>
+              <a:solidFill>
+                <a:schemeClr val="tx1"/>
+              </a:solidFill>
+              <a:effectLst/>
+              <a:latin typeface="Arial" panose="020B0604020202020204" pitchFamily="34" charset="0"/>
+            </a:endParaRPr>
+          </a:p>
+          <a:p>
+            <a:pPr>
+              <a:lnSpc>
+                <a:spcPct val="150000"/>
+              </a:lnSpc>
+              <a:buNone/>
+            </a:pPr>
+            <a:r>
+              <a:rPr lang="az-Latn-AZ" altLang="en-US" sz="1300">
+                <a:latin typeface="Arial" panose="020B0604020202020204" pitchFamily="34" charset="0"/>
+              </a:rPr>
+              <a:t>Bunun üçün əgər </a:t>
+            </a:r>
+            <a:r>
+              <a:rPr lang="az-Latn-AZ" altLang="en-US" sz="1300" b="1">
+                <a:latin typeface="Arial" panose="020B0604020202020204" pitchFamily="34" charset="0"/>
+              </a:rPr>
+              <a:t>İMAGE</a:t>
+            </a:r>
+            <a:r>
+              <a:rPr lang="az-Latn-AZ" altLang="en-US" sz="1300">
+                <a:latin typeface="Arial" panose="020B0604020202020204" pitchFamily="34" charset="0"/>
+              </a:rPr>
+              <a:t> olan hissəni </a:t>
+            </a:r>
+            <a:r>
+              <a:rPr lang="az-Latn-AZ" altLang="en-US" sz="1300" b="1">
+                <a:latin typeface="Arial" panose="020B0604020202020204" pitchFamily="34" charset="0"/>
+              </a:rPr>
+              <a:t>validate() </a:t>
+            </a:r>
+            <a:r>
+              <a:rPr lang="az-Latn-AZ" altLang="en-US" sz="1300">
+                <a:latin typeface="Arial" panose="020B0604020202020204" pitchFamily="34" charset="0"/>
+              </a:rPr>
+              <a:t>funksiyasından çıxarmasaq aşağıdakı kimi xəta mesajı görəcəyik. </a:t>
+            </a:r>
+          </a:p>
+          <a:p>
+            <a:pPr>
+              <a:lnSpc>
+                <a:spcPct val="150000"/>
+              </a:lnSpc>
+              <a:buNone/>
+            </a:pPr>
+            <a:endParaRPr kumimoji="0" lang="az-Latn-AZ" altLang="en-US" sz="1300" b="0" i="0" u="none" strike="noStrike" cap="none" normalizeH="0" baseline="0">
+              <a:ln>
+                <a:noFill/>
+              </a:ln>
+              <a:solidFill>
+                <a:schemeClr val="tx1"/>
+              </a:solidFill>
+              <a:effectLst/>
+              <a:latin typeface="Arial" panose="020B0604020202020204" pitchFamily="34" charset="0"/>
+            </a:endParaRPr>
+          </a:p>
+          <a:p>
+            <a:pPr>
+              <a:lnSpc>
+                <a:spcPct val="150000"/>
+              </a:lnSpc>
+              <a:buNone/>
+            </a:pPr>
+            <a:r>
+              <a:rPr lang="az-Latn-AZ" altLang="en-US" sz="1300">
+                <a:latin typeface="Arial" panose="020B0604020202020204" pitchFamily="34" charset="0"/>
+              </a:rPr>
+              <a:t>Xəbərdarlıq mesajlarını görə bilməmiz üçün </a:t>
+            </a:r>
+            <a:r>
+              <a:rPr lang="az-Latn-AZ" altLang="en-US" sz="1300" b="1">
+                <a:latin typeface="Arial" panose="020B0604020202020204" pitchFamily="34" charset="0"/>
+              </a:rPr>
+              <a:t>create.blade.php </a:t>
+            </a:r>
+            <a:r>
+              <a:rPr lang="az-Latn-AZ" altLang="en-US" sz="1300">
+                <a:latin typeface="Arial" panose="020B0604020202020204" pitchFamily="34" charset="0"/>
+              </a:rPr>
+              <a:t>faylındakı ALERT olan </a:t>
+            </a:r>
+            <a:r>
+              <a:rPr lang="az-Latn-AZ" altLang="en-US" sz="1300" b="1">
+                <a:latin typeface="Arial" panose="020B0604020202020204" pitchFamily="34" charset="0"/>
+              </a:rPr>
+              <a:t>div</a:t>
+            </a:r>
+            <a:r>
+              <a:rPr lang="az-Latn-AZ" altLang="en-US" sz="1300">
+                <a:latin typeface="Arial" panose="020B0604020202020204" pitchFamily="34" charset="0"/>
+              </a:rPr>
+              <a:t> tag -ini </a:t>
+            </a:r>
+            <a:r>
+              <a:rPr lang="az-Latn-AZ" altLang="en-US" sz="1300" b="1">
+                <a:latin typeface="Arial" panose="020B0604020202020204" pitchFamily="34" charset="0"/>
+              </a:rPr>
+              <a:t>edit.blade.php </a:t>
+            </a:r>
+            <a:r>
+              <a:rPr lang="az-Latn-AZ" altLang="en-US" sz="1300">
+                <a:latin typeface="Arial" panose="020B0604020202020204" pitchFamily="34" charset="0"/>
+              </a:rPr>
+              <a:t>faylına köçürmək lazımdır. Növbəti slayd....</a:t>
+            </a:r>
+            <a:endParaRPr kumimoji="0" lang="en-US" altLang="en-US" sz="1300" b="0" i="0" u="none" strike="noStrike" cap="none" normalizeH="0" baseline="0">
+              <a:ln>
+                <a:noFill/>
+              </a:ln>
+              <a:solidFill>
+                <a:schemeClr val="tx1"/>
+              </a:solidFill>
+              <a:effectLst/>
+              <a:latin typeface="Arial" panose="020B0604020202020204" pitchFamily="34" charset="0"/>
+            </a:endParaRPr>
+          </a:p>
+        </p:txBody>
+      </p:sp>
+      <p:pic>
+        <p:nvPicPr>
+          <p:cNvPr id="4" name="Picture 3">
+            <a:extLst>
+              <a:ext uri="{FF2B5EF4-FFF2-40B4-BE49-F238E27FC236}">
+                <a16:creationId xmlns:a16="http://schemas.microsoft.com/office/drawing/2014/main" id="{8C904B20-FA49-8396-28F0-681DF2158A06}"/>
+              </a:ext>
+            </a:extLst>
+          </p:cNvPr>
+          <p:cNvPicPr>
+            <a:picLocks noChangeAspect="1"/>
+          </p:cNvPicPr>
+          <p:nvPr/>
+        </p:nvPicPr>
+        <p:blipFill>
+          <a:blip r:embed="rId2"/>
+          <a:stretch>
+            <a:fillRect/>
+          </a:stretch>
+        </p:blipFill>
+        <p:spPr>
+          <a:xfrm>
+            <a:off x="6532787" y="0"/>
+            <a:ext cx="5659213" cy="6858000"/>
+          </a:xfrm>
+          <a:prstGeom prst="rect">
+            <a:avLst/>
+          </a:prstGeom>
+        </p:spPr>
+      </p:pic>
+      <p:pic>
+        <p:nvPicPr>
+          <p:cNvPr id="6" name="Picture 5">
+            <a:extLst>
+              <a:ext uri="{FF2B5EF4-FFF2-40B4-BE49-F238E27FC236}">
+                <a16:creationId xmlns:a16="http://schemas.microsoft.com/office/drawing/2014/main" id="{68A98455-0286-3AAB-2A35-9C9597D06BF0}"/>
+              </a:ext>
+            </a:extLst>
+          </p:cNvPr>
+          <p:cNvPicPr>
+            <a:picLocks noChangeAspect="1"/>
+          </p:cNvPicPr>
+          <p:nvPr/>
+        </p:nvPicPr>
+        <p:blipFill>
+          <a:blip r:embed="rId3"/>
+          <a:stretch>
+            <a:fillRect/>
+          </a:stretch>
+        </p:blipFill>
+        <p:spPr>
+          <a:xfrm>
+            <a:off x="1" y="4656840"/>
+            <a:ext cx="3452624" cy="2201159"/>
+          </a:xfrm>
+          <a:prstGeom prst="rect">
+            <a:avLst/>
+          </a:prstGeom>
+          <a:ln w="38100" cap="sq">
+            <a:solidFill>
+              <a:srgbClr val="000000"/>
+            </a:solidFill>
+            <a:prstDash val="solid"/>
+            <a:miter lim="800000"/>
+          </a:ln>
+          <a:effectLst>
+            <a:outerShdw blurRad="50800" dist="38100" dir="2700000" algn="tl" rotWithShape="0">
+              <a:srgbClr val="000000">
+                <a:alpha val="43000"/>
+              </a:srgbClr>
+            </a:outerShdw>
+          </a:effectLst>
+        </p:spPr>
+      </p:pic>
+    </p:spTree>
+    <p:extLst>
+      <p:ext uri="{BB962C8B-B14F-4D97-AF65-F5344CB8AC3E}">
+        <p14:creationId xmlns:p14="http://schemas.microsoft.com/office/powerpoint/2010/main" val="215580519"/>
+      </p:ext>
+    </p:extLst>
+  </p:cSld>
+  <p:clrMapOvr>
+    <a:masterClrMapping/>
+  </p:clrMapOvr>
+</p:sld>
+</file>
+
+<file path=ppt/slides/slide11.xml><?xml version="1.0" encoding="utf-8"?>
+<p:sld xmlns:a="http://schemas.openxmlformats.org/drawingml/2006/main" xmlns:r="http://schemas.openxmlformats.org/officeDocument/2006/relationships" xmlns:p="http://schemas.openxmlformats.org/presentationml/2006/main">
+  <p:cSld>
+    <p:spTree>
+      <p:nvGrpSpPr>
+        <p:cNvPr id="1" name="">
+          <a:extLst>
+            <a:ext uri="{FF2B5EF4-FFF2-40B4-BE49-F238E27FC236}">
+              <a16:creationId xmlns:a16="http://schemas.microsoft.com/office/drawing/2014/main" id="{38E972FA-83ED-B930-3C9E-56818712FACB}"/>
+            </a:ext>
+          </a:extLst>
+        </p:cNvPr>
+        <p:cNvGrpSpPr/>
+        <p:nvPr/>
+      </p:nvGrpSpPr>
+      <p:grpSpPr>
+        <a:xfrm>
+          <a:off x="0" y="0"/>
+          <a:ext cx="0" cy="0"/>
+          <a:chOff x="0" y="0"/>
+          <a:chExt cx="0" cy="0"/>
+        </a:xfrm>
+      </p:grpSpPr>
+      <p:sp>
+        <p:nvSpPr>
+          <p:cNvPr id="3" name="TextBox 2">
+            <a:extLst>
+              <a:ext uri="{FF2B5EF4-FFF2-40B4-BE49-F238E27FC236}">
+                <a16:creationId xmlns:a16="http://schemas.microsoft.com/office/drawing/2014/main" id="{55A35EBD-69C0-1881-AAD8-93D516FA9AE4}"/>
+              </a:ext>
+            </a:extLst>
+          </p:cNvPr>
+          <p:cNvSpPr txBox="1"/>
+          <p:nvPr/>
+        </p:nvSpPr>
+        <p:spPr>
+          <a:xfrm>
+            <a:off x="217714" y="255046"/>
             <a:ext cx="11756571" cy="355354"/>
           </a:xfrm>
           <a:prstGeom prst="rect">
@@ -3370,6 +4295,1249 @@
               <a:buNone/>
             </a:pPr>
             <a:r>
+              <a:rPr lang="az-Latn-AZ" altLang="en-US" sz="1300">
+                <a:latin typeface="Arial" panose="020B0604020202020204" pitchFamily="34" charset="0"/>
+              </a:rPr>
+              <a:t>Növbəti slaydda, şəkil ilə əlaqəli hissəni redaktə edərək ətraflı məlumat verəcəm....</a:t>
+            </a:r>
+            <a:endParaRPr kumimoji="0" lang="en-US" altLang="en-US" sz="1300" b="0" i="0" u="none" strike="noStrike" cap="none" normalizeH="0" baseline="0">
+              <a:ln>
+                <a:noFill/>
+              </a:ln>
+              <a:solidFill>
+                <a:schemeClr val="tx1"/>
+              </a:solidFill>
+              <a:effectLst/>
+              <a:latin typeface="Arial" panose="020B0604020202020204" pitchFamily="34" charset="0"/>
+            </a:endParaRPr>
+          </a:p>
+        </p:txBody>
+      </p:sp>
+      <p:pic>
+        <p:nvPicPr>
+          <p:cNvPr id="4" name="Picture 3">
+            <a:extLst>
+              <a:ext uri="{FF2B5EF4-FFF2-40B4-BE49-F238E27FC236}">
+                <a16:creationId xmlns:a16="http://schemas.microsoft.com/office/drawing/2014/main" id="{846F3604-2CE5-E487-341B-E98A1893F2ED}"/>
+              </a:ext>
+            </a:extLst>
+          </p:cNvPr>
+          <p:cNvPicPr>
+            <a:picLocks noChangeAspect="1"/>
+          </p:cNvPicPr>
+          <p:nvPr/>
+        </p:nvPicPr>
+        <p:blipFill>
+          <a:blip r:embed="rId2"/>
+          <a:stretch>
+            <a:fillRect/>
+          </a:stretch>
+        </p:blipFill>
+        <p:spPr>
+          <a:xfrm>
+            <a:off x="4981959" y="2013814"/>
+            <a:ext cx="6992326" cy="4734586"/>
+          </a:xfrm>
+          <a:prstGeom prst="rect">
+            <a:avLst/>
+          </a:prstGeom>
+        </p:spPr>
+      </p:pic>
+    </p:spTree>
+    <p:extLst>
+      <p:ext uri="{BB962C8B-B14F-4D97-AF65-F5344CB8AC3E}">
+        <p14:creationId xmlns:p14="http://schemas.microsoft.com/office/powerpoint/2010/main" val="2212238654"/>
+      </p:ext>
+    </p:extLst>
+  </p:cSld>
+  <p:clrMapOvr>
+    <a:masterClrMapping/>
+  </p:clrMapOvr>
+</p:sld>
+</file>
+
+<file path=ppt/slides/slide12.xml><?xml version="1.0" encoding="utf-8"?>
+<p:sld xmlns:a="http://schemas.openxmlformats.org/drawingml/2006/main" xmlns:r="http://schemas.openxmlformats.org/officeDocument/2006/relationships" xmlns:p="http://schemas.openxmlformats.org/presentationml/2006/main">
+  <p:cSld>
+    <p:spTree>
+      <p:nvGrpSpPr>
+        <p:cNvPr id="1" name="">
+          <a:extLst>
+            <a:ext uri="{FF2B5EF4-FFF2-40B4-BE49-F238E27FC236}">
+              <a16:creationId xmlns:a16="http://schemas.microsoft.com/office/drawing/2014/main" id="{809C5FA9-1422-E6D4-EC60-7C1B2BD11FF1}"/>
+            </a:ext>
+          </a:extLst>
+        </p:cNvPr>
+        <p:cNvGrpSpPr/>
+        <p:nvPr/>
+      </p:nvGrpSpPr>
+      <p:grpSpPr>
+        <a:xfrm>
+          <a:off x="0" y="0"/>
+          <a:ext cx="0" cy="0"/>
+          <a:chOff x="0" y="0"/>
+          <a:chExt cx="0" cy="0"/>
+        </a:xfrm>
+      </p:grpSpPr>
+      <p:sp>
+        <p:nvSpPr>
+          <p:cNvPr id="3" name="TextBox 2">
+            <a:extLst>
+              <a:ext uri="{FF2B5EF4-FFF2-40B4-BE49-F238E27FC236}">
+                <a16:creationId xmlns:a16="http://schemas.microsoft.com/office/drawing/2014/main" id="{B6CEA6E8-C28B-6D91-B700-97B03CAB6B46}"/>
+              </a:ext>
+            </a:extLst>
+          </p:cNvPr>
+          <p:cNvSpPr txBox="1"/>
+          <p:nvPr/>
+        </p:nvSpPr>
+        <p:spPr>
+          <a:xfrm>
+            <a:off x="217714" y="255046"/>
+            <a:ext cx="7182327" cy="6296275"/>
+          </a:xfrm>
+          <a:prstGeom prst="rect">
+            <a:avLst/>
+          </a:prstGeom>
+          <a:noFill/>
+        </p:spPr>
+        <p:txBody>
+          <a:bodyPr wrap="square">
+            <a:spAutoFit/>
+          </a:bodyPr>
+          <a:lstStyle/>
+          <a:p>
+            <a:pPr>
+              <a:lnSpc>
+                <a:spcPct val="150000"/>
+              </a:lnSpc>
+              <a:buNone/>
+            </a:pPr>
+            <a:r>
+              <a:rPr kumimoji="0" lang="en-US" altLang="en-US" sz="1000" b="1" i="0" u="none" strike="noStrike" cap="none" normalizeH="0" baseline="0">
+                <a:ln>
+                  <a:noFill/>
+                </a:ln>
+                <a:solidFill>
+                  <a:srgbClr val="FF0000"/>
+                </a:solidFill>
+                <a:effectLst/>
+                <a:latin typeface="Arial" panose="020B0604020202020204" pitchFamily="34" charset="0"/>
+              </a:rPr>
+              <a:t>update() </a:t>
+            </a:r>
+            <a:r>
+              <a:rPr kumimoji="0" lang="en-US" altLang="en-US" sz="1000" b="0" i="0" u="none" strike="noStrike" cap="none" normalizeH="0" baseline="0">
+                <a:ln>
+                  <a:noFill/>
+                </a:ln>
+                <a:solidFill>
+                  <a:schemeClr val="tx1"/>
+                </a:solidFill>
+                <a:effectLst/>
+                <a:latin typeface="Arial" panose="020B0604020202020204" pitchFamily="34" charset="0"/>
+              </a:rPr>
+              <a:t>metodu bir postun məlumatlarını (başlıq, kateqoriya, açıqlama və şəkil) yeniləyir. Əgər yeni şəkil yüklənibsə, əvvəlki şəkil silinir və yeni şəkil yadda saxlanılır.</a:t>
+            </a:r>
+            <a:endParaRPr kumimoji="0" lang="az-Latn-AZ" altLang="en-US" sz="1000" b="0" i="0" u="none" strike="noStrike" cap="none" normalizeH="0" baseline="0">
+              <a:ln>
+                <a:noFill/>
+              </a:ln>
+              <a:solidFill>
+                <a:schemeClr val="tx1"/>
+              </a:solidFill>
+              <a:effectLst/>
+              <a:latin typeface="Arial" panose="020B0604020202020204" pitchFamily="34" charset="0"/>
+            </a:endParaRPr>
+          </a:p>
+          <a:p>
+            <a:pPr>
+              <a:lnSpc>
+                <a:spcPct val="150000"/>
+              </a:lnSpc>
+              <a:buNone/>
+            </a:pPr>
+            <a:endParaRPr kumimoji="0" lang="az-Latn-AZ" altLang="en-US" sz="1000" b="0" i="0" u="none" strike="noStrike" cap="none" normalizeH="0" baseline="0">
+              <a:ln>
+                <a:noFill/>
+              </a:ln>
+              <a:solidFill>
+                <a:schemeClr val="tx1"/>
+              </a:solidFill>
+              <a:effectLst/>
+              <a:latin typeface="Arial" panose="020B0604020202020204" pitchFamily="34" charset="0"/>
+            </a:endParaRPr>
+          </a:p>
+          <a:p>
+            <a:pPr>
+              <a:lnSpc>
+                <a:spcPct val="150000"/>
+              </a:lnSpc>
+              <a:buNone/>
+            </a:pPr>
+            <a:r>
+              <a:rPr kumimoji="0" lang="en-US" altLang="en-US" sz="1000" b="1" i="0" u="none" strike="noStrike" cap="none" normalizeH="0" baseline="0">
+                <a:ln>
+                  <a:noFill/>
+                </a:ln>
+                <a:effectLst/>
+                <a:latin typeface="Arial" panose="020B0604020202020204" pitchFamily="34" charset="0"/>
+              </a:rPr>
+              <a:t>Niyə image üçün validation ayrıca yazılıb və </a:t>
+            </a:r>
+            <a:r>
+              <a:rPr kumimoji="0" lang="en-US" altLang="en-US" sz="1000" b="1" i="0" u="none" strike="noStrike" cap="none" normalizeH="0" baseline="0">
+                <a:ln>
+                  <a:noFill/>
+                </a:ln>
+                <a:solidFill>
+                  <a:srgbClr val="FF0000"/>
+                </a:solidFill>
+                <a:effectLst/>
+                <a:latin typeface="Arial" panose="020B0604020202020204" pitchFamily="34" charset="0"/>
+              </a:rPr>
+              <a:t>hasFile() </a:t>
+            </a:r>
+            <a:r>
+              <a:rPr kumimoji="0" lang="en-US" altLang="en-US" sz="1000" b="1" i="0" u="none" strike="noStrike" cap="none" normalizeH="0" baseline="0">
+                <a:ln>
+                  <a:noFill/>
+                </a:ln>
+                <a:effectLst/>
+                <a:latin typeface="Arial" panose="020B0604020202020204" pitchFamily="34" charset="0"/>
+              </a:rPr>
+              <a:t>ilə yoxlanılıb?</a:t>
+            </a:r>
+            <a:endParaRPr lang="az-Latn-AZ" altLang="en-US" sz="1000" b="1">
+              <a:latin typeface="Arial" panose="020B0604020202020204" pitchFamily="34" charset="0"/>
+            </a:endParaRPr>
+          </a:p>
+          <a:p>
+            <a:pPr>
+              <a:lnSpc>
+                <a:spcPct val="150000"/>
+              </a:lnSpc>
+              <a:buNone/>
+            </a:pPr>
+            <a:r>
+              <a:rPr kumimoji="0" lang="en-US" altLang="en-US" sz="1000" b="0" i="0" u="none" strike="noStrike" cap="none" normalizeH="0" baseline="0">
+                <a:ln>
+                  <a:noFill/>
+                </a:ln>
+                <a:solidFill>
+                  <a:schemeClr val="tx1"/>
+                </a:solidFill>
+                <a:effectLst/>
+                <a:latin typeface="Arial" panose="020B0604020202020204" pitchFamily="34" charset="0"/>
+              </a:rPr>
+              <a:t>✅ </a:t>
+            </a:r>
+            <a:r>
+              <a:rPr kumimoji="0" lang="en-US" altLang="en-US" sz="1000" b="1" i="0" u="none" strike="noStrike" cap="none" normalizeH="0" baseline="0">
+                <a:ln>
+                  <a:noFill/>
+                </a:ln>
+                <a:solidFill>
+                  <a:srgbClr val="0070C0"/>
+                </a:solidFill>
+                <a:effectLst/>
+                <a:latin typeface="Arial" panose="020B0604020202020204" pitchFamily="34" charset="0"/>
+              </a:rPr>
+              <a:t>Səbəb 1</a:t>
+            </a:r>
+            <a:r>
+              <a:rPr kumimoji="0" lang="en-US" altLang="en-US" sz="1000" b="0" i="0" u="none" strike="noStrike" cap="none" normalizeH="0" baseline="0">
+                <a:ln>
+                  <a:noFill/>
+                </a:ln>
+                <a:solidFill>
+                  <a:schemeClr val="tx1"/>
+                </a:solidFill>
+                <a:effectLst/>
+                <a:latin typeface="Arial" panose="020B0604020202020204" pitchFamily="34" charset="0"/>
+              </a:rPr>
+              <a:t>: ŞƏKİL göndərilməyə də bilər</a:t>
+            </a:r>
+          </a:p>
+          <a:p>
+            <a:pPr marL="171450" indent="-171450">
+              <a:lnSpc>
+                <a:spcPct val="150000"/>
+              </a:lnSpc>
+              <a:buFont typeface="Arial" panose="020B0604020202020204" pitchFamily="34" charset="0"/>
+              <a:buChar char="•"/>
+            </a:pPr>
+            <a:r>
+              <a:rPr kumimoji="0" lang="en-US" altLang="en-US" sz="1000" b="0" i="0" u="none" strike="noStrike" cap="none" normalizeH="0" baseline="0">
+                <a:ln>
+                  <a:noFill/>
+                </a:ln>
+                <a:solidFill>
+                  <a:schemeClr val="tx1"/>
+                </a:solidFill>
+                <a:effectLst/>
+                <a:latin typeface="Arial" panose="020B0604020202020204" pitchFamily="34" charset="0"/>
+              </a:rPr>
+              <a:t>image sahəsi formda opsional ola bilər (yəni istifadəçi şəkil dəyişmək istəməyə bilər).</a:t>
+            </a:r>
+          </a:p>
+          <a:p>
+            <a:pPr marL="171450" indent="-171450">
+              <a:lnSpc>
+                <a:spcPct val="150000"/>
+              </a:lnSpc>
+              <a:buFont typeface="Arial" panose="020B0604020202020204" pitchFamily="34" charset="0"/>
+              <a:buChar char="•"/>
+            </a:pPr>
+            <a:r>
+              <a:rPr kumimoji="0" lang="en-US" altLang="en-US" sz="1000" b="0" i="0" u="none" strike="noStrike" cap="none" normalizeH="0" baseline="0">
+                <a:ln>
+                  <a:noFill/>
+                </a:ln>
+                <a:solidFill>
+                  <a:schemeClr val="tx1"/>
+                </a:solidFill>
+                <a:effectLst/>
+                <a:latin typeface="Arial" panose="020B0604020202020204" pitchFamily="34" charset="0"/>
+              </a:rPr>
+              <a:t>Əgər image validation-u əsas validasiyaya daxil etsək və formda şəkil göndərilməsə, o zaman validation uğursuz olacaq.</a:t>
+            </a:r>
+            <a:endParaRPr kumimoji="0" lang="az-Latn-AZ" altLang="en-US" sz="1000" b="0" i="0" u="none" strike="noStrike" cap="none" normalizeH="0" baseline="0">
+              <a:ln>
+                <a:noFill/>
+              </a:ln>
+              <a:solidFill>
+                <a:schemeClr val="tx1"/>
+              </a:solidFill>
+              <a:effectLst/>
+              <a:latin typeface="Arial" panose="020B0604020202020204" pitchFamily="34" charset="0"/>
+            </a:endParaRPr>
+          </a:p>
+          <a:p>
+            <a:pPr>
+              <a:lnSpc>
+                <a:spcPct val="150000"/>
+              </a:lnSpc>
+            </a:pPr>
+            <a:endParaRPr kumimoji="0" lang="az-Latn-AZ" altLang="en-US" sz="1000" b="0" i="0" u="none" strike="noStrike" cap="none" normalizeH="0" baseline="0">
+              <a:ln>
+                <a:noFill/>
+              </a:ln>
+              <a:solidFill>
+                <a:schemeClr val="tx1"/>
+              </a:solidFill>
+              <a:effectLst/>
+              <a:latin typeface="Arial" panose="020B0604020202020204" pitchFamily="34" charset="0"/>
+            </a:endParaRPr>
+          </a:p>
+          <a:p>
+            <a:pPr>
+              <a:lnSpc>
+                <a:spcPct val="150000"/>
+              </a:lnSpc>
+            </a:pPr>
+            <a:r>
+              <a:rPr lang="az-Latn-AZ" altLang="en-US" sz="1000">
+                <a:latin typeface="Arial" panose="020B0604020202020204" pitchFamily="34" charset="0"/>
+              </a:rPr>
+              <a:t>✅ </a:t>
+            </a:r>
+            <a:r>
+              <a:rPr lang="az-Latn-AZ" altLang="en-US" sz="1000" b="1">
+                <a:solidFill>
+                  <a:srgbClr val="0070C0"/>
+                </a:solidFill>
+                <a:latin typeface="Arial" panose="020B0604020202020204" pitchFamily="34" charset="0"/>
+              </a:rPr>
+              <a:t>Səbəb 2</a:t>
+            </a:r>
+            <a:r>
+              <a:rPr lang="az-Latn-AZ" altLang="en-US" sz="1000">
+                <a:latin typeface="Arial" panose="020B0604020202020204" pitchFamily="34" charset="0"/>
+              </a:rPr>
+              <a:t>: hasFile('image') yoxlayır:</a:t>
+            </a:r>
+          </a:p>
+          <a:p>
+            <a:pPr marL="171450" indent="-171450">
+              <a:lnSpc>
+                <a:spcPct val="150000"/>
+              </a:lnSpc>
+              <a:buFont typeface="Arial" panose="020B0604020202020204" pitchFamily="34" charset="0"/>
+              <a:buChar char="•"/>
+            </a:pPr>
+            <a:r>
+              <a:rPr lang="az-Latn-AZ" altLang="en-US" sz="1000">
+                <a:latin typeface="Arial" panose="020B0604020202020204" pitchFamily="34" charset="0"/>
+              </a:rPr>
+              <a:t>image input sahəsinə fayl əlavə olunub-olunmadığını yoxlayır.</a:t>
+            </a:r>
+          </a:p>
+          <a:p>
+            <a:pPr marL="171450" indent="-171450">
+              <a:lnSpc>
+                <a:spcPct val="150000"/>
+              </a:lnSpc>
+              <a:buFont typeface="Arial" panose="020B0604020202020204" pitchFamily="34" charset="0"/>
+              <a:buChar char="•"/>
+            </a:pPr>
+            <a:r>
+              <a:rPr lang="az-Latn-AZ" altLang="en-US" sz="1000">
+                <a:latin typeface="Arial" panose="020B0604020202020204" pitchFamily="34" charset="0"/>
+              </a:rPr>
+              <a:t>Yalnız fayl varsa, validation və şəkil yükləmə əməliyyatı aparılır.</a:t>
+            </a:r>
+          </a:p>
+          <a:p>
+            <a:pPr>
+              <a:lnSpc>
+                <a:spcPct val="150000"/>
+              </a:lnSpc>
+            </a:pPr>
+            <a:endParaRPr lang="az-Latn-AZ" altLang="en-US" sz="1000">
+              <a:latin typeface="Arial" panose="020B0604020202020204" pitchFamily="34" charset="0"/>
+            </a:endParaRPr>
+          </a:p>
+          <a:p>
+            <a:pPr>
+              <a:lnSpc>
+                <a:spcPct val="150000"/>
+              </a:lnSpc>
+            </a:pPr>
+            <a:r>
+              <a:rPr lang="az-Latn-AZ" altLang="en-US" sz="1000">
+                <a:latin typeface="Arial" panose="020B0604020202020204" pitchFamily="34" charset="0"/>
+              </a:rPr>
+              <a:t>✅ </a:t>
+            </a:r>
+            <a:r>
+              <a:rPr lang="az-Latn-AZ" altLang="en-US" sz="1000" b="1">
+                <a:solidFill>
+                  <a:srgbClr val="0070C0"/>
+                </a:solidFill>
+                <a:latin typeface="Arial" panose="020B0604020202020204" pitchFamily="34" charset="0"/>
+              </a:rPr>
+              <a:t>Beləliklə</a:t>
+            </a:r>
+            <a:r>
+              <a:rPr lang="az-Latn-AZ" altLang="en-US" sz="1000">
+                <a:latin typeface="Arial" panose="020B0604020202020204" pitchFamily="34" charset="0"/>
+              </a:rPr>
+              <a:t>:</a:t>
+            </a:r>
+          </a:p>
+          <a:p>
+            <a:pPr marL="171450" indent="-171450">
+              <a:lnSpc>
+                <a:spcPct val="150000"/>
+              </a:lnSpc>
+              <a:buFont typeface="Arial" panose="020B0604020202020204" pitchFamily="34" charset="0"/>
+              <a:buChar char="•"/>
+            </a:pPr>
+            <a:r>
+              <a:rPr lang="az-Latn-AZ" altLang="en-US" sz="1000">
+                <a:latin typeface="Arial" panose="020B0604020202020204" pitchFamily="34" charset="0"/>
+              </a:rPr>
+              <a:t>Əgər istifadəçi şəkil yükləyibsə — heç bir şəkil prosesi işləmir.</a:t>
+            </a:r>
+          </a:p>
+          <a:p>
+            <a:pPr marL="171450" indent="-171450">
+              <a:lnSpc>
+                <a:spcPct val="150000"/>
+              </a:lnSpc>
+              <a:buFont typeface="Arial" panose="020B0604020202020204" pitchFamily="34" charset="0"/>
+              <a:buChar char="•"/>
+            </a:pPr>
+            <a:r>
+              <a:rPr lang="az-Latn-AZ" altLang="en-US" sz="1000">
+                <a:latin typeface="Arial" panose="020B0604020202020204" pitchFamily="34" charset="0"/>
+              </a:rPr>
+              <a:t>Əgər şəkil varsa, həm doğrulama (validate()), həm də şəkil yeniləmə baş verir.</a:t>
+            </a:r>
+          </a:p>
+          <a:p>
+            <a:pPr>
+              <a:lnSpc>
+                <a:spcPct val="150000"/>
+              </a:lnSpc>
+            </a:pPr>
+            <a:endParaRPr kumimoji="0" lang="az-Latn-AZ" altLang="en-US" sz="1000" b="0" i="0" u="none" strike="noStrike" cap="none" normalizeH="0" baseline="0">
+              <a:ln>
+                <a:noFill/>
+              </a:ln>
+              <a:solidFill>
+                <a:schemeClr val="tx1"/>
+              </a:solidFill>
+              <a:effectLst/>
+              <a:latin typeface="Arial" panose="020B0604020202020204" pitchFamily="34" charset="0"/>
+            </a:endParaRPr>
+          </a:p>
+          <a:p>
+            <a:pPr>
+              <a:lnSpc>
+                <a:spcPct val="150000"/>
+              </a:lnSpc>
+            </a:pPr>
+            <a:endParaRPr lang="az-Latn-AZ" altLang="en-US" sz="1000">
+              <a:latin typeface="Arial" panose="020B0604020202020204" pitchFamily="34" charset="0"/>
+            </a:endParaRPr>
+          </a:p>
+          <a:p>
+            <a:pPr>
+              <a:lnSpc>
+                <a:spcPct val="150000"/>
+              </a:lnSpc>
+            </a:pPr>
+            <a:r>
+              <a:rPr kumimoji="0" lang="en-US" altLang="en-US" sz="1000" b="1" i="0" u="none" strike="noStrike" cap="none" normalizeH="0" baseline="0">
+                <a:ln>
+                  <a:noFill/>
+                </a:ln>
+                <a:effectLst/>
+                <a:latin typeface="Arial" panose="020B0604020202020204" pitchFamily="34" charset="0"/>
+              </a:rPr>
+              <a:t>Niyə</a:t>
+            </a:r>
+            <a:r>
+              <a:rPr kumimoji="0" lang="en-US" altLang="en-US" sz="1000" b="1" i="0" u="none" strike="noStrike" cap="none" normalizeH="0" baseline="0">
+                <a:ln>
+                  <a:noFill/>
+                </a:ln>
+                <a:solidFill>
+                  <a:srgbClr val="0070C0"/>
+                </a:solidFill>
+                <a:effectLst/>
+                <a:latin typeface="Arial" panose="020B0604020202020204" pitchFamily="34" charset="0"/>
+              </a:rPr>
+              <a:t> </a:t>
+            </a:r>
+            <a:r>
+              <a:rPr kumimoji="0" lang="en-US" altLang="en-US" sz="1000" b="1" i="0" u="none" strike="noStrike" cap="none" normalizeH="0" baseline="0">
+                <a:ln>
+                  <a:noFill/>
+                </a:ln>
+                <a:solidFill>
+                  <a:srgbClr val="FF0000"/>
+                </a:solidFill>
+                <a:effectLst/>
+                <a:latin typeface="Arial" panose="020B0604020202020204" pitchFamily="34" charset="0"/>
+              </a:rPr>
+              <a:t>$post = Post::findOrFail($id);</a:t>
+            </a:r>
+            <a:r>
+              <a:rPr kumimoji="0" lang="en-US" altLang="en-US" sz="1000" b="1" i="0" u="none" strike="noStrike" cap="none" normalizeH="0" baseline="0">
+                <a:ln>
+                  <a:noFill/>
+                </a:ln>
+                <a:solidFill>
+                  <a:srgbClr val="00B050"/>
+                </a:solidFill>
+                <a:effectLst/>
+                <a:latin typeface="Arial" panose="020B0604020202020204" pitchFamily="34" charset="0"/>
+              </a:rPr>
+              <a:t> if </a:t>
+            </a:r>
+            <a:r>
+              <a:rPr kumimoji="0" lang="en-US" altLang="en-US" sz="1000" b="1" i="0" u="none" strike="noStrike" cap="none" normalizeH="0" baseline="0">
+                <a:ln>
+                  <a:noFill/>
+                </a:ln>
+                <a:effectLst/>
+                <a:latin typeface="Arial" panose="020B0604020202020204" pitchFamily="34" charset="0"/>
+              </a:rPr>
+              <a:t>şərtindən əvvəl yazılıb?</a:t>
+            </a:r>
+            <a:endParaRPr kumimoji="0" lang="az-Latn-AZ" altLang="en-US" sz="1000" b="1" i="0" u="none" strike="noStrike" cap="none" normalizeH="0" baseline="0">
+              <a:ln>
+                <a:noFill/>
+              </a:ln>
+              <a:effectLst/>
+              <a:latin typeface="Arial" panose="020B0604020202020204" pitchFamily="34" charset="0"/>
+            </a:endParaRPr>
+          </a:p>
+          <a:p>
+            <a:pPr>
+              <a:lnSpc>
+                <a:spcPct val="150000"/>
+              </a:lnSpc>
+            </a:pPr>
+            <a:r>
+              <a:rPr kumimoji="0" lang="en-US" altLang="en-US" sz="1000" i="0" u="none" strike="noStrike" cap="none" normalizeH="0" baseline="0">
+                <a:ln>
+                  <a:noFill/>
+                </a:ln>
+                <a:effectLst/>
+                <a:latin typeface="Arial" panose="020B0604020202020204" pitchFamily="34" charset="0"/>
+              </a:rPr>
+              <a:t>✅ </a:t>
+            </a:r>
+            <a:r>
+              <a:rPr kumimoji="0" lang="en-US" altLang="en-US" sz="1000" b="1" i="0" u="none" strike="noStrike" cap="none" normalizeH="0" baseline="0">
+                <a:ln>
+                  <a:noFill/>
+                </a:ln>
+                <a:solidFill>
+                  <a:srgbClr val="0070C0"/>
+                </a:solidFill>
+                <a:effectLst/>
+                <a:latin typeface="Arial" panose="020B0604020202020204" pitchFamily="34" charset="0"/>
+              </a:rPr>
+              <a:t>Səbəb 1</a:t>
+            </a:r>
+            <a:r>
+              <a:rPr kumimoji="0" lang="en-US" altLang="en-US" sz="1000" i="0" u="none" strike="noStrike" cap="none" normalizeH="0" baseline="0">
+                <a:ln>
+                  <a:noFill/>
+                </a:ln>
+                <a:effectLst/>
+                <a:latin typeface="Arial" panose="020B0604020202020204" pitchFamily="34" charset="0"/>
+              </a:rPr>
+              <a:t>: </a:t>
+            </a:r>
+            <a:r>
+              <a:rPr kumimoji="0" lang="en-US" altLang="en-US" sz="1000" b="1" i="0" u="none" strike="noStrike" cap="none" normalizeH="0" baseline="0">
+                <a:ln>
+                  <a:noFill/>
+                </a:ln>
+                <a:effectLst/>
+                <a:latin typeface="Arial" panose="020B0604020202020204" pitchFamily="34" charset="0"/>
+              </a:rPr>
+              <a:t>$post </a:t>
+            </a:r>
+            <a:r>
+              <a:rPr kumimoji="0" lang="en-US" altLang="en-US" sz="1000" i="0" u="none" strike="noStrike" cap="none" normalizeH="0" baseline="0">
+                <a:ln>
+                  <a:noFill/>
+                </a:ln>
+                <a:effectLst/>
+                <a:latin typeface="Arial" panose="020B0604020202020204" pitchFamily="34" charset="0"/>
+              </a:rPr>
+              <a:t>obyektinə əvvəlcədən ehtiyacımız var</a:t>
+            </a:r>
+          </a:p>
+          <a:p>
+            <a:pPr marL="171450" indent="-171450">
+              <a:lnSpc>
+                <a:spcPct val="150000"/>
+              </a:lnSpc>
+              <a:buFont typeface="Arial" panose="020B0604020202020204" pitchFamily="34" charset="0"/>
+              <a:buChar char="•"/>
+            </a:pPr>
+            <a:r>
+              <a:rPr kumimoji="0" lang="en-US" altLang="en-US" sz="1000" i="0" u="none" strike="noStrike" cap="none" normalizeH="0" baseline="0">
+                <a:ln>
+                  <a:noFill/>
+                </a:ln>
+                <a:effectLst/>
+                <a:latin typeface="Arial" panose="020B0604020202020204" pitchFamily="34" charset="0"/>
+              </a:rPr>
+              <a:t>Bu obyekt olmadan </a:t>
+            </a:r>
+            <a:r>
+              <a:rPr kumimoji="0" lang="en-US" altLang="en-US" sz="1000" b="1" i="0" u="none" strike="noStrike" cap="none" normalizeH="0" baseline="0">
+                <a:ln>
+                  <a:noFill/>
+                </a:ln>
+                <a:effectLst/>
+                <a:latin typeface="Arial" panose="020B0604020202020204" pitchFamily="34" charset="0"/>
+              </a:rPr>
+              <a:t>$post-&gt;image</a:t>
+            </a:r>
+            <a:r>
+              <a:rPr kumimoji="0" lang="en-US" altLang="en-US" sz="1000" i="0" u="none" strike="noStrike" cap="none" normalizeH="0" baseline="0">
+                <a:ln>
+                  <a:noFill/>
+                </a:ln>
+                <a:effectLst/>
+                <a:latin typeface="Arial" panose="020B0604020202020204" pitchFamily="34" charset="0"/>
+              </a:rPr>
+              <a:t>, </a:t>
+            </a:r>
+            <a:r>
+              <a:rPr kumimoji="0" lang="en-US" altLang="en-US" sz="1000" b="1" i="0" u="none" strike="noStrike" cap="none" normalizeH="0" baseline="0">
+                <a:ln>
+                  <a:noFill/>
+                </a:ln>
+                <a:effectLst/>
+                <a:latin typeface="Arial" panose="020B0604020202020204" pitchFamily="34" charset="0"/>
+              </a:rPr>
+              <a:t>$post-&gt;title</a:t>
+            </a:r>
+            <a:r>
+              <a:rPr kumimoji="0" lang="en-US" altLang="en-US" sz="1000" i="0" u="none" strike="noStrike" cap="none" normalizeH="0" baseline="0">
+                <a:ln>
+                  <a:noFill/>
+                </a:ln>
+                <a:effectLst/>
+                <a:latin typeface="Arial" panose="020B0604020202020204" pitchFamily="34" charset="0"/>
+              </a:rPr>
+              <a:t>, </a:t>
+            </a:r>
+            <a:r>
+              <a:rPr kumimoji="0" lang="en-US" altLang="en-US" sz="1000" b="1" i="0" u="none" strike="noStrike" cap="none" normalizeH="0" baseline="0">
+                <a:ln>
+                  <a:noFill/>
+                </a:ln>
+                <a:effectLst/>
+                <a:latin typeface="Arial" panose="020B0604020202020204" pitchFamily="34" charset="0"/>
+              </a:rPr>
+              <a:t>$post-&gt;description </a:t>
+            </a:r>
+            <a:r>
+              <a:rPr kumimoji="0" lang="en-US" altLang="en-US" sz="1000" i="0" u="none" strike="noStrike" cap="none" normalizeH="0" baseline="0">
+                <a:ln>
+                  <a:noFill/>
+                </a:ln>
+                <a:effectLst/>
+                <a:latin typeface="Arial" panose="020B0604020202020204" pitchFamily="34" charset="0"/>
+              </a:rPr>
+              <a:t>və s. dəyişmək mümkün deyil.</a:t>
+            </a:r>
+          </a:p>
+          <a:p>
+            <a:pPr marL="171450" indent="-171450">
+              <a:lnSpc>
+                <a:spcPct val="150000"/>
+              </a:lnSpc>
+              <a:buFont typeface="Arial" panose="020B0604020202020204" pitchFamily="34" charset="0"/>
+              <a:buChar char="•"/>
+            </a:pPr>
+            <a:r>
+              <a:rPr kumimoji="0" lang="en-US" altLang="en-US" sz="1000" b="1" i="0" u="none" strike="noStrike" cap="none" normalizeH="0" baseline="0">
+                <a:ln>
+                  <a:noFill/>
+                </a:ln>
+                <a:effectLst/>
+                <a:latin typeface="Arial" panose="020B0604020202020204" pitchFamily="34" charset="0"/>
+              </a:rPr>
+              <a:t>hasFile() </a:t>
+            </a:r>
+            <a:r>
+              <a:rPr kumimoji="0" lang="en-US" altLang="en-US" sz="1000" i="0" u="none" strike="noStrike" cap="none" normalizeH="0" baseline="0">
+                <a:ln>
+                  <a:noFill/>
+                </a:ln>
+                <a:effectLst/>
+                <a:latin typeface="Arial" panose="020B0604020202020204" pitchFamily="34" charset="0"/>
+              </a:rPr>
+              <a:t>şərtinin içində də </a:t>
+            </a:r>
+            <a:r>
+              <a:rPr kumimoji="0" lang="en-US" altLang="en-US" sz="1000" b="1" i="0" u="none" strike="noStrike" cap="none" normalizeH="0" baseline="0">
+                <a:ln>
+                  <a:noFill/>
+                </a:ln>
+                <a:effectLst/>
+                <a:latin typeface="Arial" panose="020B0604020202020204" pitchFamily="34" charset="0"/>
+              </a:rPr>
+              <a:t>$post-&gt;image </a:t>
+            </a:r>
+            <a:r>
+              <a:rPr kumimoji="0" lang="en-US" altLang="en-US" sz="1000" i="0" u="none" strike="noStrike" cap="none" normalizeH="0" baseline="0">
+                <a:ln>
+                  <a:noFill/>
+                </a:ln>
+                <a:effectLst/>
+                <a:latin typeface="Arial" panose="020B0604020202020204" pitchFamily="34" charset="0"/>
+              </a:rPr>
+              <a:t>istifadə olunur (</a:t>
+            </a:r>
+            <a:r>
+              <a:rPr kumimoji="0" lang="en-US" altLang="en-US" sz="1000" b="1" i="0" u="none" strike="noStrike" cap="none" normalizeH="0" baseline="0">
+                <a:ln>
+                  <a:noFill/>
+                </a:ln>
+                <a:effectLst/>
+                <a:latin typeface="Arial" panose="020B0604020202020204" pitchFamily="34" charset="0"/>
+              </a:rPr>
+              <a:t>File::delete(...)</a:t>
+            </a:r>
+            <a:r>
+              <a:rPr kumimoji="0" lang="en-US" altLang="en-US" sz="1000" i="0" u="none" strike="noStrike" cap="none" normalizeH="0" baseline="0">
+                <a:ln>
+                  <a:noFill/>
+                </a:ln>
+                <a:effectLst/>
+                <a:latin typeface="Arial" panose="020B0604020202020204" pitchFamily="34" charset="0"/>
+              </a:rPr>
+              <a:t>).</a:t>
+            </a:r>
+          </a:p>
+          <a:p>
+            <a:pPr>
+              <a:lnSpc>
+                <a:spcPct val="150000"/>
+              </a:lnSpc>
+            </a:pPr>
+            <a:endParaRPr kumimoji="0" lang="en-US" altLang="en-US" sz="1000" i="0" u="none" strike="noStrike" cap="none" normalizeH="0" baseline="0">
+              <a:ln>
+                <a:noFill/>
+              </a:ln>
+              <a:effectLst/>
+              <a:latin typeface="Arial" panose="020B0604020202020204" pitchFamily="34" charset="0"/>
+            </a:endParaRPr>
+          </a:p>
+          <a:p>
+            <a:pPr>
+              <a:lnSpc>
+                <a:spcPct val="150000"/>
+              </a:lnSpc>
+            </a:pPr>
+            <a:r>
+              <a:rPr kumimoji="0" lang="en-US" altLang="en-US" sz="1000" i="0" u="none" strike="noStrike" cap="none" normalizeH="0" baseline="0">
+                <a:ln>
+                  <a:noFill/>
+                </a:ln>
+                <a:effectLst/>
+                <a:latin typeface="Arial" panose="020B0604020202020204" pitchFamily="34" charset="0"/>
+              </a:rPr>
+              <a:t>✅ </a:t>
+            </a:r>
+            <a:r>
+              <a:rPr kumimoji="0" lang="en-US" altLang="en-US" sz="1000" b="1" i="0" u="none" strike="noStrike" cap="none" normalizeH="0" baseline="0">
+                <a:ln>
+                  <a:noFill/>
+                </a:ln>
+                <a:solidFill>
+                  <a:srgbClr val="0070C0"/>
+                </a:solidFill>
+                <a:effectLst/>
+                <a:latin typeface="Arial" panose="020B0604020202020204" pitchFamily="34" charset="0"/>
+              </a:rPr>
+              <a:t>Səbəb 2</a:t>
+            </a:r>
+            <a:r>
+              <a:rPr kumimoji="0" lang="en-US" altLang="en-US" sz="1000" i="0" u="none" strike="noStrike" cap="none" normalizeH="0" baseline="0">
+                <a:ln>
+                  <a:noFill/>
+                </a:ln>
+                <a:effectLst/>
+                <a:latin typeface="Arial" panose="020B0604020202020204" pitchFamily="34" charset="0"/>
+              </a:rPr>
+              <a:t>: </a:t>
+            </a:r>
+            <a:r>
+              <a:rPr kumimoji="0" lang="en-US" altLang="en-US" sz="1000" b="1" i="0" u="none" strike="noStrike" cap="none" normalizeH="0" baseline="0">
+                <a:ln>
+                  <a:noFill/>
+                </a:ln>
+                <a:effectLst/>
+                <a:latin typeface="Arial" panose="020B0604020202020204" pitchFamily="34" charset="0"/>
+              </a:rPr>
+              <a:t>findOrFail() </a:t>
+            </a:r>
+            <a:r>
+              <a:rPr kumimoji="0" lang="en-US" altLang="en-US" sz="1000" i="0" u="none" strike="noStrike" cap="none" normalizeH="0" baseline="0">
+                <a:ln>
+                  <a:noFill/>
+                </a:ln>
+                <a:effectLst/>
+                <a:latin typeface="Arial" panose="020B0604020202020204" pitchFamily="34" charset="0"/>
+              </a:rPr>
+              <a:t>nə edir?</a:t>
+            </a:r>
+          </a:p>
+          <a:p>
+            <a:pPr marL="171450" indent="-171450">
+              <a:lnSpc>
+                <a:spcPct val="150000"/>
+              </a:lnSpc>
+              <a:buFont typeface="Arial" panose="020B0604020202020204" pitchFamily="34" charset="0"/>
+              <a:buChar char="•"/>
+            </a:pPr>
+            <a:r>
+              <a:rPr kumimoji="0" lang="en-US" altLang="en-US" sz="1000" i="0" u="none" strike="noStrike" cap="none" normalizeH="0" baseline="0">
+                <a:ln>
+                  <a:noFill/>
+                </a:ln>
+                <a:effectLst/>
+                <a:latin typeface="Arial" panose="020B0604020202020204" pitchFamily="34" charset="0"/>
+              </a:rPr>
+              <a:t>posts cədvəlindən </a:t>
+            </a:r>
+            <a:r>
+              <a:rPr kumimoji="0" lang="en-US" altLang="en-US" sz="1000" b="1" i="0" u="none" strike="noStrike" cap="none" normalizeH="0" baseline="0">
+                <a:ln>
+                  <a:noFill/>
+                </a:ln>
+                <a:effectLst/>
+                <a:latin typeface="Arial" panose="020B0604020202020204" pitchFamily="34" charset="0"/>
+              </a:rPr>
+              <a:t>id</a:t>
+            </a:r>
+            <a:r>
+              <a:rPr kumimoji="0" lang="en-US" altLang="en-US" sz="1000" i="0" u="none" strike="noStrike" cap="none" normalizeH="0" baseline="0">
+                <a:ln>
+                  <a:noFill/>
+                </a:ln>
+                <a:effectLst/>
+                <a:latin typeface="Arial" panose="020B0604020202020204" pitchFamily="34" charset="0"/>
+              </a:rPr>
+              <a:t> ilə </a:t>
+            </a:r>
+            <a:r>
+              <a:rPr kumimoji="0" lang="en-US" altLang="en-US" sz="1000" b="1" i="0" u="none" strike="noStrike" cap="none" normalizeH="0" baseline="0">
+                <a:ln>
+                  <a:noFill/>
+                </a:ln>
+                <a:effectLst/>
+                <a:latin typeface="Arial" panose="020B0604020202020204" pitchFamily="34" charset="0"/>
+              </a:rPr>
+              <a:t>post</a:t>
+            </a:r>
+            <a:r>
+              <a:rPr kumimoji="0" lang="en-US" altLang="en-US" sz="1000" i="0" u="none" strike="noStrike" cap="none" normalizeH="0" baseline="0">
+                <a:ln>
+                  <a:noFill/>
+                </a:ln>
+                <a:effectLst/>
+                <a:latin typeface="Arial" panose="020B0604020202020204" pitchFamily="34" charset="0"/>
+              </a:rPr>
+              <a:t> tapmağa çalışır.</a:t>
+            </a:r>
+          </a:p>
+          <a:p>
+            <a:pPr marL="171450" indent="-171450">
+              <a:lnSpc>
+                <a:spcPct val="150000"/>
+              </a:lnSpc>
+              <a:buFont typeface="Arial" panose="020B0604020202020204" pitchFamily="34" charset="0"/>
+              <a:buChar char="•"/>
+            </a:pPr>
+            <a:r>
+              <a:rPr kumimoji="0" lang="en-US" altLang="en-US" sz="1000" i="0" u="none" strike="noStrike" cap="none" normalizeH="0" baseline="0">
+                <a:ln>
+                  <a:noFill/>
+                </a:ln>
+                <a:effectLst/>
+                <a:latin typeface="Arial" panose="020B0604020202020204" pitchFamily="34" charset="0"/>
+              </a:rPr>
+              <a:t>Əgər tapılmazsa → avtomatik </a:t>
+            </a:r>
+            <a:r>
+              <a:rPr kumimoji="0" lang="en-US" altLang="en-US" sz="1000" b="1" i="0" u="none" strike="noStrike" cap="none" normalizeH="0" baseline="0">
+                <a:ln>
+                  <a:noFill/>
+                </a:ln>
+                <a:effectLst/>
+                <a:latin typeface="Arial" panose="020B0604020202020204" pitchFamily="34" charset="0"/>
+              </a:rPr>
+              <a:t>404 Not Found </a:t>
+            </a:r>
+            <a:r>
+              <a:rPr kumimoji="0" lang="en-US" altLang="en-US" sz="1000" i="0" u="none" strike="noStrike" cap="none" normalizeH="0" baseline="0">
+                <a:ln>
+                  <a:noFill/>
+                </a:ln>
+                <a:effectLst/>
+                <a:latin typeface="Arial" panose="020B0604020202020204" pitchFamily="34" charset="0"/>
+              </a:rPr>
+              <a:t>səhifəsi göstərilir.</a:t>
+            </a:r>
+          </a:p>
+          <a:p>
+            <a:pPr marL="171450" indent="-171450">
+              <a:lnSpc>
+                <a:spcPct val="150000"/>
+              </a:lnSpc>
+              <a:buFont typeface="Arial" panose="020B0604020202020204" pitchFamily="34" charset="0"/>
+              <a:buChar char="•"/>
+            </a:pPr>
+            <a:r>
+              <a:rPr kumimoji="0" lang="en-US" altLang="en-US" sz="1000" i="0" u="none" strike="noStrike" cap="none" normalizeH="0" baseline="0">
+                <a:ln>
+                  <a:noFill/>
+                </a:ln>
+                <a:effectLst/>
+                <a:latin typeface="Arial" panose="020B0604020202020204" pitchFamily="34" charset="0"/>
+              </a:rPr>
+              <a:t>Bu kodun davam etməsinin mənası yoxdur əgər </a:t>
+            </a:r>
+            <a:r>
+              <a:rPr kumimoji="0" lang="en-US" altLang="en-US" sz="1000" b="1" i="0" u="none" strike="noStrike" cap="none" normalizeH="0" baseline="0">
+                <a:ln>
+                  <a:noFill/>
+                </a:ln>
+                <a:effectLst/>
+                <a:latin typeface="Arial" panose="020B0604020202020204" pitchFamily="34" charset="0"/>
+              </a:rPr>
+              <a:t>$post </a:t>
+            </a:r>
+            <a:r>
+              <a:rPr kumimoji="0" lang="en-US" altLang="en-US" sz="1000" i="0" u="none" strike="noStrike" cap="none" normalizeH="0" baseline="0">
+                <a:ln>
+                  <a:noFill/>
+                </a:ln>
+                <a:effectLst/>
+                <a:latin typeface="Arial" panose="020B0604020202020204" pitchFamily="34" charset="0"/>
+              </a:rPr>
+              <a:t>mövcud deyilsə.</a:t>
+            </a:r>
+          </a:p>
+          <a:p>
+            <a:pPr marL="171450" indent="-171450">
+              <a:lnSpc>
+                <a:spcPct val="150000"/>
+              </a:lnSpc>
+              <a:buFont typeface="Arial" panose="020B0604020202020204" pitchFamily="34" charset="0"/>
+              <a:buChar char="•"/>
+            </a:pPr>
+            <a:r>
+              <a:rPr kumimoji="0" lang="en-US" altLang="en-US" sz="1000" i="0" u="none" strike="noStrike" cap="none" normalizeH="0" baseline="0">
+                <a:ln>
+                  <a:noFill/>
+                </a:ln>
+                <a:effectLst/>
+                <a:latin typeface="Arial" panose="020B0604020202020204" pitchFamily="34" charset="0"/>
+              </a:rPr>
+              <a:t>Nəticə: </a:t>
+            </a:r>
+            <a:r>
+              <a:rPr kumimoji="0" lang="en-US" altLang="en-US" sz="1000" b="1" i="0" u="none" strike="noStrike" cap="none" normalizeH="0" baseline="0">
+                <a:ln>
+                  <a:noFill/>
+                </a:ln>
+                <a:effectLst/>
+                <a:latin typeface="Arial" panose="020B0604020202020204" pitchFamily="34" charset="0"/>
+              </a:rPr>
+              <a:t>$post </a:t>
+            </a:r>
+            <a:r>
+              <a:rPr kumimoji="0" lang="en-US" altLang="en-US" sz="1000" i="0" u="none" strike="noStrike" cap="none" normalizeH="0" baseline="0">
+                <a:ln>
+                  <a:noFill/>
+                </a:ln>
+                <a:effectLst/>
+                <a:latin typeface="Arial" panose="020B0604020202020204" pitchFamily="34" charset="0"/>
+              </a:rPr>
+              <a:t>dəyişəni ilk olaraq gətirilməlidir ki, kodun növbəti hissəsində ona istinad edə bilək.</a:t>
+            </a:r>
+          </a:p>
+        </p:txBody>
+      </p:sp>
+      <p:pic>
+        <p:nvPicPr>
+          <p:cNvPr id="4" name="Picture 3">
+            <a:extLst>
+              <a:ext uri="{FF2B5EF4-FFF2-40B4-BE49-F238E27FC236}">
+                <a16:creationId xmlns:a16="http://schemas.microsoft.com/office/drawing/2014/main" id="{4F482C48-0BE3-60E6-5D35-7EB3DDB50DDA}"/>
+              </a:ext>
+            </a:extLst>
+          </p:cNvPr>
+          <p:cNvPicPr>
+            <a:picLocks noChangeAspect="1"/>
+          </p:cNvPicPr>
+          <p:nvPr/>
+        </p:nvPicPr>
+        <p:blipFill>
+          <a:blip r:embed="rId2"/>
+          <a:stretch>
+            <a:fillRect/>
+          </a:stretch>
+        </p:blipFill>
+        <p:spPr>
+          <a:xfrm>
+            <a:off x="7480609" y="0"/>
+            <a:ext cx="4711391" cy="6858000"/>
+          </a:xfrm>
+          <a:prstGeom prst="rect">
+            <a:avLst/>
+          </a:prstGeom>
+        </p:spPr>
+      </p:pic>
+    </p:spTree>
+    <p:extLst>
+      <p:ext uri="{BB962C8B-B14F-4D97-AF65-F5344CB8AC3E}">
+        <p14:creationId xmlns:p14="http://schemas.microsoft.com/office/powerpoint/2010/main" val="1648322552"/>
+      </p:ext>
+    </p:extLst>
+  </p:cSld>
+  <p:clrMapOvr>
+    <a:masterClrMapping/>
+  </p:clrMapOvr>
+</p:sld>
+</file>
+
+<file path=ppt/slides/slide13.xml><?xml version="1.0" encoding="utf-8"?>
+<p:sld xmlns:a="http://schemas.openxmlformats.org/drawingml/2006/main" xmlns:r="http://schemas.openxmlformats.org/officeDocument/2006/relationships" xmlns:p="http://schemas.openxmlformats.org/presentationml/2006/main">
+  <p:cSld>
+    <p:spTree>
+      <p:nvGrpSpPr>
+        <p:cNvPr id="1" name="">
+          <a:extLst>
+            <a:ext uri="{FF2B5EF4-FFF2-40B4-BE49-F238E27FC236}">
+              <a16:creationId xmlns:a16="http://schemas.microsoft.com/office/drawing/2014/main" id="{F73C7A70-4EA1-71B2-49B0-82E3D9AE7038}"/>
+            </a:ext>
+          </a:extLst>
+        </p:cNvPr>
+        <p:cNvGrpSpPr/>
+        <p:nvPr/>
+      </p:nvGrpSpPr>
+      <p:grpSpPr>
+        <a:xfrm>
+          <a:off x="0" y="0"/>
+          <a:ext cx="0" cy="0"/>
+          <a:chOff x="0" y="0"/>
+          <a:chExt cx="0" cy="0"/>
+        </a:xfrm>
+      </p:grpSpPr>
+      <p:sp>
+        <p:nvSpPr>
+          <p:cNvPr id="3" name="TextBox 2">
+            <a:extLst>
+              <a:ext uri="{FF2B5EF4-FFF2-40B4-BE49-F238E27FC236}">
+                <a16:creationId xmlns:a16="http://schemas.microsoft.com/office/drawing/2014/main" id="{43B0DB7F-19F9-FA86-7F5C-77637B83EDD2}"/>
+              </a:ext>
+            </a:extLst>
+          </p:cNvPr>
+          <p:cNvSpPr txBox="1"/>
+          <p:nvPr/>
+        </p:nvSpPr>
+        <p:spPr>
+          <a:xfrm>
+            <a:off x="217714" y="255046"/>
+            <a:ext cx="11756571" cy="4556504"/>
+          </a:xfrm>
+          <a:prstGeom prst="rect">
+            <a:avLst/>
+          </a:prstGeom>
+          <a:noFill/>
+        </p:spPr>
+        <p:txBody>
+          <a:bodyPr wrap="square">
+            <a:spAutoFit/>
+          </a:bodyPr>
+          <a:lstStyle/>
+          <a:p>
+            <a:pPr>
+              <a:lnSpc>
+                <a:spcPct val="150000"/>
+              </a:lnSpc>
+              <a:buNone/>
+            </a:pPr>
+            <a:r>
+              <a:rPr kumimoji="0" lang="en-US" altLang="en-US" sz="1300" b="1" i="0" u="none" strike="noStrike" cap="none" normalizeH="0" baseline="0">
+                <a:ln>
+                  <a:noFill/>
+                </a:ln>
+                <a:effectLst/>
+                <a:latin typeface="Arial" panose="020B0604020202020204" pitchFamily="34" charset="0"/>
+              </a:rPr>
+              <a:t>Niyə </a:t>
+            </a:r>
+            <a:r>
+              <a:rPr kumimoji="0" lang="en-US" altLang="en-US" sz="1300" b="1" i="0" u="none" strike="noStrike" cap="none" normalizeH="0" baseline="0">
+                <a:ln>
+                  <a:noFill/>
+                </a:ln>
+                <a:solidFill>
+                  <a:srgbClr val="FF0000"/>
+                </a:solidFill>
+                <a:effectLst/>
+                <a:latin typeface="Arial" panose="020B0604020202020204" pitchFamily="34" charset="0"/>
+              </a:rPr>
+              <a:t>File::delete(public_path($post-&gt;image)); </a:t>
+            </a:r>
+            <a:r>
+              <a:rPr kumimoji="0" lang="en-US" altLang="en-US" sz="1300" b="1" i="0" u="none" strike="noStrike" cap="none" normalizeH="0" baseline="0">
+                <a:ln>
+                  <a:noFill/>
+                </a:ln>
+                <a:effectLst/>
+                <a:latin typeface="Arial" panose="020B0604020202020204" pitchFamily="34" charset="0"/>
+              </a:rPr>
+              <a:t>yazılıb?</a:t>
+            </a:r>
+            <a:endParaRPr kumimoji="0" lang="az-Latn-AZ" altLang="en-US" sz="1300" b="1" i="0" u="none" strike="noStrike" cap="none" normalizeH="0" baseline="0">
+              <a:ln>
+                <a:noFill/>
+              </a:ln>
+              <a:effectLst/>
+              <a:latin typeface="Arial" panose="020B0604020202020204" pitchFamily="34" charset="0"/>
+            </a:endParaRPr>
+          </a:p>
+          <a:p>
+            <a:pPr>
+              <a:lnSpc>
+                <a:spcPct val="150000"/>
+              </a:lnSpc>
+              <a:buNone/>
+            </a:pPr>
+            <a:endParaRPr lang="az-Latn-AZ" altLang="en-US" sz="1300">
+              <a:latin typeface="Arial" panose="020B0604020202020204" pitchFamily="34" charset="0"/>
+            </a:endParaRPr>
+          </a:p>
+          <a:p>
+            <a:pPr marL="285750" indent="-285750">
+              <a:lnSpc>
+                <a:spcPct val="150000"/>
+              </a:lnSpc>
+              <a:buFont typeface="Arial" panose="020B0604020202020204" pitchFamily="34" charset="0"/>
+              <a:buChar char="•"/>
+            </a:pPr>
+            <a:r>
+              <a:rPr kumimoji="0" lang="az-Latn-AZ" altLang="en-US" sz="1300" b="0" i="0" u="none" strike="noStrike" cap="none" normalizeH="0" baseline="0">
+                <a:ln>
+                  <a:noFill/>
+                </a:ln>
+                <a:solidFill>
+                  <a:schemeClr val="tx1"/>
+                </a:solidFill>
+                <a:effectLst/>
+                <a:latin typeface="Arial" panose="020B0604020202020204" pitchFamily="34" charset="0"/>
+              </a:rPr>
+              <a:t>Bu kod, əvvəlki şəkli serverin </a:t>
+            </a:r>
+            <a:r>
+              <a:rPr kumimoji="0" lang="az-Latn-AZ" altLang="en-US" sz="1300" b="1" i="0" u="none" strike="noStrike" cap="none" normalizeH="0" baseline="0">
+                <a:ln>
+                  <a:noFill/>
+                </a:ln>
+                <a:solidFill>
+                  <a:srgbClr val="00B050"/>
+                </a:solidFill>
+                <a:effectLst/>
+                <a:latin typeface="Arial" panose="020B0604020202020204" pitchFamily="34" charset="0"/>
+              </a:rPr>
+              <a:t>public/</a:t>
+            </a:r>
+            <a:r>
+              <a:rPr kumimoji="0" lang="az-Latn-AZ" altLang="en-US" sz="1300" b="0" i="0" u="none" strike="noStrike" cap="none" normalizeH="0" baseline="0">
+                <a:ln>
+                  <a:noFill/>
+                </a:ln>
+                <a:solidFill>
+                  <a:schemeClr val="tx1"/>
+                </a:solidFill>
+                <a:effectLst/>
+                <a:latin typeface="Arial" panose="020B0604020202020204" pitchFamily="34" charset="0"/>
+              </a:rPr>
+              <a:t> qovluğundan silir.</a:t>
+            </a:r>
+          </a:p>
+          <a:p>
+            <a:pPr marL="285750" indent="-285750">
+              <a:lnSpc>
+                <a:spcPct val="150000"/>
+              </a:lnSpc>
+              <a:buFont typeface="Arial" panose="020B0604020202020204" pitchFamily="34" charset="0"/>
+              <a:buChar char="•"/>
+            </a:pPr>
+            <a:r>
+              <a:rPr kumimoji="0" lang="en-US" altLang="en-US" sz="1300" b="1" i="0" u="none" strike="noStrike" cap="none" normalizeH="0" baseline="0">
+                <a:ln>
+                  <a:noFill/>
+                </a:ln>
+                <a:solidFill>
+                  <a:schemeClr val="tx1"/>
+                </a:solidFill>
+                <a:effectLst/>
+                <a:latin typeface="Arial" panose="020B0604020202020204" pitchFamily="34" charset="0"/>
+              </a:rPr>
+              <a:t>$post-&gt;image </a:t>
+            </a:r>
+            <a:r>
               <a:rPr kumimoji="0" lang="en-US" altLang="en-US" sz="1300" b="0" i="0" u="none" strike="noStrike" cap="none" normalizeH="0" baseline="0">
                 <a:ln>
                   <a:noFill/>
@@ -3380,15 +5548,2253 @@
                 <a:effectLst/>
                 <a:latin typeface="Arial" panose="020B0604020202020204" pitchFamily="34" charset="0"/>
               </a:rPr>
-              <a:t>.</a:t>
-            </a:r>
+              <a:t>→ bazada saxlanılan şəkilin nisbətən yolu</a:t>
+            </a:r>
+            <a:r>
+              <a:rPr kumimoji="0" lang="az-Latn-AZ" altLang="en-US" sz="1300" b="0" i="0" u="none" strike="noStrike" cap="none" normalizeH="0" baseline="0">
+                <a:ln>
+                  <a:noFill/>
+                </a:ln>
+                <a:solidFill>
+                  <a:schemeClr val="tx1"/>
+                </a:solidFill>
+                <a:effectLst/>
+                <a:latin typeface="Arial" panose="020B0604020202020204" pitchFamily="34" charset="0"/>
+              </a:rPr>
+              <a:t>dur</a:t>
+            </a:r>
+            <a:r>
+              <a:rPr kumimoji="0" lang="en-US" altLang="en-US" sz="1300" b="0" i="0" u="none" strike="noStrike" cap="none" normalizeH="0" baseline="0">
+                <a:ln>
+                  <a:noFill/>
+                </a:ln>
+                <a:solidFill>
+                  <a:schemeClr val="tx1"/>
+                </a:solidFill>
+                <a:effectLst/>
+                <a:latin typeface="Arial" panose="020B0604020202020204" pitchFamily="34" charset="0"/>
+              </a:rPr>
+              <a:t> (məsələn, </a:t>
+            </a:r>
+            <a:r>
+              <a:rPr kumimoji="0" lang="en-US" altLang="en-US" sz="1300" b="1" i="0" u="none" strike="noStrike" cap="none" normalizeH="0" baseline="0">
+                <a:ln>
+                  <a:noFill/>
+                </a:ln>
+                <a:solidFill>
+                  <a:schemeClr val="tx1"/>
+                </a:solidFill>
+                <a:effectLst/>
+                <a:latin typeface="Arial" panose="020B0604020202020204" pitchFamily="34" charset="0"/>
+              </a:rPr>
+              <a:t>storage/uploads/abc.jpg</a:t>
+            </a:r>
+            <a:r>
+              <a:rPr kumimoji="0" lang="en-US" altLang="en-US" sz="1300" b="0" i="0" u="none" strike="noStrike" cap="none" normalizeH="0" baseline="0">
+                <a:ln>
+                  <a:noFill/>
+                </a:ln>
+                <a:solidFill>
+                  <a:schemeClr val="tx1"/>
+                </a:solidFill>
+                <a:effectLst/>
+                <a:latin typeface="Arial" panose="020B0604020202020204" pitchFamily="34" charset="0"/>
+              </a:rPr>
+              <a:t>)</a:t>
+            </a:r>
+          </a:p>
+          <a:p>
+            <a:pPr marL="285750" indent="-285750">
+              <a:lnSpc>
+                <a:spcPct val="150000"/>
+              </a:lnSpc>
+              <a:buFont typeface="Arial" panose="020B0604020202020204" pitchFamily="34" charset="0"/>
+              <a:buChar char="•"/>
+            </a:pPr>
+            <a:r>
+              <a:rPr kumimoji="0" lang="en-US" altLang="en-US" sz="1300" b="1" i="0" u="none" strike="noStrike" cap="none" normalizeH="0" baseline="0">
+                <a:ln>
+                  <a:noFill/>
+                </a:ln>
+                <a:solidFill>
+                  <a:schemeClr val="tx1"/>
+                </a:solidFill>
+                <a:effectLst/>
+                <a:latin typeface="Arial" panose="020B0604020202020204" pitchFamily="34" charset="0"/>
+              </a:rPr>
+              <a:t>public_path() </a:t>
+            </a:r>
+            <a:r>
+              <a:rPr kumimoji="0" lang="en-US" altLang="en-US" sz="1300" b="0" i="0" u="none" strike="noStrike" cap="none" normalizeH="0" baseline="0">
+                <a:ln>
+                  <a:noFill/>
+                </a:ln>
+                <a:solidFill>
+                  <a:schemeClr val="tx1"/>
+                </a:solidFill>
+                <a:effectLst/>
+                <a:latin typeface="Arial" panose="020B0604020202020204" pitchFamily="34" charset="0"/>
+              </a:rPr>
+              <a:t>→ bu yolu fiziki sistem yoluna çevirir, məsələn:</a:t>
+            </a:r>
+            <a:r>
+              <a:rPr kumimoji="0" lang="az-Latn-AZ" altLang="en-US" sz="1300" b="0" i="0" u="none" strike="noStrike" cap="none" normalizeH="0" baseline="0">
+                <a:ln>
+                  <a:noFill/>
+                </a:ln>
+                <a:solidFill>
+                  <a:schemeClr val="tx1"/>
+                </a:solidFill>
+                <a:effectLst/>
+                <a:latin typeface="Arial" panose="020B0604020202020204" pitchFamily="34" charset="0"/>
+              </a:rPr>
+              <a:t> </a:t>
+            </a:r>
+            <a:r>
+              <a:rPr kumimoji="0" lang="en-US" altLang="en-US" sz="1300" b="1" i="0" u="none" strike="noStrike" cap="none" normalizeH="0" baseline="0">
+                <a:ln>
+                  <a:noFill/>
+                </a:ln>
+                <a:solidFill>
+                  <a:schemeClr val="tx1"/>
+                </a:solidFill>
+                <a:effectLst/>
+                <a:latin typeface="Arial" panose="020B0604020202020204" pitchFamily="34" charset="0"/>
+              </a:rPr>
+              <a:t>/var/www/project/public/storage/uploads/abc.jpg</a:t>
+            </a:r>
+          </a:p>
+          <a:p>
+            <a:pPr marL="285750" indent="-285750">
+              <a:lnSpc>
+                <a:spcPct val="150000"/>
+              </a:lnSpc>
+              <a:buFont typeface="Arial" panose="020B0604020202020204" pitchFamily="34" charset="0"/>
+              <a:buChar char="•"/>
+            </a:pPr>
+            <a:r>
+              <a:rPr kumimoji="0" lang="en-US" altLang="en-US" sz="1300" b="1" i="0" u="none" strike="noStrike" cap="none" normalizeH="0" baseline="0">
+                <a:ln>
+                  <a:noFill/>
+                </a:ln>
+                <a:solidFill>
+                  <a:schemeClr val="tx1"/>
+                </a:solidFill>
+                <a:effectLst/>
+                <a:latin typeface="Arial" panose="020B0604020202020204" pitchFamily="34" charset="0"/>
+              </a:rPr>
+              <a:t>File::delete(...) </a:t>
+            </a:r>
+            <a:r>
+              <a:rPr kumimoji="0" lang="en-US" altLang="en-US" sz="1300" b="0" i="0" u="none" strike="noStrike" cap="none" normalizeH="0" baseline="0">
+                <a:ln>
+                  <a:noFill/>
+                </a:ln>
+                <a:solidFill>
+                  <a:schemeClr val="tx1"/>
+                </a:solidFill>
+                <a:effectLst/>
+                <a:latin typeface="Arial" panose="020B0604020202020204" pitchFamily="34" charset="0"/>
+              </a:rPr>
+              <a:t>→ həmin faylı sistemdən silir.</a:t>
+            </a:r>
+            <a:endParaRPr kumimoji="0" lang="az-Latn-AZ" altLang="en-US" sz="1300" b="0" i="0" u="none" strike="noStrike" cap="none" normalizeH="0" baseline="0">
+              <a:ln>
+                <a:noFill/>
+              </a:ln>
+              <a:solidFill>
+                <a:schemeClr val="tx1"/>
+              </a:solidFill>
+              <a:effectLst/>
+              <a:latin typeface="Arial" panose="020B0604020202020204" pitchFamily="34" charset="0"/>
+            </a:endParaRPr>
+          </a:p>
+          <a:p>
+            <a:pPr>
+              <a:lnSpc>
+                <a:spcPct val="150000"/>
+              </a:lnSpc>
+              <a:buNone/>
+            </a:pPr>
+            <a:endParaRPr lang="az-Latn-AZ" altLang="en-US" sz="1300">
+              <a:latin typeface="Arial" panose="020B0604020202020204" pitchFamily="34" charset="0"/>
+            </a:endParaRPr>
+          </a:p>
+          <a:p>
+            <a:pPr>
+              <a:lnSpc>
+                <a:spcPct val="150000"/>
+              </a:lnSpc>
+              <a:buNone/>
+            </a:pPr>
+            <a:endParaRPr kumimoji="0" lang="az-Latn-AZ" altLang="en-US" sz="1300" b="0" i="0" u="none" strike="noStrike" cap="none" normalizeH="0" baseline="0">
+              <a:ln>
+                <a:noFill/>
+              </a:ln>
+              <a:solidFill>
+                <a:schemeClr val="tx1"/>
+              </a:solidFill>
+              <a:effectLst/>
+              <a:latin typeface="Arial" panose="020B0604020202020204" pitchFamily="34" charset="0"/>
+            </a:endParaRPr>
+          </a:p>
+          <a:p>
+            <a:pPr>
+              <a:lnSpc>
+                <a:spcPct val="150000"/>
+              </a:lnSpc>
+              <a:buNone/>
+            </a:pPr>
+            <a:endParaRPr lang="az-Latn-AZ" altLang="en-US" sz="1300">
+              <a:latin typeface="Arial" panose="020B0604020202020204" pitchFamily="34" charset="0"/>
+            </a:endParaRPr>
+          </a:p>
+          <a:p>
+            <a:pPr>
+              <a:lnSpc>
+                <a:spcPct val="150000"/>
+              </a:lnSpc>
+              <a:buNone/>
+            </a:pPr>
+            <a:r>
+              <a:rPr kumimoji="0" lang="en-US" altLang="en-US" sz="1300" b="0" i="0" u="none" strike="noStrike" cap="none" normalizeH="0" baseline="0">
+                <a:ln>
+                  <a:noFill/>
+                </a:ln>
+                <a:solidFill>
+                  <a:schemeClr val="tx1"/>
+                </a:solidFill>
+                <a:effectLst/>
+                <a:latin typeface="Arial" panose="020B0604020202020204" pitchFamily="34" charset="0"/>
+              </a:rPr>
+              <a:t>✅ Niyə silirik?</a:t>
+            </a:r>
+          </a:p>
+          <a:p>
+            <a:pPr marL="285750" indent="-285750">
+              <a:lnSpc>
+                <a:spcPct val="150000"/>
+              </a:lnSpc>
+              <a:buFont typeface="Arial" panose="020B0604020202020204" pitchFamily="34" charset="0"/>
+              <a:buChar char="•"/>
+            </a:pPr>
+            <a:r>
+              <a:rPr kumimoji="0" lang="en-US" altLang="en-US" sz="1300" b="0" i="0" u="none" strike="noStrike" cap="none" normalizeH="0" baseline="0">
+                <a:ln>
+                  <a:noFill/>
+                </a:ln>
+                <a:solidFill>
+                  <a:schemeClr val="tx1"/>
+                </a:solidFill>
+                <a:effectLst/>
+                <a:latin typeface="Arial" panose="020B0604020202020204" pitchFamily="34" charset="0"/>
+              </a:rPr>
+              <a:t>Əgər istifadəçi yeni şəkil yükləyibsə, artıq köhnə şəkil istifadə olunmur.</a:t>
+            </a:r>
+          </a:p>
+          <a:p>
+            <a:pPr marL="285750" indent="-285750">
+              <a:lnSpc>
+                <a:spcPct val="150000"/>
+              </a:lnSpc>
+              <a:buFont typeface="Arial" panose="020B0604020202020204" pitchFamily="34" charset="0"/>
+              <a:buChar char="•"/>
+            </a:pPr>
+            <a:r>
+              <a:rPr kumimoji="0" lang="en-US" altLang="en-US" sz="1300" b="0" i="0" u="none" strike="noStrike" cap="none" normalizeH="0" baseline="0">
+                <a:ln>
+                  <a:noFill/>
+                </a:ln>
+                <a:solidFill>
+                  <a:schemeClr val="tx1"/>
+                </a:solidFill>
+                <a:effectLst/>
+                <a:latin typeface="Arial" panose="020B0604020202020204" pitchFamily="34" charset="0"/>
+              </a:rPr>
+              <a:t>Serverin yaddaşında boş yer tutmaması üçün köhnə şəkli silmək düzgün praktika hesab olunur.</a:t>
+            </a:r>
+            <a:endParaRPr kumimoji="0" lang="az-Latn-AZ" altLang="en-US" sz="1300" b="0" i="0" u="none" strike="noStrike" cap="none" normalizeH="0" baseline="0">
+              <a:ln>
+                <a:noFill/>
+              </a:ln>
+              <a:solidFill>
+                <a:schemeClr val="tx1"/>
+              </a:solidFill>
+              <a:effectLst/>
+              <a:latin typeface="Arial" panose="020B0604020202020204" pitchFamily="34" charset="0"/>
+            </a:endParaRPr>
+          </a:p>
+          <a:p>
+            <a:pPr>
+              <a:lnSpc>
+                <a:spcPct val="150000"/>
+              </a:lnSpc>
+              <a:buNone/>
+            </a:pPr>
+            <a:endParaRPr lang="az-Latn-AZ" altLang="en-US" sz="1300">
+              <a:latin typeface="Arial" panose="020B0604020202020204" pitchFamily="34" charset="0"/>
+            </a:endParaRPr>
+          </a:p>
+          <a:p>
+            <a:pPr>
+              <a:lnSpc>
+                <a:spcPct val="150000"/>
+              </a:lnSpc>
+              <a:buNone/>
+            </a:pPr>
+            <a:endParaRPr kumimoji="0" lang="az-Latn-AZ" altLang="en-US" sz="1300" b="0" i="0" u="none" strike="noStrike" cap="none" normalizeH="0" baseline="0">
+              <a:ln>
+                <a:noFill/>
+              </a:ln>
+              <a:solidFill>
+                <a:schemeClr val="tx1"/>
+              </a:solidFill>
+              <a:effectLst/>
+              <a:latin typeface="Arial" panose="020B0604020202020204" pitchFamily="34" charset="0"/>
+            </a:endParaRPr>
+          </a:p>
+          <a:p>
+            <a:pPr>
+              <a:lnSpc>
+                <a:spcPct val="150000"/>
+              </a:lnSpc>
+              <a:buNone/>
+            </a:pPr>
+            <a:endParaRPr kumimoji="0" lang="en-US" altLang="en-US" sz="1300" b="0" i="0" u="none" strike="noStrike" cap="none" normalizeH="0" baseline="0">
+              <a:ln>
+                <a:noFill/>
+              </a:ln>
+              <a:solidFill>
+                <a:schemeClr val="tx1"/>
+              </a:solidFill>
+              <a:effectLst/>
+              <a:latin typeface="Arial" panose="020B0604020202020204" pitchFamily="34" charset="0"/>
+            </a:endParaRPr>
           </a:p>
         </p:txBody>
       </p:sp>
     </p:spTree>
     <p:extLst>
       <p:ext uri="{BB962C8B-B14F-4D97-AF65-F5344CB8AC3E}">
-        <p14:creationId xmlns:p14="http://schemas.microsoft.com/office/powerpoint/2010/main" val="4240944397"/>
+        <p14:creationId xmlns:p14="http://schemas.microsoft.com/office/powerpoint/2010/main" val="2511217386"/>
+      </p:ext>
+    </p:extLst>
+  </p:cSld>
+  <p:clrMapOvr>
+    <a:masterClrMapping/>
+  </p:clrMapOvr>
+</p:sld>
+</file>
+
+<file path=ppt/slides/slide14.xml><?xml version="1.0" encoding="utf-8"?>
+<p:sld xmlns:a="http://schemas.openxmlformats.org/drawingml/2006/main" xmlns:r="http://schemas.openxmlformats.org/officeDocument/2006/relationships" xmlns:p="http://schemas.openxmlformats.org/presentationml/2006/main">
+  <p:cSld>
+    <p:spTree>
+      <p:nvGrpSpPr>
+        <p:cNvPr id="1" name="">
+          <a:extLst>
+            <a:ext uri="{FF2B5EF4-FFF2-40B4-BE49-F238E27FC236}">
+              <a16:creationId xmlns:a16="http://schemas.microsoft.com/office/drawing/2014/main" id="{8844B025-D792-BBE7-31E4-3EE7B1EA99E6}"/>
+            </a:ext>
+          </a:extLst>
+        </p:cNvPr>
+        <p:cNvGrpSpPr/>
+        <p:nvPr/>
+      </p:nvGrpSpPr>
+      <p:grpSpPr>
+        <a:xfrm>
+          <a:off x="0" y="0"/>
+          <a:ext cx="0" cy="0"/>
+          <a:chOff x="0" y="0"/>
+          <a:chExt cx="0" cy="0"/>
+        </a:xfrm>
+      </p:grpSpPr>
+      <p:sp>
+        <p:nvSpPr>
+          <p:cNvPr id="3" name="TextBox 2">
+            <a:extLst>
+              <a:ext uri="{FF2B5EF4-FFF2-40B4-BE49-F238E27FC236}">
+                <a16:creationId xmlns:a16="http://schemas.microsoft.com/office/drawing/2014/main" id="{5B30200F-95A0-BBA6-251A-F28D568744AC}"/>
+              </a:ext>
+            </a:extLst>
+          </p:cNvPr>
+          <p:cNvSpPr txBox="1"/>
+          <p:nvPr/>
+        </p:nvSpPr>
+        <p:spPr>
+          <a:xfrm>
+            <a:off x="217714" y="255046"/>
+            <a:ext cx="11756571" cy="355354"/>
+          </a:xfrm>
+          <a:prstGeom prst="rect">
+            <a:avLst/>
+          </a:prstGeom>
+          <a:noFill/>
+        </p:spPr>
+        <p:txBody>
+          <a:bodyPr wrap="square">
+            <a:spAutoFit/>
+          </a:bodyPr>
+          <a:lstStyle/>
+          <a:p>
+            <a:pPr>
+              <a:lnSpc>
+                <a:spcPct val="150000"/>
+              </a:lnSpc>
+              <a:buNone/>
+            </a:pPr>
+            <a:r>
+              <a:rPr kumimoji="0" lang="en-US" altLang="en-US" sz="1300" b="1" i="0" u="none" strike="noStrike" cap="none" normalizeH="0" baseline="0">
+                <a:ln>
+                  <a:noFill/>
+                </a:ln>
+                <a:solidFill>
+                  <a:schemeClr val="tx1"/>
+                </a:solidFill>
+                <a:effectLst/>
+                <a:latin typeface="Arial" panose="020B0604020202020204" pitchFamily="34" charset="0"/>
+              </a:rPr>
+              <a:t>Nəticə olaraq, bu metod</a:t>
+            </a:r>
+            <a:r>
+              <a:rPr kumimoji="0" lang="en-US" altLang="en-US" sz="1300" b="0" i="0" u="none" strike="noStrike" cap="none" normalizeH="0" baseline="0">
+                <a:ln>
+                  <a:noFill/>
+                </a:ln>
+                <a:solidFill>
+                  <a:schemeClr val="tx1"/>
+                </a:solidFill>
+                <a:effectLst/>
+                <a:latin typeface="Arial" panose="020B0604020202020204" pitchFamily="34" charset="0"/>
+              </a:rPr>
+              <a:t>:</a:t>
+            </a:r>
+          </a:p>
+        </p:txBody>
+      </p:sp>
+      <p:graphicFrame>
+        <p:nvGraphicFramePr>
+          <p:cNvPr id="2" name="Table 1">
+            <a:extLst>
+              <a:ext uri="{FF2B5EF4-FFF2-40B4-BE49-F238E27FC236}">
+                <a16:creationId xmlns:a16="http://schemas.microsoft.com/office/drawing/2014/main" id="{F0358F1D-2AE4-31B5-44C0-BF169F250190}"/>
+              </a:ext>
+            </a:extLst>
+          </p:cNvPr>
+          <p:cNvGraphicFramePr>
+            <a:graphicFrameLocks noGrp="1"/>
+          </p:cNvGraphicFramePr>
+          <p:nvPr>
+            <p:extLst>
+              <p:ext uri="{D42A27DB-BD31-4B8C-83A1-F6EECF244321}">
+                <p14:modId xmlns:p14="http://schemas.microsoft.com/office/powerpoint/2010/main" val="3397323583"/>
+              </p:ext>
+            </p:extLst>
+          </p:nvPr>
+        </p:nvGraphicFramePr>
+        <p:xfrm>
+          <a:off x="217713" y="874423"/>
+          <a:ext cx="11756571" cy="4480002"/>
+        </p:xfrm>
+        <a:graphic>
+          <a:graphicData uri="http://schemas.openxmlformats.org/drawingml/2006/table">
+            <a:tbl>
+              <a:tblPr/>
+              <a:tblGrid>
+                <a:gridCol w="878338">
+                  <a:extLst>
+                    <a:ext uri="{9D8B030D-6E8A-4147-A177-3AD203B41FA5}">
+                      <a16:colId xmlns:a16="http://schemas.microsoft.com/office/drawing/2014/main" val="2578183930"/>
+                    </a:ext>
+                  </a:extLst>
+                </a:gridCol>
+                <a:gridCol w="10878233">
+                  <a:extLst>
+                    <a:ext uri="{9D8B030D-6E8A-4147-A177-3AD203B41FA5}">
+                      <a16:colId xmlns:a16="http://schemas.microsoft.com/office/drawing/2014/main" val="905761042"/>
+                    </a:ext>
+                  </a:extLst>
+                </a:gridCol>
+              </a:tblGrid>
+              <a:tr h="497778">
+                <a:tc>
+                  <a:txBody>
+                    <a:bodyPr/>
+                    <a:lstStyle/>
+                    <a:p>
+                      <a:r>
+                        <a:rPr lang="en-US" b="1"/>
+                        <a:t>Addım</a:t>
+                      </a:r>
+                    </a:p>
+                  </a:txBody>
+                  <a:tcPr anchor="ctr">
+                    <a:lnL w="12700" cap="flat" cmpd="sng" algn="ctr">
+                      <a:solidFill>
+                        <a:schemeClr val="tx1"/>
+                      </a:solidFill>
+                      <a:prstDash val="solid"/>
+                      <a:round/>
+                      <a:headEnd type="none" w="med" len="med"/>
+                      <a:tailEnd type="none" w="med" len="med"/>
+                    </a:lnL>
+                    <a:lnR w="12700" cap="flat" cmpd="sng" algn="ctr">
+                      <a:solidFill>
+                        <a:schemeClr val="tx1"/>
+                      </a:solidFill>
+                      <a:prstDash val="solid"/>
+                      <a:round/>
+                      <a:headEnd type="none" w="med" len="med"/>
+                      <a:tailEnd type="none" w="med" len="med"/>
+                    </a:lnR>
+                    <a:lnT w="12700" cap="flat" cmpd="sng" algn="ctr">
+                      <a:solidFill>
+                        <a:schemeClr val="tx1"/>
+                      </a:solidFill>
+                      <a:prstDash val="solid"/>
+                      <a:round/>
+                      <a:headEnd type="none" w="med" len="med"/>
+                      <a:tailEnd type="none" w="med" len="med"/>
+                    </a:lnT>
+                    <a:lnB w="12700" cap="flat" cmpd="sng" algn="ctr">
+                      <a:solidFill>
+                        <a:schemeClr val="tx1"/>
+                      </a:solidFill>
+                      <a:prstDash val="solid"/>
+                      <a:round/>
+                      <a:headEnd type="none" w="med" len="med"/>
+                      <a:tailEnd type="none" w="med" len="med"/>
+                    </a:lnB>
+                    <a:solidFill>
+                      <a:schemeClr val="accent2"/>
+                    </a:solidFill>
+                  </a:tcPr>
+                </a:tc>
+                <a:tc>
+                  <a:txBody>
+                    <a:bodyPr/>
+                    <a:lstStyle/>
+                    <a:p>
+                      <a:r>
+                        <a:rPr lang="en-US" b="1"/>
+                        <a:t>Görülən iş</a:t>
+                      </a:r>
+                    </a:p>
+                  </a:txBody>
+                  <a:tcPr anchor="ctr">
+                    <a:lnL w="12700" cap="flat" cmpd="sng" algn="ctr">
+                      <a:solidFill>
+                        <a:schemeClr val="tx1"/>
+                      </a:solidFill>
+                      <a:prstDash val="solid"/>
+                      <a:round/>
+                      <a:headEnd type="none" w="med" len="med"/>
+                      <a:tailEnd type="none" w="med" len="med"/>
+                    </a:lnL>
+                    <a:lnR w="12700" cap="flat" cmpd="sng" algn="ctr">
+                      <a:solidFill>
+                        <a:schemeClr val="tx1"/>
+                      </a:solidFill>
+                      <a:prstDash val="solid"/>
+                      <a:round/>
+                      <a:headEnd type="none" w="med" len="med"/>
+                      <a:tailEnd type="none" w="med" len="med"/>
+                    </a:lnR>
+                    <a:lnT w="12700" cap="flat" cmpd="sng" algn="ctr">
+                      <a:solidFill>
+                        <a:schemeClr val="tx1"/>
+                      </a:solidFill>
+                      <a:prstDash val="solid"/>
+                      <a:round/>
+                      <a:headEnd type="none" w="med" len="med"/>
+                      <a:tailEnd type="none" w="med" len="med"/>
+                    </a:lnT>
+                    <a:lnB w="12700" cap="flat" cmpd="sng" algn="ctr">
+                      <a:solidFill>
+                        <a:schemeClr val="tx1"/>
+                      </a:solidFill>
+                      <a:prstDash val="solid"/>
+                      <a:round/>
+                      <a:headEnd type="none" w="med" len="med"/>
+                      <a:tailEnd type="none" w="med" len="med"/>
+                    </a:lnB>
+                    <a:solidFill>
+                      <a:schemeClr val="accent2"/>
+                    </a:solidFill>
+                  </a:tcPr>
+                </a:tc>
+                <a:extLst>
+                  <a:ext uri="{0D108BD9-81ED-4DB2-BD59-A6C34878D82A}">
+                    <a16:rowId xmlns:a16="http://schemas.microsoft.com/office/drawing/2014/main" val="2392702669"/>
+                  </a:ext>
+                </a:extLst>
+              </a:tr>
+              <a:tr h="497778">
+                <a:tc>
+                  <a:txBody>
+                    <a:bodyPr/>
+                    <a:lstStyle/>
+                    <a:p>
+                      <a:r>
+                        <a:rPr lang="en-US"/>
+                        <a:t>1</a:t>
+                      </a:r>
+                    </a:p>
+                  </a:txBody>
+                  <a:tcPr anchor="ctr">
+                    <a:lnL w="12700" cap="flat" cmpd="sng" algn="ctr">
+                      <a:solidFill>
+                        <a:schemeClr val="tx1"/>
+                      </a:solidFill>
+                      <a:prstDash val="solid"/>
+                      <a:round/>
+                      <a:headEnd type="none" w="med" len="med"/>
+                      <a:tailEnd type="none" w="med" len="med"/>
+                    </a:lnL>
+                    <a:lnR w="12700" cap="flat" cmpd="sng" algn="ctr">
+                      <a:solidFill>
+                        <a:schemeClr val="tx1"/>
+                      </a:solidFill>
+                      <a:prstDash val="solid"/>
+                      <a:round/>
+                      <a:headEnd type="none" w="med" len="med"/>
+                      <a:tailEnd type="none" w="med" len="med"/>
+                    </a:lnR>
+                    <a:lnT w="12700" cap="flat" cmpd="sng" algn="ctr">
+                      <a:solidFill>
+                        <a:schemeClr val="tx1"/>
+                      </a:solidFill>
+                      <a:prstDash val="solid"/>
+                      <a:round/>
+                      <a:headEnd type="none" w="med" len="med"/>
+                      <a:tailEnd type="none" w="med" len="med"/>
+                    </a:lnT>
+                    <a:lnB w="12700" cap="flat" cmpd="sng" algn="ctr">
+                      <a:solidFill>
+                        <a:schemeClr val="tx1"/>
+                      </a:solidFill>
+                      <a:prstDash val="solid"/>
+                      <a:round/>
+                      <a:headEnd type="none" w="med" len="med"/>
+                      <a:tailEnd type="none" w="med" len="med"/>
+                    </a:lnB>
+                    <a:noFill/>
+                  </a:tcPr>
+                </a:tc>
+                <a:tc>
+                  <a:txBody>
+                    <a:bodyPr/>
+                    <a:lstStyle/>
+                    <a:p>
+                      <a:r>
+                        <a:rPr lang="en-US"/>
+                        <a:t>Gələn məlumatlar (başlıq, açıqlama, kateqoriya) validate olunur</a:t>
+                      </a:r>
+                    </a:p>
+                  </a:txBody>
+                  <a:tcPr anchor="ctr">
+                    <a:lnL w="12700" cap="flat" cmpd="sng" algn="ctr">
+                      <a:solidFill>
+                        <a:schemeClr val="tx1"/>
+                      </a:solidFill>
+                      <a:prstDash val="solid"/>
+                      <a:round/>
+                      <a:headEnd type="none" w="med" len="med"/>
+                      <a:tailEnd type="none" w="med" len="med"/>
+                    </a:lnL>
+                    <a:lnR w="12700" cap="flat" cmpd="sng" algn="ctr">
+                      <a:solidFill>
+                        <a:schemeClr val="tx1"/>
+                      </a:solidFill>
+                      <a:prstDash val="solid"/>
+                      <a:round/>
+                      <a:headEnd type="none" w="med" len="med"/>
+                      <a:tailEnd type="none" w="med" len="med"/>
+                    </a:lnR>
+                    <a:lnT w="12700" cap="flat" cmpd="sng" algn="ctr">
+                      <a:solidFill>
+                        <a:schemeClr val="tx1"/>
+                      </a:solidFill>
+                      <a:prstDash val="solid"/>
+                      <a:round/>
+                      <a:headEnd type="none" w="med" len="med"/>
+                      <a:tailEnd type="none" w="med" len="med"/>
+                    </a:lnT>
+                    <a:lnB w="12700" cap="flat" cmpd="sng" algn="ctr">
+                      <a:solidFill>
+                        <a:schemeClr val="tx1"/>
+                      </a:solidFill>
+                      <a:prstDash val="solid"/>
+                      <a:round/>
+                      <a:headEnd type="none" w="med" len="med"/>
+                      <a:tailEnd type="none" w="med" len="med"/>
+                    </a:lnB>
+                    <a:noFill/>
+                  </a:tcPr>
+                </a:tc>
+                <a:extLst>
+                  <a:ext uri="{0D108BD9-81ED-4DB2-BD59-A6C34878D82A}">
+                    <a16:rowId xmlns:a16="http://schemas.microsoft.com/office/drawing/2014/main" val="1187439021"/>
+                  </a:ext>
+                </a:extLst>
+              </a:tr>
+              <a:tr h="497778">
+                <a:tc>
+                  <a:txBody>
+                    <a:bodyPr/>
+                    <a:lstStyle/>
+                    <a:p>
+                      <a:r>
+                        <a:rPr lang="en-US"/>
+                        <a:t>2</a:t>
+                      </a:r>
+                    </a:p>
+                  </a:txBody>
+                  <a:tcPr anchor="ctr">
+                    <a:lnL w="12700" cap="flat" cmpd="sng" algn="ctr">
+                      <a:solidFill>
+                        <a:schemeClr val="tx1"/>
+                      </a:solidFill>
+                      <a:prstDash val="solid"/>
+                      <a:round/>
+                      <a:headEnd type="none" w="med" len="med"/>
+                      <a:tailEnd type="none" w="med" len="med"/>
+                    </a:lnL>
+                    <a:lnR w="12700" cap="flat" cmpd="sng" algn="ctr">
+                      <a:solidFill>
+                        <a:schemeClr val="tx1"/>
+                      </a:solidFill>
+                      <a:prstDash val="solid"/>
+                      <a:round/>
+                      <a:headEnd type="none" w="med" len="med"/>
+                      <a:tailEnd type="none" w="med" len="med"/>
+                    </a:lnR>
+                    <a:lnT w="12700" cap="flat" cmpd="sng" algn="ctr">
+                      <a:solidFill>
+                        <a:schemeClr val="tx1"/>
+                      </a:solidFill>
+                      <a:prstDash val="solid"/>
+                      <a:round/>
+                      <a:headEnd type="none" w="med" len="med"/>
+                      <a:tailEnd type="none" w="med" len="med"/>
+                    </a:lnT>
+                    <a:lnB w="12700" cap="flat" cmpd="sng" algn="ctr">
+                      <a:solidFill>
+                        <a:schemeClr val="tx1"/>
+                      </a:solidFill>
+                      <a:prstDash val="solid"/>
+                      <a:round/>
+                      <a:headEnd type="none" w="med" len="med"/>
+                      <a:tailEnd type="none" w="med" len="med"/>
+                    </a:lnB>
+                    <a:noFill/>
+                  </a:tcPr>
+                </a:tc>
+                <a:tc>
+                  <a:txBody>
+                    <a:bodyPr/>
+                    <a:lstStyle/>
+                    <a:p>
+                      <a:r>
+                        <a:rPr lang="en-US"/>
+                        <a:t>İD ilə post tapılır. Əgər yoxdursa, səhifə 404 olur</a:t>
+                      </a:r>
+                    </a:p>
+                  </a:txBody>
+                  <a:tcPr anchor="ctr">
+                    <a:lnL w="12700" cap="flat" cmpd="sng" algn="ctr">
+                      <a:solidFill>
+                        <a:schemeClr val="tx1"/>
+                      </a:solidFill>
+                      <a:prstDash val="solid"/>
+                      <a:round/>
+                      <a:headEnd type="none" w="med" len="med"/>
+                      <a:tailEnd type="none" w="med" len="med"/>
+                    </a:lnL>
+                    <a:lnR w="12700" cap="flat" cmpd="sng" algn="ctr">
+                      <a:solidFill>
+                        <a:schemeClr val="tx1"/>
+                      </a:solidFill>
+                      <a:prstDash val="solid"/>
+                      <a:round/>
+                      <a:headEnd type="none" w="med" len="med"/>
+                      <a:tailEnd type="none" w="med" len="med"/>
+                    </a:lnR>
+                    <a:lnT w="12700" cap="flat" cmpd="sng" algn="ctr">
+                      <a:solidFill>
+                        <a:schemeClr val="tx1"/>
+                      </a:solidFill>
+                      <a:prstDash val="solid"/>
+                      <a:round/>
+                      <a:headEnd type="none" w="med" len="med"/>
+                      <a:tailEnd type="none" w="med" len="med"/>
+                    </a:lnT>
+                    <a:lnB w="12700" cap="flat" cmpd="sng" algn="ctr">
+                      <a:solidFill>
+                        <a:schemeClr val="tx1"/>
+                      </a:solidFill>
+                      <a:prstDash val="solid"/>
+                      <a:round/>
+                      <a:headEnd type="none" w="med" len="med"/>
+                      <a:tailEnd type="none" w="med" len="med"/>
+                    </a:lnB>
+                    <a:noFill/>
+                  </a:tcPr>
+                </a:tc>
+                <a:extLst>
+                  <a:ext uri="{0D108BD9-81ED-4DB2-BD59-A6C34878D82A}">
+                    <a16:rowId xmlns:a16="http://schemas.microsoft.com/office/drawing/2014/main" val="2014962252"/>
+                  </a:ext>
+                </a:extLst>
+              </a:tr>
+              <a:tr h="497778">
+                <a:tc>
+                  <a:txBody>
+                    <a:bodyPr/>
+                    <a:lstStyle/>
+                    <a:p>
+                      <a:r>
+                        <a:rPr lang="en-US"/>
+                        <a:t>3</a:t>
+                      </a:r>
+                    </a:p>
+                  </a:txBody>
+                  <a:tcPr anchor="ctr">
+                    <a:lnL w="12700" cap="flat" cmpd="sng" algn="ctr">
+                      <a:solidFill>
+                        <a:schemeClr val="tx1"/>
+                      </a:solidFill>
+                      <a:prstDash val="solid"/>
+                      <a:round/>
+                      <a:headEnd type="none" w="med" len="med"/>
+                      <a:tailEnd type="none" w="med" len="med"/>
+                    </a:lnL>
+                    <a:lnR w="12700" cap="flat" cmpd="sng" algn="ctr">
+                      <a:solidFill>
+                        <a:schemeClr val="tx1"/>
+                      </a:solidFill>
+                      <a:prstDash val="solid"/>
+                      <a:round/>
+                      <a:headEnd type="none" w="med" len="med"/>
+                      <a:tailEnd type="none" w="med" len="med"/>
+                    </a:lnR>
+                    <a:lnT w="12700" cap="flat" cmpd="sng" algn="ctr">
+                      <a:solidFill>
+                        <a:schemeClr val="tx1"/>
+                      </a:solidFill>
+                      <a:prstDash val="solid"/>
+                      <a:round/>
+                      <a:headEnd type="none" w="med" len="med"/>
+                      <a:tailEnd type="none" w="med" len="med"/>
+                    </a:lnT>
+                    <a:lnB w="12700" cap="flat" cmpd="sng" algn="ctr">
+                      <a:solidFill>
+                        <a:schemeClr val="tx1"/>
+                      </a:solidFill>
+                      <a:prstDash val="solid"/>
+                      <a:round/>
+                      <a:headEnd type="none" w="med" len="med"/>
+                      <a:tailEnd type="none" w="med" len="med"/>
+                    </a:lnB>
+                    <a:noFill/>
+                  </a:tcPr>
+                </a:tc>
+                <a:tc>
+                  <a:txBody>
+                    <a:bodyPr/>
+                    <a:lstStyle/>
+                    <a:p>
+                      <a:r>
+                        <a:rPr lang="en-US"/>
+                        <a:t>Əgər istifadəçi yeni şəkil yükləyibsə:</a:t>
+                      </a:r>
+                    </a:p>
+                  </a:txBody>
+                  <a:tcPr anchor="ctr">
+                    <a:lnL w="12700" cap="flat" cmpd="sng" algn="ctr">
+                      <a:solidFill>
+                        <a:schemeClr val="tx1"/>
+                      </a:solidFill>
+                      <a:prstDash val="solid"/>
+                      <a:round/>
+                      <a:headEnd type="none" w="med" len="med"/>
+                      <a:tailEnd type="none" w="med" len="med"/>
+                    </a:lnL>
+                    <a:lnR w="12700" cap="flat" cmpd="sng" algn="ctr">
+                      <a:solidFill>
+                        <a:schemeClr val="tx1"/>
+                      </a:solidFill>
+                      <a:prstDash val="solid"/>
+                      <a:round/>
+                      <a:headEnd type="none" w="med" len="med"/>
+                      <a:tailEnd type="none" w="med" len="med"/>
+                    </a:lnR>
+                    <a:lnT w="12700" cap="flat" cmpd="sng" algn="ctr">
+                      <a:solidFill>
+                        <a:schemeClr val="tx1"/>
+                      </a:solidFill>
+                      <a:prstDash val="solid"/>
+                      <a:round/>
+                      <a:headEnd type="none" w="med" len="med"/>
+                      <a:tailEnd type="none" w="med" len="med"/>
+                    </a:lnT>
+                    <a:lnB w="12700" cap="flat" cmpd="sng" algn="ctr">
+                      <a:solidFill>
+                        <a:schemeClr val="tx1"/>
+                      </a:solidFill>
+                      <a:prstDash val="solid"/>
+                      <a:round/>
+                      <a:headEnd type="none" w="med" len="med"/>
+                      <a:tailEnd type="none" w="med" len="med"/>
+                    </a:lnB>
+                    <a:noFill/>
+                  </a:tcPr>
+                </a:tc>
+                <a:extLst>
+                  <a:ext uri="{0D108BD9-81ED-4DB2-BD59-A6C34878D82A}">
+                    <a16:rowId xmlns:a16="http://schemas.microsoft.com/office/drawing/2014/main" val="2205087612"/>
+                  </a:ext>
+                </a:extLst>
+              </a:tr>
+              <a:tr h="497778">
+                <a:tc>
+                  <a:txBody>
+                    <a:bodyPr/>
+                    <a:lstStyle/>
+                    <a:p>
+                      <a:r>
+                        <a:rPr lang="en-US"/>
+                        <a:t>→</a:t>
+                      </a:r>
+                    </a:p>
+                  </a:txBody>
+                  <a:tcPr anchor="ctr">
+                    <a:lnL w="12700" cap="flat" cmpd="sng" algn="ctr">
+                      <a:solidFill>
+                        <a:schemeClr val="tx1"/>
+                      </a:solidFill>
+                      <a:prstDash val="solid"/>
+                      <a:round/>
+                      <a:headEnd type="none" w="med" len="med"/>
+                      <a:tailEnd type="none" w="med" len="med"/>
+                    </a:lnL>
+                    <a:lnR w="12700" cap="flat" cmpd="sng" algn="ctr">
+                      <a:solidFill>
+                        <a:schemeClr val="tx1"/>
+                      </a:solidFill>
+                      <a:prstDash val="solid"/>
+                      <a:round/>
+                      <a:headEnd type="none" w="med" len="med"/>
+                      <a:tailEnd type="none" w="med" len="med"/>
+                    </a:lnR>
+                    <a:lnT w="12700" cap="flat" cmpd="sng" algn="ctr">
+                      <a:solidFill>
+                        <a:schemeClr val="tx1"/>
+                      </a:solidFill>
+                      <a:prstDash val="solid"/>
+                      <a:round/>
+                      <a:headEnd type="none" w="med" len="med"/>
+                      <a:tailEnd type="none" w="med" len="med"/>
+                    </a:lnT>
+                    <a:lnB w="12700" cap="flat" cmpd="sng" algn="ctr">
+                      <a:solidFill>
+                        <a:schemeClr val="tx1"/>
+                      </a:solidFill>
+                      <a:prstDash val="solid"/>
+                      <a:round/>
+                      <a:headEnd type="none" w="med" len="med"/>
+                      <a:tailEnd type="none" w="med" len="med"/>
+                    </a:lnB>
+                    <a:noFill/>
+                  </a:tcPr>
+                </a:tc>
+                <a:tc>
+                  <a:txBody>
+                    <a:bodyPr/>
+                    <a:lstStyle/>
+                    <a:p>
+                      <a:r>
+                        <a:rPr lang="en-US"/>
+                        <a:t>- Şəkil validasiyası aparılır</a:t>
+                      </a:r>
+                    </a:p>
+                  </a:txBody>
+                  <a:tcPr anchor="ctr">
+                    <a:lnL w="12700" cap="flat" cmpd="sng" algn="ctr">
+                      <a:solidFill>
+                        <a:schemeClr val="tx1"/>
+                      </a:solidFill>
+                      <a:prstDash val="solid"/>
+                      <a:round/>
+                      <a:headEnd type="none" w="med" len="med"/>
+                      <a:tailEnd type="none" w="med" len="med"/>
+                    </a:lnL>
+                    <a:lnR w="12700" cap="flat" cmpd="sng" algn="ctr">
+                      <a:solidFill>
+                        <a:schemeClr val="tx1"/>
+                      </a:solidFill>
+                      <a:prstDash val="solid"/>
+                      <a:round/>
+                      <a:headEnd type="none" w="med" len="med"/>
+                      <a:tailEnd type="none" w="med" len="med"/>
+                    </a:lnR>
+                    <a:lnT w="12700" cap="flat" cmpd="sng" algn="ctr">
+                      <a:solidFill>
+                        <a:schemeClr val="tx1"/>
+                      </a:solidFill>
+                      <a:prstDash val="solid"/>
+                      <a:round/>
+                      <a:headEnd type="none" w="med" len="med"/>
+                      <a:tailEnd type="none" w="med" len="med"/>
+                    </a:lnT>
+                    <a:lnB w="12700" cap="flat" cmpd="sng" algn="ctr">
+                      <a:solidFill>
+                        <a:schemeClr val="tx1"/>
+                      </a:solidFill>
+                      <a:prstDash val="solid"/>
+                      <a:round/>
+                      <a:headEnd type="none" w="med" len="med"/>
+                      <a:tailEnd type="none" w="med" len="med"/>
+                    </a:lnB>
+                    <a:noFill/>
+                  </a:tcPr>
+                </a:tc>
+                <a:extLst>
+                  <a:ext uri="{0D108BD9-81ED-4DB2-BD59-A6C34878D82A}">
+                    <a16:rowId xmlns:a16="http://schemas.microsoft.com/office/drawing/2014/main" val="2939194742"/>
+                  </a:ext>
+                </a:extLst>
+              </a:tr>
+              <a:tr h="497778">
+                <a:tc>
+                  <a:txBody>
+                    <a:bodyPr/>
+                    <a:lstStyle/>
+                    <a:p>
+                      <a:r>
+                        <a:rPr lang="en-US"/>
+                        <a:t>→</a:t>
+                      </a:r>
+                    </a:p>
+                  </a:txBody>
+                  <a:tcPr anchor="ctr">
+                    <a:lnL w="12700" cap="flat" cmpd="sng" algn="ctr">
+                      <a:solidFill>
+                        <a:schemeClr val="tx1"/>
+                      </a:solidFill>
+                      <a:prstDash val="solid"/>
+                      <a:round/>
+                      <a:headEnd type="none" w="med" len="med"/>
+                      <a:tailEnd type="none" w="med" len="med"/>
+                    </a:lnL>
+                    <a:lnR w="12700" cap="flat" cmpd="sng" algn="ctr">
+                      <a:solidFill>
+                        <a:schemeClr val="tx1"/>
+                      </a:solidFill>
+                      <a:prstDash val="solid"/>
+                      <a:round/>
+                      <a:headEnd type="none" w="med" len="med"/>
+                      <a:tailEnd type="none" w="med" len="med"/>
+                    </a:lnR>
+                    <a:lnT w="12700" cap="flat" cmpd="sng" algn="ctr">
+                      <a:solidFill>
+                        <a:schemeClr val="tx1"/>
+                      </a:solidFill>
+                      <a:prstDash val="solid"/>
+                      <a:round/>
+                      <a:headEnd type="none" w="med" len="med"/>
+                      <a:tailEnd type="none" w="med" len="med"/>
+                    </a:lnT>
+                    <a:lnB w="12700" cap="flat" cmpd="sng" algn="ctr">
+                      <a:solidFill>
+                        <a:schemeClr val="tx1"/>
+                      </a:solidFill>
+                      <a:prstDash val="solid"/>
+                      <a:round/>
+                      <a:headEnd type="none" w="med" len="med"/>
+                      <a:tailEnd type="none" w="med" len="med"/>
+                    </a:lnB>
+                    <a:noFill/>
+                  </a:tcPr>
+                </a:tc>
+                <a:tc>
+                  <a:txBody>
+                    <a:bodyPr/>
+                    <a:lstStyle/>
+                    <a:p>
+                      <a:r>
+                        <a:rPr lang="en-US"/>
+                        <a:t>- Köhnə şəkil serverdən silinir</a:t>
+                      </a:r>
+                    </a:p>
+                  </a:txBody>
+                  <a:tcPr anchor="ctr">
+                    <a:lnL w="12700" cap="flat" cmpd="sng" algn="ctr">
+                      <a:solidFill>
+                        <a:schemeClr val="tx1"/>
+                      </a:solidFill>
+                      <a:prstDash val="solid"/>
+                      <a:round/>
+                      <a:headEnd type="none" w="med" len="med"/>
+                      <a:tailEnd type="none" w="med" len="med"/>
+                    </a:lnL>
+                    <a:lnR w="12700" cap="flat" cmpd="sng" algn="ctr">
+                      <a:solidFill>
+                        <a:schemeClr val="tx1"/>
+                      </a:solidFill>
+                      <a:prstDash val="solid"/>
+                      <a:round/>
+                      <a:headEnd type="none" w="med" len="med"/>
+                      <a:tailEnd type="none" w="med" len="med"/>
+                    </a:lnR>
+                    <a:lnT w="12700" cap="flat" cmpd="sng" algn="ctr">
+                      <a:solidFill>
+                        <a:schemeClr val="tx1"/>
+                      </a:solidFill>
+                      <a:prstDash val="solid"/>
+                      <a:round/>
+                      <a:headEnd type="none" w="med" len="med"/>
+                      <a:tailEnd type="none" w="med" len="med"/>
+                    </a:lnT>
+                    <a:lnB w="12700" cap="flat" cmpd="sng" algn="ctr">
+                      <a:solidFill>
+                        <a:schemeClr val="tx1"/>
+                      </a:solidFill>
+                      <a:prstDash val="solid"/>
+                      <a:round/>
+                      <a:headEnd type="none" w="med" len="med"/>
+                      <a:tailEnd type="none" w="med" len="med"/>
+                    </a:lnB>
+                    <a:noFill/>
+                  </a:tcPr>
+                </a:tc>
+                <a:extLst>
+                  <a:ext uri="{0D108BD9-81ED-4DB2-BD59-A6C34878D82A}">
+                    <a16:rowId xmlns:a16="http://schemas.microsoft.com/office/drawing/2014/main" val="2762958629"/>
+                  </a:ext>
+                </a:extLst>
+              </a:tr>
+              <a:tr h="497778">
+                <a:tc>
+                  <a:txBody>
+                    <a:bodyPr/>
+                    <a:lstStyle/>
+                    <a:p>
+                      <a:r>
+                        <a:rPr lang="en-US"/>
+                        <a:t>→</a:t>
+                      </a:r>
+                    </a:p>
+                  </a:txBody>
+                  <a:tcPr anchor="ctr">
+                    <a:lnL w="12700" cap="flat" cmpd="sng" algn="ctr">
+                      <a:solidFill>
+                        <a:schemeClr val="tx1"/>
+                      </a:solidFill>
+                      <a:prstDash val="solid"/>
+                      <a:round/>
+                      <a:headEnd type="none" w="med" len="med"/>
+                      <a:tailEnd type="none" w="med" len="med"/>
+                    </a:lnL>
+                    <a:lnR w="12700" cap="flat" cmpd="sng" algn="ctr">
+                      <a:solidFill>
+                        <a:schemeClr val="tx1"/>
+                      </a:solidFill>
+                      <a:prstDash val="solid"/>
+                      <a:round/>
+                      <a:headEnd type="none" w="med" len="med"/>
+                      <a:tailEnd type="none" w="med" len="med"/>
+                    </a:lnR>
+                    <a:lnT w="12700" cap="flat" cmpd="sng" algn="ctr">
+                      <a:solidFill>
+                        <a:schemeClr val="tx1"/>
+                      </a:solidFill>
+                      <a:prstDash val="solid"/>
+                      <a:round/>
+                      <a:headEnd type="none" w="med" len="med"/>
+                      <a:tailEnd type="none" w="med" len="med"/>
+                    </a:lnT>
+                    <a:lnB w="12700" cap="flat" cmpd="sng" algn="ctr">
+                      <a:solidFill>
+                        <a:schemeClr val="tx1"/>
+                      </a:solidFill>
+                      <a:prstDash val="solid"/>
+                      <a:round/>
+                      <a:headEnd type="none" w="med" len="med"/>
+                      <a:tailEnd type="none" w="med" len="med"/>
+                    </a:lnB>
+                    <a:noFill/>
+                  </a:tcPr>
+                </a:tc>
+                <a:tc>
+                  <a:txBody>
+                    <a:bodyPr/>
+                    <a:lstStyle/>
+                    <a:p>
+                      <a:r>
+                        <a:rPr lang="en-US"/>
+                        <a:t>- Yeni şəkil storage/uploads/ qovluğuna yüklənir və yol post obyektinə yazılır</a:t>
+                      </a:r>
+                    </a:p>
+                  </a:txBody>
+                  <a:tcPr anchor="ctr">
+                    <a:lnL w="12700" cap="flat" cmpd="sng" algn="ctr">
+                      <a:solidFill>
+                        <a:schemeClr val="tx1"/>
+                      </a:solidFill>
+                      <a:prstDash val="solid"/>
+                      <a:round/>
+                      <a:headEnd type="none" w="med" len="med"/>
+                      <a:tailEnd type="none" w="med" len="med"/>
+                    </a:lnL>
+                    <a:lnR w="12700" cap="flat" cmpd="sng" algn="ctr">
+                      <a:solidFill>
+                        <a:schemeClr val="tx1"/>
+                      </a:solidFill>
+                      <a:prstDash val="solid"/>
+                      <a:round/>
+                      <a:headEnd type="none" w="med" len="med"/>
+                      <a:tailEnd type="none" w="med" len="med"/>
+                    </a:lnR>
+                    <a:lnT w="12700" cap="flat" cmpd="sng" algn="ctr">
+                      <a:solidFill>
+                        <a:schemeClr val="tx1"/>
+                      </a:solidFill>
+                      <a:prstDash val="solid"/>
+                      <a:round/>
+                      <a:headEnd type="none" w="med" len="med"/>
+                      <a:tailEnd type="none" w="med" len="med"/>
+                    </a:lnT>
+                    <a:lnB w="12700" cap="flat" cmpd="sng" algn="ctr">
+                      <a:solidFill>
+                        <a:schemeClr val="tx1"/>
+                      </a:solidFill>
+                      <a:prstDash val="solid"/>
+                      <a:round/>
+                      <a:headEnd type="none" w="med" len="med"/>
+                      <a:tailEnd type="none" w="med" len="med"/>
+                    </a:lnB>
+                    <a:noFill/>
+                  </a:tcPr>
+                </a:tc>
+                <a:extLst>
+                  <a:ext uri="{0D108BD9-81ED-4DB2-BD59-A6C34878D82A}">
+                    <a16:rowId xmlns:a16="http://schemas.microsoft.com/office/drawing/2014/main" val="1642729374"/>
+                  </a:ext>
+                </a:extLst>
+              </a:tr>
+              <a:tr h="497778">
+                <a:tc>
+                  <a:txBody>
+                    <a:bodyPr/>
+                    <a:lstStyle/>
+                    <a:p>
+                      <a:r>
+                        <a:rPr lang="en-US"/>
+                        <a:t>4</a:t>
+                      </a:r>
+                    </a:p>
+                  </a:txBody>
+                  <a:tcPr anchor="ctr">
+                    <a:lnL w="12700" cap="flat" cmpd="sng" algn="ctr">
+                      <a:solidFill>
+                        <a:schemeClr val="tx1"/>
+                      </a:solidFill>
+                      <a:prstDash val="solid"/>
+                      <a:round/>
+                      <a:headEnd type="none" w="med" len="med"/>
+                      <a:tailEnd type="none" w="med" len="med"/>
+                    </a:lnL>
+                    <a:lnR w="12700" cap="flat" cmpd="sng" algn="ctr">
+                      <a:solidFill>
+                        <a:schemeClr val="tx1"/>
+                      </a:solidFill>
+                      <a:prstDash val="solid"/>
+                      <a:round/>
+                      <a:headEnd type="none" w="med" len="med"/>
+                      <a:tailEnd type="none" w="med" len="med"/>
+                    </a:lnR>
+                    <a:lnT w="12700" cap="flat" cmpd="sng" algn="ctr">
+                      <a:solidFill>
+                        <a:schemeClr val="tx1"/>
+                      </a:solidFill>
+                      <a:prstDash val="solid"/>
+                      <a:round/>
+                      <a:headEnd type="none" w="med" len="med"/>
+                      <a:tailEnd type="none" w="med" len="med"/>
+                    </a:lnT>
+                    <a:lnB w="12700" cap="flat" cmpd="sng" algn="ctr">
+                      <a:solidFill>
+                        <a:schemeClr val="tx1"/>
+                      </a:solidFill>
+                      <a:prstDash val="solid"/>
+                      <a:round/>
+                      <a:headEnd type="none" w="med" len="med"/>
+                      <a:tailEnd type="none" w="med" len="med"/>
+                    </a:lnB>
+                    <a:noFill/>
+                  </a:tcPr>
+                </a:tc>
+                <a:tc>
+                  <a:txBody>
+                    <a:bodyPr/>
+                    <a:lstStyle/>
+                    <a:p>
+                      <a:r>
+                        <a:rPr lang="en-US"/>
+                        <a:t>Qalan məlumatlar yenilənir və save() edilir</a:t>
+                      </a:r>
+                    </a:p>
+                  </a:txBody>
+                  <a:tcPr anchor="ctr">
+                    <a:lnL w="12700" cap="flat" cmpd="sng" algn="ctr">
+                      <a:solidFill>
+                        <a:schemeClr val="tx1"/>
+                      </a:solidFill>
+                      <a:prstDash val="solid"/>
+                      <a:round/>
+                      <a:headEnd type="none" w="med" len="med"/>
+                      <a:tailEnd type="none" w="med" len="med"/>
+                    </a:lnL>
+                    <a:lnR w="12700" cap="flat" cmpd="sng" algn="ctr">
+                      <a:solidFill>
+                        <a:schemeClr val="tx1"/>
+                      </a:solidFill>
+                      <a:prstDash val="solid"/>
+                      <a:round/>
+                      <a:headEnd type="none" w="med" len="med"/>
+                      <a:tailEnd type="none" w="med" len="med"/>
+                    </a:lnR>
+                    <a:lnT w="12700" cap="flat" cmpd="sng" algn="ctr">
+                      <a:solidFill>
+                        <a:schemeClr val="tx1"/>
+                      </a:solidFill>
+                      <a:prstDash val="solid"/>
+                      <a:round/>
+                      <a:headEnd type="none" w="med" len="med"/>
+                      <a:tailEnd type="none" w="med" len="med"/>
+                    </a:lnT>
+                    <a:lnB w="12700" cap="flat" cmpd="sng" algn="ctr">
+                      <a:solidFill>
+                        <a:schemeClr val="tx1"/>
+                      </a:solidFill>
+                      <a:prstDash val="solid"/>
+                      <a:round/>
+                      <a:headEnd type="none" w="med" len="med"/>
+                      <a:tailEnd type="none" w="med" len="med"/>
+                    </a:lnB>
+                    <a:noFill/>
+                  </a:tcPr>
+                </a:tc>
+                <a:extLst>
+                  <a:ext uri="{0D108BD9-81ED-4DB2-BD59-A6C34878D82A}">
+                    <a16:rowId xmlns:a16="http://schemas.microsoft.com/office/drawing/2014/main" val="280617220"/>
+                  </a:ext>
+                </a:extLst>
+              </a:tr>
+              <a:tr h="497778">
+                <a:tc>
+                  <a:txBody>
+                    <a:bodyPr/>
+                    <a:lstStyle/>
+                    <a:p>
+                      <a:r>
+                        <a:rPr lang="en-US"/>
+                        <a:t>5</a:t>
+                      </a:r>
+                    </a:p>
+                  </a:txBody>
+                  <a:tcPr anchor="ctr">
+                    <a:lnL w="12700" cap="flat" cmpd="sng" algn="ctr">
+                      <a:solidFill>
+                        <a:schemeClr val="tx1"/>
+                      </a:solidFill>
+                      <a:prstDash val="solid"/>
+                      <a:round/>
+                      <a:headEnd type="none" w="med" len="med"/>
+                      <a:tailEnd type="none" w="med" len="med"/>
+                    </a:lnL>
+                    <a:lnR w="12700" cap="flat" cmpd="sng" algn="ctr">
+                      <a:solidFill>
+                        <a:schemeClr val="tx1"/>
+                      </a:solidFill>
+                      <a:prstDash val="solid"/>
+                      <a:round/>
+                      <a:headEnd type="none" w="med" len="med"/>
+                      <a:tailEnd type="none" w="med" len="med"/>
+                    </a:lnR>
+                    <a:lnT w="12700" cap="flat" cmpd="sng" algn="ctr">
+                      <a:solidFill>
+                        <a:schemeClr val="tx1"/>
+                      </a:solidFill>
+                      <a:prstDash val="solid"/>
+                      <a:round/>
+                      <a:headEnd type="none" w="med" len="med"/>
+                      <a:tailEnd type="none" w="med" len="med"/>
+                    </a:lnT>
+                    <a:lnB w="12700" cap="flat" cmpd="sng" algn="ctr">
+                      <a:solidFill>
+                        <a:schemeClr val="tx1"/>
+                      </a:solidFill>
+                      <a:prstDash val="solid"/>
+                      <a:round/>
+                      <a:headEnd type="none" w="med" len="med"/>
+                      <a:tailEnd type="none" w="med" len="med"/>
+                    </a:lnB>
+                    <a:noFill/>
+                  </a:tcPr>
+                </a:tc>
+                <a:tc>
+                  <a:txBody>
+                    <a:bodyPr/>
+                    <a:lstStyle/>
+                    <a:p>
+                      <a:r>
+                        <a:rPr lang="en-US"/>
+                        <a:t>İstifadəçi posts.index səhifəsinə yönləndirilir</a:t>
+                      </a:r>
+                    </a:p>
+                  </a:txBody>
+                  <a:tcPr anchor="ctr">
+                    <a:lnL w="12700" cap="flat" cmpd="sng" algn="ctr">
+                      <a:solidFill>
+                        <a:schemeClr val="tx1"/>
+                      </a:solidFill>
+                      <a:prstDash val="solid"/>
+                      <a:round/>
+                      <a:headEnd type="none" w="med" len="med"/>
+                      <a:tailEnd type="none" w="med" len="med"/>
+                    </a:lnL>
+                    <a:lnR w="12700" cap="flat" cmpd="sng" algn="ctr">
+                      <a:solidFill>
+                        <a:schemeClr val="tx1"/>
+                      </a:solidFill>
+                      <a:prstDash val="solid"/>
+                      <a:round/>
+                      <a:headEnd type="none" w="med" len="med"/>
+                      <a:tailEnd type="none" w="med" len="med"/>
+                    </a:lnR>
+                    <a:lnT w="12700" cap="flat" cmpd="sng" algn="ctr">
+                      <a:solidFill>
+                        <a:schemeClr val="tx1"/>
+                      </a:solidFill>
+                      <a:prstDash val="solid"/>
+                      <a:round/>
+                      <a:headEnd type="none" w="med" len="med"/>
+                      <a:tailEnd type="none" w="med" len="med"/>
+                    </a:lnT>
+                    <a:lnB w="12700" cap="flat" cmpd="sng" algn="ctr">
+                      <a:solidFill>
+                        <a:schemeClr val="tx1"/>
+                      </a:solidFill>
+                      <a:prstDash val="solid"/>
+                      <a:round/>
+                      <a:headEnd type="none" w="med" len="med"/>
+                      <a:tailEnd type="none" w="med" len="med"/>
+                    </a:lnB>
+                    <a:noFill/>
+                  </a:tcPr>
+                </a:tc>
+                <a:extLst>
+                  <a:ext uri="{0D108BD9-81ED-4DB2-BD59-A6C34878D82A}">
+                    <a16:rowId xmlns:a16="http://schemas.microsoft.com/office/drawing/2014/main" val="727538100"/>
+                  </a:ext>
+                </a:extLst>
+              </a:tr>
+            </a:tbl>
+          </a:graphicData>
+        </a:graphic>
+      </p:graphicFrame>
+    </p:spTree>
+    <p:extLst>
+      <p:ext uri="{BB962C8B-B14F-4D97-AF65-F5344CB8AC3E}">
+        <p14:creationId xmlns:p14="http://schemas.microsoft.com/office/powerpoint/2010/main" val="979628492"/>
+      </p:ext>
+    </p:extLst>
+  </p:cSld>
+  <p:clrMapOvr>
+    <a:masterClrMapping/>
+  </p:clrMapOvr>
+</p:sld>
+</file>
+
+<file path=ppt/slides/slide15.xml><?xml version="1.0" encoding="utf-8"?>
+<p:sld xmlns:a="http://schemas.openxmlformats.org/drawingml/2006/main" xmlns:r="http://schemas.openxmlformats.org/officeDocument/2006/relationships" xmlns:p="http://schemas.openxmlformats.org/presentationml/2006/main">
+  <p:cSld>
+    <p:spTree>
+      <p:nvGrpSpPr>
+        <p:cNvPr id="1" name="">
+          <a:extLst>
+            <a:ext uri="{FF2B5EF4-FFF2-40B4-BE49-F238E27FC236}">
+              <a16:creationId xmlns:a16="http://schemas.microsoft.com/office/drawing/2014/main" id="{06FBC8B5-836C-8260-8EAC-E5F351FB0C50}"/>
+            </a:ext>
+          </a:extLst>
+        </p:cNvPr>
+        <p:cNvGrpSpPr/>
+        <p:nvPr/>
+      </p:nvGrpSpPr>
+      <p:grpSpPr>
+        <a:xfrm>
+          <a:off x="0" y="0"/>
+          <a:ext cx="0" cy="0"/>
+          <a:chOff x="0" y="0"/>
+          <a:chExt cx="0" cy="0"/>
+        </a:xfrm>
+      </p:grpSpPr>
+      <p:sp>
+        <p:nvSpPr>
+          <p:cNvPr id="3" name="TextBox 2">
+            <a:extLst>
+              <a:ext uri="{FF2B5EF4-FFF2-40B4-BE49-F238E27FC236}">
+                <a16:creationId xmlns:a16="http://schemas.microsoft.com/office/drawing/2014/main" id="{5B9A0289-DA16-1A43-8F30-524997770174}"/>
+              </a:ext>
+            </a:extLst>
+          </p:cNvPr>
+          <p:cNvSpPr txBox="1"/>
+          <p:nvPr/>
+        </p:nvSpPr>
+        <p:spPr>
+          <a:xfrm>
+            <a:off x="217714" y="255046"/>
+            <a:ext cx="11756571" cy="2155847"/>
+          </a:xfrm>
+          <a:prstGeom prst="rect">
+            <a:avLst/>
+          </a:prstGeom>
+          <a:noFill/>
+        </p:spPr>
+        <p:txBody>
+          <a:bodyPr wrap="square">
+            <a:spAutoFit/>
+          </a:bodyPr>
+          <a:lstStyle/>
+          <a:p>
+            <a:pPr>
+              <a:lnSpc>
+                <a:spcPct val="150000"/>
+              </a:lnSpc>
+              <a:buNone/>
+            </a:pPr>
+            <a:r>
+              <a:rPr lang="en-US" altLang="en-US" sz="1300">
+                <a:latin typeface="Arial" panose="020B0604020202020204" pitchFamily="34" charset="0"/>
+              </a:rPr>
+              <a:t>Hal haz</a:t>
+            </a:r>
+            <a:r>
+              <a:rPr lang="az-Latn-AZ" altLang="en-US" sz="1300">
+                <a:latin typeface="Arial" panose="020B0604020202020204" pitchFamily="34" charset="0"/>
+              </a:rPr>
+              <a:t>ırda aşağıdakı kimi məlumatlar əlavə etdim cədvələ. Şəkillərin adlarını image1, image2, image3 olaraq qeyd etmişəm. İndi bunları </a:t>
+            </a:r>
+            <a:r>
+              <a:rPr lang="az-Latn-AZ" altLang="en-US" sz="1300" b="1">
+                <a:latin typeface="Arial" panose="020B0604020202020204" pitchFamily="34" charset="0"/>
+              </a:rPr>
+              <a:t>UPDATE</a:t>
+            </a:r>
+            <a:r>
+              <a:rPr lang="az-Latn-AZ" altLang="en-US" sz="1300">
+                <a:latin typeface="Arial" panose="020B0604020202020204" pitchFamily="34" charset="0"/>
+              </a:rPr>
+              <a:t> edəcəyik.</a:t>
+            </a:r>
+          </a:p>
+          <a:p>
+            <a:pPr>
+              <a:lnSpc>
+                <a:spcPct val="150000"/>
+              </a:lnSpc>
+              <a:buNone/>
+            </a:pPr>
+            <a:endParaRPr kumimoji="0" lang="az-Latn-AZ" altLang="en-US" sz="1300" b="0" i="0" u="none" strike="noStrike" cap="none" normalizeH="0" baseline="0">
+              <a:ln>
+                <a:noFill/>
+              </a:ln>
+              <a:solidFill>
+                <a:schemeClr val="tx1"/>
+              </a:solidFill>
+              <a:effectLst/>
+              <a:latin typeface="Arial" panose="020B0604020202020204" pitchFamily="34" charset="0"/>
+            </a:endParaRPr>
+          </a:p>
+          <a:p>
+            <a:pPr>
+              <a:lnSpc>
+                <a:spcPct val="150000"/>
+              </a:lnSpc>
+              <a:buNone/>
+            </a:pPr>
+            <a:endParaRPr lang="az-Latn-AZ" altLang="en-US" sz="1300">
+              <a:latin typeface="Arial" panose="020B0604020202020204" pitchFamily="34" charset="0"/>
+            </a:endParaRPr>
+          </a:p>
+          <a:p>
+            <a:pPr>
+              <a:lnSpc>
+                <a:spcPct val="150000"/>
+              </a:lnSpc>
+              <a:buNone/>
+            </a:pPr>
+            <a:r>
+              <a:rPr kumimoji="0" lang="az-Latn-AZ" altLang="en-US" sz="1300" b="0" i="0" u="none" strike="noStrike" cap="none" normalizeH="0" baseline="0">
+                <a:ln>
+                  <a:noFill/>
+                </a:ln>
+                <a:solidFill>
+                  <a:schemeClr val="tx1"/>
+                </a:solidFill>
+                <a:effectLst/>
+                <a:latin typeface="Arial" panose="020B0604020202020204" pitchFamily="34" charset="0"/>
+              </a:rPr>
+              <a:t>İ</a:t>
+            </a:r>
+            <a:r>
+              <a:rPr lang="az-Latn-AZ" altLang="en-US" sz="1300">
+                <a:latin typeface="Arial" panose="020B0604020202020204" pitchFamily="34" charset="0"/>
+              </a:rPr>
+              <a:t>ndi </a:t>
+            </a:r>
+            <a:r>
+              <a:rPr lang="az-Latn-AZ" altLang="en-US" sz="1300" b="1">
+                <a:latin typeface="Arial" panose="020B0604020202020204" pitchFamily="34" charset="0"/>
+              </a:rPr>
+              <a:t>EDİT</a:t>
+            </a:r>
+            <a:r>
+              <a:rPr lang="az-Latn-AZ" altLang="en-US" sz="1300">
+                <a:latin typeface="Arial" panose="020B0604020202020204" pitchFamily="34" charset="0"/>
+              </a:rPr>
+              <a:t> düyməsini klikləyərk postu yeniləyək və burada bir səhf ilə qarşılaşacağıq. </a:t>
+            </a:r>
+            <a:r>
+              <a:rPr lang="az-Latn-AZ" altLang="en-US" sz="1300" b="1">
+                <a:latin typeface="Arial" panose="020B0604020202020204" pitchFamily="34" charset="0"/>
+              </a:rPr>
+              <a:t>Title</a:t>
+            </a:r>
+            <a:r>
+              <a:rPr lang="az-Latn-AZ" altLang="en-US" sz="1300">
+                <a:latin typeface="Arial" panose="020B0604020202020204" pitchFamily="34" charset="0"/>
+              </a:rPr>
+              <a:t> sahəsində bütün yazılar yox sadəcə birinci söz görsənəcəkdir. Növbəti 4 slaydı izləyə bilərsiz. </a:t>
+            </a:r>
+          </a:p>
+          <a:p>
+            <a:pPr>
+              <a:lnSpc>
+                <a:spcPct val="150000"/>
+              </a:lnSpc>
+              <a:buNone/>
+            </a:pPr>
+            <a:endParaRPr kumimoji="0" lang="az-Latn-AZ" altLang="en-US" sz="1300" b="0" i="0" u="none" strike="noStrike" cap="none" normalizeH="0" baseline="0">
+              <a:ln>
+                <a:noFill/>
+              </a:ln>
+              <a:solidFill>
+                <a:schemeClr val="tx1"/>
+              </a:solidFill>
+              <a:effectLst/>
+              <a:latin typeface="Arial" panose="020B0604020202020204" pitchFamily="34" charset="0"/>
+            </a:endParaRPr>
+          </a:p>
+          <a:p>
+            <a:pPr>
+              <a:lnSpc>
+                <a:spcPct val="150000"/>
+              </a:lnSpc>
+              <a:buNone/>
+            </a:pPr>
+            <a:r>
+              <a:rPr lang="az-Latn-AZ" altLang="en-US" sz="1300">
+                <a:latin typeface="Arial" panose="020B0604020202020204" pitchFamily="34" charset="0"/>
+              </a:rPr>
+              <a:t>Bu səhfin nə olduğu ən sonda deyəcəm. </a:t>
+            </a:r>
+            <a:endParaRPr kumimoji="0" lang="en-US" altLang="en-US" sz="1300" b="0" i="0" u="none" strike="noStrike" cap="none" normalizeH="0" baseline="0">
+              <a:ln>
+                <a:noFill/>
+              </a:ln>
+              <a:solidFill>
+                <a:schemeClr val="tx1"/>
+              </a:solidFill>
+              <a:effectLst/>
+              <a:latin typeface="Arial" panose="020B0604020202020204" pitchFamily="34" charset="0"/>
+            </a:endParaRPr>
+          </a:p>
+        </p:txBody>
+      </p:sp>
+      <p:pic>
+        <p:nvPicPr>
+          <p:cNvPr id="4" name="Picture 3">
+            <a:extLst>
+              <a:ext uri="{FF2B5EF4-FFF2-40B4-BE49-F238E27FC236}">
+                <a16:creationId xmlns:a16="http://schemas.microsoft.com/office/drawing/2014/main" id="{D6E6D56A-D939-EF3D-B016-D335DA82B3FB}"/>
+              </a:ext>
+            </a:extLst>
+          </p:cNvPr>
+          <p:cNvPicPr>
+            <a:picLocks noChangeAspect="1"/>
+          </p:cNvPicPr>
+          <p:nvPr/>
+        </p:nvPicPr>
+        <p:blipFill>
+          <a:blip r:embed="rId2"/>
+          <a:stretch>
+            <a:fillRect/>
+          </a:stretch>
+        </p:blipFill>
+        <p:spPr>
+          <a:xfrm>
+            <a:off x="0" y="2694489"/>
+            <a:ext cx="12192000" cy="4070819"/>
+          </a:xfrm>
+          <a:prstGeom prst="rect">
+            <a:avLst/>
+          </a:prstGeom>
+          <a:ln w="38100" cap="sq">
+            <a:solidFill>
+              <a:srgbClr val="000000"/>
+            </a:solidFill>
+            <a:prstDash val="solid"/>
+            <a:miter lim="800000"/>
+          </a:ln>
+          <a:effectLst>
+            <a:outerShdw blurRad="50800" dist="38100" dir="2700000" algn="tl" rotWithShape="0">
+              <a:srgbClr val="000000">
+                <a:alpha val="43000"/>
+              </a:srgbClr>
+            </a:outerShdw>
+          </a:effectLst>
+        </p:spPr>
+      </p:pic>
+    </p:spTree>
+    <p:extLst>
+      <p:ext uri="{BB962C8B-B14F-4D97-AF65-F5344CB8AC3E}">
+        <p14:creationId xmlns:p14="http://schemas.microsoft.com/office/powerpoint/2010/main" val="2135416007"/>
+      </p:ext>
+    </p:extLst>
+  </p:cSld>
+  <p:clrMapOvr>
+    <a:masterClrMapping/>
+  </p:clrMapOvr>
+</p:sld>
+</file>
+
+<file path=ppt/slides/slide16.xml><?xml version="1.0" encoding="utf-8"?>
+<p:sld xmlns:a="http://schemas.openxmlformats.org/drawingml/2006/main" xmlns:r="http://schemas.openxmlformats.org/officeDocument/2006/relationships" xmlns:p="http://schemas.openxmlformats.org/presentationml/2006/main">
+  <p:cSld>
+    <p:spTree>
+      <p:nvGrpSpPr>
+        <p:cNvPr id="1" name="">
+          <a:extLst>
+            <a:ext uri="{FF2B5EF4-FFF2-40B4-BE49-F238E27FC236}">
+              <a16:creationId xmlns:a16="http://schemas.microsoft.com/office/drawing/2014/main" id="{9434E1F6-F81C-6DB9-24CB-B4C6AD6EB0C2}"/>
+            </a:ext>
+          </a:extLst>
+        </p:cNvPr>
+        <p:cNvGrpSpPr/>
+        <p:nvPr/>
+      </p:nvGrpSpPr>
+      <p:grpSpPr>
+        <a:xfrm>
+          <a:off x="0" y="0"/>
+          <a:ext cx="0" cy="0"/>
+          <a:chOff x="0" y="0"/>
+          <a:chExt cx="0" cy="0"/>
+        </a:xfrm>
+      </p:grpSpPr>
+      <p:sp>
+        <p:nvSpPr>
+          <p:cNvPr id="3" name="TextBox 2">
+            <a:extLst>
+              <a:ext uri="{FF2B5EF4-FFF2-40B4-BE49-F238E27FC236}">
+                <a16:creationId xmlns:a16="http://schemas.microsoft.com/office/drawing/2014/main" id="{D16805A3-32C0-7DA6-FD0E-486D6056E874}"/>
+              </a:ext>
+            </a:extLst>
+          </p:cNvPr>
+          <p:cNvSpPr txBox="1"/>
+          <p:nvPr/>
+        </p:nvSpPr>
+        <p:spPr>
+          <a:xfrm>
+            <a:off x="217714" y="255046"/>
+            <a:ext cx="11756571" cy="355354"/>
+          </a:xfrm>
+          <a:prstGeom prst="rect">
+            <a:avLst/>
+          </a:prstGeom>
+          <a:noFill/>
+        </p:spPr>
+        <p:txBody>
+          <a:bodyPr wrap="square">
+            <a:spAutoFit/>
+          </a:bodyPr>
+          <a:lstStyle/>
+          <a:p>
+            <a:pPr>
+              <a:lnSpc>
+                <a:spcPct val="150000"/>
+              </a:lnSpc>
+              <a:buNone/>
+            </a:pPr>
+            <a:r>
+              <a:rPr kumimoji="0" lang="en-US" altLang="en-US" sz="1300" b="0" i="0" u="none" strike="noStrike" cap="none" normalizeH="0" baseline="0">
+                <a:ln>
+                  <a:noFill/>
+                </a:ln>
+                <a:solidFill>
+                  <a:schemeClr val="tx1"/>
+                </a:solidFill>
+                <a:effectLst/>
+                <a:latin typeface="Arial" panose="020B0604020202020204" pitchFamily="34" charset="0"/>
+              </a:rPr>
+              <a:t>.</a:t>
+            </a:r>
+          </a:p>
+        </p:txBody>
+      </p:sp>
+      <p:pic>
+        <p:nvPicPr>
+          <p:cNvPr id="5" name="Picture 4">
+            <a:extLst>
+              <a:ext uri="{FF2B5EF4-FFF2-40B4-BE49-F238E27FC236}">
+                <a16:creationId xmlns:a16="http://schemas.microsoft.com/office/drawing/2014/main" id="{51186720-3749-E429-3A85-A1472BE5BEDF}"/>
+              </a:ext>
+            </a:extLst>
+          </p:cNvPr>
+          <p:cNvPicPr>
+            <a:picLocks noChangeAspect="1"/>
+          </p:cNvPicPr>
+          <p:nvPr/>
+        </p:nvPicPr>
+        <p:blipFill>
+          <a:blip r:embed="rId2"/>
+          <a:stretch>
+            <a:fillRect/>
+          </a:stretch>
+        </p:blipFill>
+        <p:spPr>
+          <a:xfrm>
+            <a:off x="605989" y="0"/>
+            <a:ext cx="10980019" cy="6858000"/>
+          </a:xfrm>
+          <a:prstGeom prst="rect">
+            <a:avLst/>
+          </a:prstGeom>
+          <a:ln w="38100" cap="sq">
+            <a:solidFill>
+              <a:srgbClr val="000000"/>
+            </a:solidFill>
+            <a:prstDash val="solid"/>
+            <a:miter lim="800000"/>
+          </a:ln>
+          <a:effectLst>
+            <a:outerShdw blurRad="50800" dist="38100" dir="2700000" algn="tl" rotWithShape="0">
+              <a:srgbClr val="000000">
+                <a:alpha val="43000"/>
+              </a:srgbClr>
+            </a:outerShdw>
+          </a:effectLst>
+        </p:spPr>
+      </p:pic>
+    </p:spTree>
+    <p:extLst>
+      <p:ext uri="{BB962C8B-B14F-4D97-AF65-F5344CB8AC3E}">
+        <p14:creationId xmlns:p14="http://schemas.microsoft.com/office/powerpoint/2010/main" val="3772548992"/>
+      </p:ext>
+    </p:extLst>
+  </p:cSld>
+  <p:clrMapOvr>
+    <a:masterClrMapping/>
+  </p:clrMapOvr>
+</p:sld>
+</file>
+
+<file path=ppt/slides/slide17.xml><?xml version="1.0" encoding="utf-8"?>
+<p:sld xmlns:a="http://schemas.openxmlformats.org/drawingml/2006/main" xmlns:r="http://schemas.openxmlformats.org/officeDocument/2006/relationships" xmlns:p="http://schemas.openxmlformats.org/presentationml/2006/main">
+  <p:cSld>
+    <p:spTree>
+      <p:nvGrpSpPr>
+        <p:cNvPr id="1" name="">
+          <a:extLst>
+            <a:ext uri="{FF2B5EF4-FFF2-40B4-BE49-F238E27FC236}">
+              <a16:creationId xmlns:a16="http://schemas.microsoft.com/office/drawing/2014/main" id="{622D72B6-D940-CF00-E343-F12C99170B79}"/>
+            </a:ext>
+          </a:extLst>
+        </p:cNvPr>
+        <p:cNvGrpSpPr/>
+        <p:nvPr/>
+      </p:nvGrpSpPr>
+      <p:grpSpPr>
+        <a:xfrm>
+          <a:off x="0" y="0"/>
+          <a:ext cx="0" cy="0"/>
+          <a:chOff x="0" y="0"/>
+          <a:chExt cx="0" cy="0"/>
+        </a:xfrm>
+      </p:grpSpPr>
+      <p:sp>
+        <p:nvSpPr>
+          <p:cNvPr id="3" name="TextBox 2">
+            <a:extLst>
+              <a:ext uri="{FF2B5EF4-FFF2-40B4-BE49-F238E27FC236}">
+                <a16:creationId xmlns:a16="http://schemas.microsoft.com/office/drawing/2014/main" id="{67BE3753-05AE-FE3A-B85B-80F6977CA97F}"/>
+              </a:ext>
+            </a:extLst>
+          </p:cNvPr>
+          <p:cNvSpPr txBox="1"/>
+          <p:nvPr/>
+        </p:nvSpPr>
+        <p:spPr>
+          <a:xfrm>
+            <a:off x="217714" y="255046"/>
+            <a:ext cx="11756571" cy="355354"/>
+          </a:xfrm>
+          <a:prstGeom prst="rect">
+            <a:avLst/>
+          </a:prstGeom>
+          <a:noFill/>
+        </p:spPr>
+        <p:txBody>
+          <a:bodyPr wrap="square">
+            <a:spAutoFit/>
+          </a:bodyPr>
+          <a:lstStyle/>
+          <a:p>
+            <a:pPr>
+              <a:lnSpc>
+                <a:spcPct val="150000"/>
+              </a:lnSpc>
+              <a:buNone/>
+            </a:pPr>
+            <a:r>
+              <a:rPr kumimoji="0" lang="en-US" altLang="en-US" sz="1300" b="0" i="0" u="none" strike="noStrike" cap="none" normalizeH="0" baseline="0">
+                <a:ln>
+                  <a:noFill/>
+                </a:ln>
+                <a:solidFill>
+                  <a:schemeClr val="tx1"/>
+                </a:solidFill>
+                <a:effectLst/>
+                <a:latin typeface="Arial" panose="020B0604020202020204" pitchFamily="34" charset="0"/>
+              </a:rPr>
+              <a:t>.</a:t>
+            </a:r>
+          </a:p>
+        </p:txBody>
+      </p:sp>
+      <p:pic>
+        <p:nvPicPr>
+          <p:cNvPr id="4" name="Picture 3">
+            <a:extLst>
+              <a:ext uri="{FF2B5EF4-FFF2-40B4-BE49-F238E27FC236}">
+                <a16:creationId xmlns:a16="http://schemas.microsoft.com/office/drawing/2014/main" id="{3B14DD4C-9812-1473-8589-DC85185AE64E}"/>
+              </a:ext>
+            </a:extLst>
+          </p:cNvPr>
+          <p:cNvPicPr>
+            <a:picLocks noChangeAspect="1"/>
+          </p:cNvPicPr>
+          <p:nvPr/>
+        </p:nvPicPr>
+        <p:blipFill>
+          <a:blip r:embed="rId2"/>
+          <a:stretch>
+            <a:fillRect/>
+          </a:stretch>
+        </p:blipFill>
+        <p:spPr>
+          <a:xfrm>
+            <a:off x="399255" y="1161733"/>
+            <a:ext cx="11393490" cy="4534533"/>
+          </a:xfrm>
+          <a:prstGeom prst="rect">
+            <a:avLst/>
+          </a:prstGeom>
+          <a:ln w="38100" cap="sq">
+            <a:solidFill>
+              <a:srgbClr val="000000"/>
+            </a:solidFill>
+            <a:prstDash val="solid"/>
+            <a:miter lim="800000"/>
+          </a:ln>
+          <a:effectLst>
+            <a:outerShdw blurRad="50800" dist="38100" dir="2700000" algn="tl" rotWithShape="0">
+              <a:srgbClr val="000000">
+                <a:alpha val="43000"/>
+              </a:srgbClr>
+            </a:outerShdw>
+          </a:effectLst>
+        </p:spPr>
+      </p:pic>
+    </p:spTree>
+    <p:extLst>
+      <p:ext uri="{BB962C8B-B14F-4D97-AF65-F5344CB8AC3E}">
+        <p14:creationId xmlns:p14="http://schemas.microsoft.com/office/powerpoint/2010/main" val="226139449"/>
+      </p:ext>
+    </p:extLst>
+  </p:cSld>
+  <p:clrMapOvr>
+    <a:masterClrMapping/>
+  </p:clrMapOvr>
+</p:sld>
+</file>
+
+<file path=ppt/slides/slide18.xml><?xml version="1.0" encoding="utf-8"?>
+<p:sld xmlns:a="http://schemas.openxmlformats.org/drawingml/2006/main" xmlns:r="http://schemas.openxmlformats.org/officeDocument/2006/relationships" xmlns:p="http://schemas.openxmlformats.org/presentationml/2006/main">
+  <p:cSld>
+    <p:spTree>
+      <p:nvGrpSpPr>
+        <p:cNvPr id="1" name="">
+          <a:extLst>
+            <a:ext uri="{FF2B5EF4-FFF2-40B4-BE49-F238E27FC236}">
+              <a16:creationId xmlns:a16="http://schemas.microsoft.com/office/drawing/2014/main" id="{4221D48C-3FD5-3B8C-3036-E8932FE2EAC1}"/>
+            </a:ext>
+          </a:extLst>
+        </p:cNvPr>
+        <p:cNvGrpSpPr/>
+        <p:nvPr/>
+      </p:nvGrpSpPr>
+      <p:grpSpPr>
+        <a:xfrm>
+          <a:off x="0" y="0"/>
+          <a:ext cx="0" cy="0"/>
+          <a:chOff x="0" y="0"/>
+          <a:chExt cx="0" cy="0"/>
+        </a:xfrm>
+      </p:grpSpPr>
+      <p:sp>
+        <p:nvSpPr>
+          <p:cNvPr id="3" name="TextBox 2">
+            <a:extLst>
+              <a:ext uri="{FF2B5EF4-FFF2-40B4-BE49-F238E27FC236}">
+                <a16:creationId xmlns:a16="http://schemas.microsoft.com/office/drawing/2014/main" id="{0AC9D28C-F927-D4D6-8596-6838360A551A}"/>
+              </a:ext>
+            </a:extLst>
+          </p:cNvPr>
+          <p:cNvSpPr txBox="1"/>
+          <p:nvPr/>
+        </p:nvSpPr>
+        <p:spPr>
+          <a:xfrm>
+            <a:off x="217714" y="255046"/>
+            <a:ext cx="11756571" cy="355354"/>
+          </a:xfrm>
+          <a:prstGeom prst="rect">
+            <a:avLst/>
+          </a:prstGeom>
+          <a:noFill/>
+        </p:spPr>
+        <p:txBody>
+          <a:bodyPr wrap="square">
+            <a:spAutoFit/>
+          </a:bodyPr>
+          <a:lstStyle/>
+          <a:p>
+            <a:pPr>
+              <a:lnSpc>
+                <a:spcPct val="150000"/>
+              </a:lnSpc>
+              <a:buNone/>
+            </a:pPr>
+            <a:r>
+              <a:rPr kumimoji="0" lang="en-US" altLang="en-US" sz="1300" b="0" i="0" u="none" strike="noStrike" cap="none" normalizeH="0" baseline="0">
+                <a:ln>
+                  <a:noFill/>
+                </a:ln>
+                <a:solidFill>
+                  <a:schemeClr val="tx1"/>
+                </a:solidFill>
+                <a:effectLst/>
+                <a:latin typeface="Arial" panose="020B0604020202020204" pitchFamily="34" charset="0"/>
+              </a:rPr>
+              <a:t>.</a:t>
+            </a:r>
+          </a:p>
+        </p:txBody>
+      </p:sp>
+      <p:pic>
+        <p:nvPicPr>
+          <p:cNvPr id="4" name="Picture 3">
+            <a:extLst>
+              <a:ext uri="{FF2B5EF4-FFF2-40B4-BE49-F238E27FC236}">
+                <a16:creationId xmlns:a16="http://schemas.microsoft.com/office/drawing/2014/main" id="{8FD3CEC2-521A-C543-B714-EF99D8E7C09E}"/>
+              </a:ext>
+            </a:extLst>
+          </p:cNvPr>
+          <p:cNvPicPr>
+            <a:picLocks noChangeAspect="1"/>
+          </p:cNvPicPr>
+          <p:nvPr/>
+        </p:nvPicPr>
+        <p:blipFill>
+          <a:blip r:embed="rId2"/>
+          <a:stretch>
+            <a:fillRect/>
+          </a:stretch>
+        </p:blipFill>
+        <p:spPr>
+          <a:xfrm>
+            <a:off x="807130" y="0"/>
+            <a:ext cx="10577739" cy="6858000"/>
+          </a:xfrm>
+          <a:prstGeom prst="rect">
+            <a:avLst/>
+          </a:prstGeom>
+          <a:ln w="38100" cap="sq">
+            <a:solidFill>
+              <a:srgbClr val="000000"/>
+            </a:solidFill>
+            <a:prstDash val="solid"/>
+            <a:miter lim="800000"/>
+          </a:ln>
+          <a:effectLst>
+            <a:outerShdw blurRad="50800" dist="38100" dir="2700000" algn="tl" rotWithShape="0">
+              <a:srgbClr val="000000">
+                <a:alpha val="43000"/>
+              </a:srgbClr>
+            </a:outerShdw>
+          </a:effectLst>
+        </p:spPr>
+      </p:pic>
+    </p:spTree>
+    <p:extLst>
+      <p:ext uri="{BB962C8B-B14F-4D97-AF65-F5344CB8AC3E}">
+        <p14:creationId xmlns:p14="http://schemas.microsoft.com/office/powerpoint/2010/main" val="4266188344"/>
+      </p:ext>
+    </p:extLst>
+  </p:cSld>
+  <p:clrMapOvr>
+    <a:masterClrMapping/>
+  </p:clrMapOvr>
+</p:sld>
+</file>
+
+<file path=ppt/slides/slide19.xml><?xml version="1.0" encoding="utf-8"?>
+<p:sld xmlns:a="http://schemas.openxmlformats.org/drawingml/2006/main" xmlns:r="http://schemas.openxmlformats.org/officeDocument/2006/relationships" xmlns:p="http://schemas.openxmlformats.org/presentationml/2006/main">
+  <p:cSld>
+    <p:spTree>
+      <p:nvGrpSpPr>
+        <p:cNvPr id="1" name="">
+          <a:extLst>
+            <a:ext uri="{FF2B5EF4-FFF2-40B4-BE49-F238E27FC236}">
+              <a16:creationId xmlns:a16="http://schemas.microsoft.com/office/drawing/2014/main" id="{E7B493AC-2B79-2117-1C77-21610C3A62E4}"/>
+            </a:ext>
+          </a:extLst>
+        </p:cNvPr>
+        <p:cNvGrpSpPr/>
+        <p:nvPr/>
+      </p:nvGrpSpPr>
+      <p:grpSpPr>
+        <a:xfrm>
+          <a:off x="0" y="0"/>
+          <a:ext cx="0" cy="0"/>
+          <a:chOff x="0" y="0"/>
+          <a:chExt cx="0" cy="0"/>
+        </a:xfrm>
+      </p:grpSpPr>
+      <p:sp>
+        <p:nvSpPr>
+          <p:cNvPr id="3" name="TextBox 2">
+            <a:extLst>
+              <a:ext uri="{FF2B5EF4-FFF2-40B4-BE49-F238E27FC236}">
+                <a16:creationId xmlns:a16="http://schemas.microsoft.com/office/drawing/2014/main" id="{6145C333-7AD8-6C77-DB13-E3B867AB1BBA}"/>
+              </a:ext>
+            </a:extLst>
+          </p:cNvPr>
+          <p:cNvSpPr txBox="1"/>
+          <p:nvPr/>
+        </p:nvSpPr>
+        <p:spPr>
+          <a:xfrm>
+            <a:off x="217714" y="255046"/>
+            <a:ext cx="11756571" cy="355354"/>
+          </a:xfrm>
+          <a:prstGeom prst="rect">
+            <a:avLst/>
+          </a:prstGeom>
+          <a:noFill/>
+        </p:spPr>
+        <p:txBody>
+          <a:bodyPr wrap="square">
+            <a:spAutoFit/>
+          </a:bodyPr>
+          <a:lstStyle/>
+          <a:p>
+            <a:pPr>
+              <a:lnSpc>
+                <a:spcPct val="150000"/>
+              </a:lnSpc>
+              <a:buNone/>
+            </a:pPr>
+            <a:r>
+              <a:rPr lang="az-Latn-AZ" altLang="en-US" sz="1300">
+                <a:latin typeface="Arial" panose="020B0604020202020204" pitchFamily="34" charset="0"/>
+              </a:rPr>
+              <a:t>Verilənlər bazasında da hər şey qaydasındadır.</a:t>
+            </a:r>
+            <a:endParaRPr kumimoji="0" lang="en-US" altLang="en-US" sz="1300" b="0" i="0" u="none" strike="noStrike" cap="none" normalizeH="0" baseline="0">
+              <a:ln>
+                <a:noFill/>
+              </a:ln>
+              <a:solidFill>
+                <a:schemeClr val="tx1"/>
+              </a:solidFill>
+              <a:effectLst/>
+              <a:latin typeface="Arial" panose="020B0604020202020204" pitchFamily="34" charset="0"/>
+            </a:endParaRPr>
+          </a:p>
+        </p:txBody>
+      </p:sp>
+      <p:pic>
+        <p:nvPicPr>
+          <p:cNvPr id="4" name="Picture 3">
+            <a:extLst>
+              <a:ext uri="{FF2B5EF4-FFF2-40B4-BE49-F238E27FC236}">
+                <a16:creationId xmlns:a16="http://schemas.microsoft.com/office/drawing/2014/main" id="{5E74A8B8-B1B8-1F9F-94FA-EEC83822428B}"/>
+              </a:ext>
+            </a:extLst>
+          </p:cNvPr>
+          <p:cNvPicPr>
+            <a:picLocks noChangeAspect="1"/>
+          </p:cNvPicPr>
+          <p:nvPr/>
+        </p:nvPicPr>
+        <p:blipFill>
+          <a:blip r:embed="rId2"/>
+          <a:stretch>
+            <a:fillRect/>
+          </a:stretch>
+        </p:blipFill>
+        <p:spPr>
+          <a:xfrm>
+            <a:off x="0" y="849226"/>
+            <a:ext cx="12192000" cy="2802848"/>
+          </a:xfrm>
+          <a:prstGeom prst="rect">
+            <a:avLst/>
+          </a:prstGeom>
+          <a:ln w="38100" cap="sq">
+            <a:solidFill>
+              <a:srgbClr val="000000"/>
+            </a:solidFill>
+            <a:prstDash val="solid"/>
+            <a:miter lim="800000"/>
+          </a:ln>
+          <a:effectLst>
+            <a:outerShdw blurRad="50800" dist="38100" dir="2700000" algn="tl" rotWithShape="0">
+              <a:srgbClr val="000000">
+                <a:alpha val="43000"/>
+              </a:srgbClr>
+            </a:outerShdw>
+          </a:effectLst>
+        </p:spPr>
+      </p:pic>
+    </p:spTree>
+    <p:extLst>
+      <p:ext uri="{BB962C8B-B14F-4D97-AF65-F5344CB8AC3E}">
+        <p14:creationId xmlns:p14="http://schemas.microsoft.com/office/powerpoint/2010/main" val="4066260961"/>
       </p:ext>
     </p:extLst>
   </p:cSld>
@@ -3436,6 +7842,1185 @@
         <p:spPr>
           <a:xfrm>
             <a:off x="217714" y="255046"/>
+            <a:ext cx="11756571" cy="5456750"/>
+          </a:xfrm>
+          <a:prstGeom prst="rect">
+            <a:avLst/>
+          </a:prstGeom>
+          <a:noFill/>
+        </p:spPr>
+        <p:txBody>
+          <a:bodyPr wrap="square">
+            <a:spAutoFit/>
+          </a:bodyPr>
+          <a:lstStyle/>
+          <a:p>
+            <a:pPr>
+              <a:lnSpc>
+                <a:spcPct val="150000"/>
+              </a:lnSpc>
+              <a:buNone/>
+            </a:pPr>
+            <a:r>
+              <a:rPr lang="az-Latn-AZ" altLang="en-US" sz="1300" b="1">
+                <a:solidFill>
+                  <a:srgbClr val="FF0000"/>
+                </a:solidFill>
+                <a:latin typeface="Arial" panose="020B0604020202020204" pitchFamily="34" charset="0"/>
+              </a:rPr>
+              <a:t>1) </a:t>
+            </a:r>
+            <a:r>
+              <a:rPr lang="az-Latn-AZ" altLang="en-US" sz="1300" b="1">
+                <a:latin typeface="Arial" panose="020B0604020202020204" pitchFamily="34" charset="0"/>
+              </a:rPr>
+              <a:t>1-ci form</a:t>
+            </a:r>
+            <a:r>
+              <a:rPr lang="az-Latn-AZ" altLang="en-US" sz="1300">
+                <a:latin typeface="Arial" panose="020B0604020202020204" pitchFamily="34" charset="0"/>
+              </a:rPr>
+              <a:t>:</a:t>
+            </a:r>
+          </a:p>
+          <a:p>
+            <a:pPr>
+              <a:lnSpc>
+                <a:spcPct val="150000"/>
+              </a:lnSpc>
+              <a:buNone/>
+            </a:pPr>
+            <a:endParaRPr kumimoji="0" lang="az-Latn-AZ" altLang="en-US" sz="1300" b="0" i="0" u="none" strike="noStrike" cap="none" normalizeH="0" baseline="0">
+              <a:ln>
+                <a:noFill/>
+              </a:ln>
+              <a:solidFill>
+                <a:schemeClr val="tx1"/>
+              </a:solidFill>
+              <a:effectLst/>
+              <a:latin typeface="Arial" panose="020B0604020202020204" pitchFamily="34" charset="0"/>
+            </a:endParaRPr>
+          </a:p>
+          <a:p>
+            <a:pPr>
+              <a:lnSpc>
+                <a:spcPct val="150000"/>
+              </a:lnSpc>
+              <a:buNone/>
+            </a:pPr>
+            <a:endParaRPr lang="az-Latn-AZ" altLang="en-US" sz="1300">
+              <a:latin typeface="Arial" panose="020B0604020202020204" pitchFamily="34" charset="0"/>
+            </a:endParaRPr>
+          </a:p>
+          <a:p>
+            <a:pPr>
+              <a:lnSpc>
+                <a:spcPct val="150000"/>
+              </a:lnSpc>
+              <a:buNone/>
+            </a:pPr>
+            <a:endParaRPr kumimoji="0" lang="az-Latn-AZ" altLang="en-US" sz="1300" b="0" i="0" u="none" strike="noStrike" cap="none" normalizeH="0" baseline="0">
+              <a:ln>
+                <a:noFill/>
+              </a:ln>
+              <a:solidFill>
+                <a:schemeClr val="tx1"/>
+              </a:solidFill>
+              <a:effectLst/>
+              <a:latin typeface="Arial" panose="020B0604020202020204" pitchFamily="34" charset="0"/>
+            </a:endParaRPr>
+          </a:p>
+          <a:p>
+            <a:pPr>
+              <a:lnSpc>
+                <a:spcPct val="150000"/>
+              </a:lnSpc>
+              <a:buNone/>
+            </a:pPr>
+            <a:endParaRPr lang="az-Latn-AZ" altLang="en-US" sz="1300">
+              <a:latin typeface="Arial" panose="020B0604020202020204" pitchFamily="34" charset="0"/>
+            </a:endParaRPr>
+          </a:p>
+          <a:p>
+            <a:pPr>
+              <a:lnSpc>
+                <a:spcPct val="150000"/>
+              </a:lnSpc>
+              <a:buNone/>
+            </a:pPr>
+            <a:r>
+              <a:rPr kumimoji="0" lang="az-Latn-AZ" altLang="en-US" sz="1300" b="1" i="0" u="none" strike="noStrike" cap="none" normalizeH="0" baseline="0">
+                <a:ln>
+                  <a:noFill/>
+                </a:ln>
+                <a:solidFill>
+                  <a:srgbClr val="FF0000"/>
+                </a:solidFill>
+                <a:effectLst/>
+                <a:latin typeface="Arial" panose="020B0604020202020204" pitchFamily="34" charset="0"/>
+              </a:rPr>
+              <a:t>2) </a:t>
+            </a:r>
+            <a:r>
+              <a:rPr kumimoji="0" lang="az-Latn-AZ" altLang="en-US" sz="1300" b="1" i="0" u="none" strike="noStrike" cap="none" normalizeH="0" baseline="0">
+                <a:ln>
+                  <a:noFill/>
+                </a:ln>
+                <a:solidFill>
+                  <a:schemeClr val="tx1"/>
+                </a:solidFill>
+                <a:effectLst/>
+                <a:latin typeface="Arial" panose="020B0604020202020204" pitchFamily="34" charset="0"/>
+              </a:rPr>
+              <a:t>2-ci form (DÜZGÜN OLAN)</a:t>
+            </a:r>
+            <a:r>
+              <a:rPr kumimoji="0" lang="az-Latn-AZ" altLang="en-US" sz="1300" b="0" i="0" u="none" strike="noStrike" cap="none" normalizeH="0" baseline="0">
+                <a:ln>
+                  <a:noFill/>
+                </a:ln>
+                <a:solidFill>
+                  <a:schemeClr val="tx1"/>
+                </a:solidFill>
+                <a:effectLst/>
+                <a:latin typeface="Arial" panose="020B0604020202020204" pitchFamily="34" charset="0"/>
+              </a:rPr>
+              <a:t>:</a:t>
+            </a:r>
+          </a:p>
+          <a:p>
+            <a:pPr>
+              <a:lnSpc>
+                <a:spcPct val="150000"/>
+              </a:lnSpc>
+              <a:buNone/>
+            </a:pPr>
+            <a:endParaRPr lang="az-Latn-AZ" altLang="en-US" sz="1300">
+              <a:latin typeface="Arial" panose="020B0604020202020204" pitchFamily="34" charset="0"/>
+            </a:endParaRPr>
+          </a:p>
+          <a:p>
+            <a:pPr>
+              <a:lnSpc>
+                <a:spcPct val="150000"/>
+              </a:lnSpc>
+              <a:buNone/>
+            </a:pPr>
+            <a:endParaRPr kumimoji="0" lang="az-Latn-AZ" altLang="en-US" sz="1300" b="0" i="0" u="none" strike="noStrike" cap="none" normalizeH="0" baseline="0">
+              <a:ln>
+                <a:noFill/>
+              </a:ln>
+              <a:solidFill>
+                <a:schemeClr val="tx1"/>
+              </a:solidFill>
+              <a:effectLst/>
+              <a:latin typeface="Arial" panose="020B0604020202020204" pitchFamily="34" charset="0"/>
+            </a:endParaRPr>
+          </a:p>
+          <a:p>
+            <a:pPr>
+              <a:lnSpc>
+                <a:spcPct val="150000"/>
+              </a:lnSpc>
+              <a:buNone/>
+            </a:pPr>
+            <a:endParaRPr lang="az-Latn-AZ" altLang="en-US" sz="1300">
+              <a:latin typeface="Arial" panose="020B0604020202020204" pitchFamily="34" charset="0"/>
+            </a:endParaRPr>
+          </a:p>
+          <a:p>
+            <a:pPr>
+              <a:lnSpc>
+                <a:spcPct val="150000"/>
+              </a:lnSpc>
+              <a:buNone/>
+            </a:pPr>
+            <a:endParaRPr kumimoji="0" lang="az-Latn-AZ" altLang="en-US" sz="1300" b="0" i="0" u="none" strike="noStrike" cap="none" normalizeH="0" baseline="0">
+              <a:ln>
+                <a:noFill/>
+              </a:ln>
+              <a:solidFill>
+                <a:schemeClr val="tx1"/>
+              </a:solidFill>
+              <a:effectLst/>
+              <a:latin typeface="Arial" panose="020B0604020202020204" pitchFamily="34" charset="0"/>
+            </a:endParaRPr>
+          </a:p>
+          <a:p>
+            <a:pPr>
+              <a:lnSpc>
+                <a:spcPct val="150000"/>
+              </a:lnSpc>
+              <a:buNone/>
+            </a:pPr>
+            <a:endParaRPr lang="az-Latn-AZ" altLang="en-US" sz="1300">
+              <a:latin typeface="Arial" panose="020B0604020202020204" pitchFamily="34" charset="0"/>
+            </a:endParaRPr>
+          </a:p>
+          <a:p>
+            <a:pPr>
+              <a:lnSpc>
+                <a:spcPct val="150000"/>
+              </a:lnSpc>
+              <a:buNone/>
+            </a:pPr>
+            <a:r>
+              <a:rPr kumimoji="0" lang="en-US" altLang="en-US" sz="1300" b="1" i="0" u="none" strike="noStrike" cap="none" normalizeH="0" baseline="0">
+                <a:ln>
+                  <a:noFill/>
+                </a:ln>
+                <a:solidFill>
+                  <a:schemeClr val="tx1"/>
+                </a:solidFill>
+                <a:effectLst/>
+                <a:latin typeface="Arial" panose="020B0604020202020204" pitchFamily="34" charset="0"/>
+              </a:rPr>
+              <a:t>Bu iki form arasında nə fərq var</a:t>
+            </a:r>
+            <a:r>
+              <a:rPr kumimoji="0" lang="en-US" altLang="en-US" sz="1300" b="0" i="0" u="none" strike="noStrike" cap="none" normalizeH="0" baseline="0">
+                <a:ln>
+                  <a:noFill/>
+                </a:ln>
+                <a:solidFill>
+                  <a:schemeClr val="tx1"/>
+                </a:solidFill>
+                <a:effectLst/>
+                <a:latin typeface="Arial" panose="020B0604020202020204" pitchFamily="34" charset="0"/>
+              </a:rPr>
+              <a:t>?</a:t>
+            </a:r>
+            <a:endParaRPr kumimoji="0" lang="az-Latn-AZ" altLang="en-US" sz="1300" b="0" i="0" u="none" strike="noStrike" cap="none" normalizeH="0" baseline="0">
+              <a:ln>
+                <a:noFill/>
+              </a:ln>
+              <a:solidFill>
+                <a:schemeClr val="tx1"/>
+              </a:solidFill>
+              <a:effectLst/>
+              <a:latin typeface="Arial" panose="020B0604020202020204" pitchFamily="34" charset="0"/>
+            </a:endParaRPr>
+          </a:p>
+          <a:p>
+            <a:pPr>
+              <a:lnSpc>
+                <a:spcPct val="150000"/>
+              </a:lnSpc>
+              <a:buNone/>
+            </a:pPr>
+            <a:endParaRPr lang="az-Latn-AZ" altLang="en-US" sz="1300">
+              <a:latin typeface="Arial" panose="020B0604020202020204" pitchFamily="34" charset="0"/>
+            </a:endParaRPr>
+          </a:p>
+          <a:p>
+            <a:pPr>
+              <a:lnSpc>
+                <a:spcPct val="150000"/>
+              </a:lnSpc>
+              <a:buNone/>
+            </a:pPr>
+            <a:r>
+              <a:rPr kumimoji="0" lang="en-US" altLang="en-US" sz="1300" b="1" i="0" u="none" strike="noStrike" cap="none" normalizeH="0" baseline="0">
+                <a:ln>
+                  <a:noFill/>
+                </a:ln>
+                <a:solidFill>
+                  <a:schemeClr val="accent2"/>
+                </a:solidFill>
+                <a:effectLst/>
+                <a:latin typeface="Arial" panose="020B0604020202020204" pitchFamily="34" charset="0"/>
+              </a:rPr>
+              <a:t>HTML Standartı baxımından</a:t>
+            </a:r>
+            <a:r>
+              <a:rPr kumimoji="0" lang="en-US" altLang="en-US" sz="1300" b="0" i="0" u="none" strike="noStrike" cap="none" normalizeH="0" baseline="0">
+                <a:ln>
+                  <a:noFill/>
+                </a:ln>
+                <a:solidFill>
+                  <a:schemeClr val="tx1"/>
+                </a:solidFill>
+                <a:effectLst/>
+                <a:latin typeface="Arial" panose="020B0604020202020204" pitchFamily="34" charset="0"/>
+              </a:rPr>
+              <a:t>:</a:t>
+            </a:r>
+          </a:p>
+          <a:p>
+            <a:pPr marL="742950" lvl="1" indent="-285750">
+              <a:lnSpc>
+                <a:spcPct val="150000"/>
+              </a:lnSpc>
+              <a:buFont typeface="Wingdings" panose="05000000000000000000" pitchFamily="2" charset="2"/>
+              <a:buChar char="q"/>
+            </a:pPr>
+            <a:r>
+              <a:rPr kumimoji="0" lang="en-US" altLang="en-US" sz="1300" b="0" i="0" u="none" strike="noStrike" cap="none" normalizeH="0" baseline="0">
+                <a:ln>
+                  <a:noFill/>
+                </a:ln>
+                <a:solidFill>
+                  <a:schemeClr val="tx1"/>
+                </a:solidFill>
+                <a:effectLst/>
+                <a:latin typeface="Arial" panose="020B0604020202020204" pitchFamily="34" charset="0"/>
+              </a:rPr>
+              <a:t>HTML formaları yalnız bu metodları düzgün olaraq dəstəkləyir: </a:t>
+            </a:r>
+            <a:r>
+              <a:rPr kumimoji="0" lang="en-US" altLang="en-US" sz="1300" b="1" i="0" u="none" strike="noStrike" cap="none" normalizeH="0" baseline="0">
+                <a:ln>
+                  <a:noFill/>
+                </a:ln>
+                <a:solidFill>
+                  <a:schemeClr val="tx1"/>
+                </a:solidFill>
+                <a:effectLst/>
+                <a:latin typeface="Arial" panose="020B0604020202020204" pitchFamily="34" charset="0"/>
+              </a:rPr>
+              <a:t>GET</a:t>
+            </a:r>
+            <a:r>
+              <a:rPr kumimoji="0" lang="en-US" altLang="en-US" sz="1300" b="0" i="0" u="none" strike="noStrike" cap="none" normalizeH="0" baseline="0">
+                <a:ln>
+                  <a:noFill/>
+                </a:ln>
+                <a:solidFill>
+                  <a:schemeClr val="tx1"/>
+                </a:solidFill>
+                <a:effectLst/>
+                <a:latin typeface="Arial" panose="020B0604020202020204" pitchFamily="34" charset="0"/>
+              </a:rPr>
+              <a:t> və </a:t>
+            </a:r>
+            <a:r>
+              <a:rPr kumimoji="0" lang="en-US" altLang="en-US" sz="1300" b="1" i="0" u="none" strike="noStrike" cap="none" normalizeH="0" baseline="0">
+                <a:ln>
+                  <a:noFill/>
+                </a:ln>
+                <a:solidFill>
+                  <a:schemeClr val="tx1"/>
+                </a:solidFill>
+                <a:effectLst/>
+                <a:latin typeface="Arial" panose="020B0604020202020204" pitchFamily="34" charset="0"/>
+              </a:rPr>
+              <a:t>POST</a:t>
+            </a:r>
+            <a:r>
+              <a:rPr kumimoji="0" lang="en-US" altLang="en-US" sz="1300" b="0" i="0" u="none" strike="noStrike" cap="none" normalizeH="0" baseline="0">
+                <a:ln>
+                  <a:noFill/>
+                </a:ln>
+                <a:solidFill>
+                  <a:schemeClr val="tx1"/>
+                </a:solidFill>
+                <a:effectLst/>
+                <a:latin typeface="Arial" panose="020B0604020202020204" pitchFamily="34" charset="0"/>
+              </a:rPr>
+              <a:t>.</a:t>
+            </a:r>
+          </a:p>
+          <a:p>
+            <a:pPr marL="742950" lvl="1" indent="-285750">
+              <a:lnSpc>
+                <a:spcPct val="150000"/>
+              </a:lnSpc>
+              <a:buFont typeface="Wingdings" panose="05000000000000000000" pitchFamily="2" charset="2"/>
+              <a:buChar char="q"/>
+            </a:pPr>
+            <a:r>
+              <a:rPr kumimoji="0" lang="en-US" altLang="en-US" sz="1300" b="0" i="0" u="none" strike="noStrike" cap="none" normalizeH="0" baseline="0">
+                <a:ln>
+                  <a:noFill/>
+                </a:ln>
+                <a:solidFill>
+                  <a:schemeClr val="tx1"/>
+                </a:solidFill>
+                <a:effectLst/>
+                <a:latin typeface="Arial" panose="020B0604020202020204" pitchFamily="34" charset="0"/>
+              </a:rPr>
+              <a:t>HTML səviyyəsində </a:t>
+            </a:r>
+            <a:r>
+              <a:rPr kumimoji="0" lang="en-US" altLang="en-US" sz="1300" b="1" i="0" u="none" strike="noStrike" cap="none" normalizeH="0" baseline="0">
+                <a:ln>
+                  <a:noFill/>
+                </a:ln>
+                <a:solidFill>
+                  <a:schemeClr val="tx1"/>
+                </a:solidFill>
+                <a:effectLst/>
+                <a:latin typeface="Arial" panose="020B0604020202020204" pitchFamily="34" charset="0"/>
+              </a:rPr>
+              <a:t>PUT</a:t>
+            </a:r>
+            <a:r>
+              <a:rPr kumimoji="0" lang="en-US" altLang="en-US" sz="1300" b="0" i="0" u="none" strike="noStrike" cap="none" normalizeH="0" baseline="0">
+                <a:ln>
+                  <a:noFill/>
+                </a:ln>
+                <a:solidFill>
+                  <a:schemeClr val="tx1"/>
+                </a:solidFill>
+                <a:effectLst/>
+                <a:latin typeface="Arial" panose="020B0604020202020204" pitchFamily="34" charset="0"/>
+              </a:rPr>
+              <a:t>, </a:t>
+            </a:r>
+            <a:r>
+              <a:rPr kumimoji="0" lang="en-US" altLang="en-US" sz="1300" b="1" i="0" u="none" strike="noStrike" cap="none" normalizeH="0" baseline="0">
+                <a:ln>
+                  <a:noFill/>
+                </a:ln>
+                <a:solidFill>
+                  <a:schemeClr val="tx1"/>
+                </a:solidFill>
+                <a:effectLst/>
+                <a:latin typeface="Arial" panose="020B0604020202020204" pitchFamily="34" charset="0"/>
+              </a:rPr>
+              <a:t>PATCH</a:t>
+            </a:r>
+            <a:r>
+              <a:rPr kumimoji="0" lang="en-US" altLang="en-US" sz="1300" b="0" i="0" u="none" strike="noStrike" cap="none" normalizeH="0" baseline="0">
+                <a:ln>
+                  <a:noFill/>
+                </a:ln>
+                <a:solidFill>
+                  <a:schemeClr val="tx1"/>
+                </a:solidFill>
+                <a:effectLst/>
+                <a:latin typeface="Arial" panose="020B0604020202020204" pitchFamily="34" charset="0"/>
+              </a:rPr>
+              <a:t>, </a:t>
+            </a:r>
+            <a:r>
+              <a:rPr kumimoji="0" lang="en-US" altLang="en-US" sz="1300" b="1" i="0" u="none" strike="noStrike" cap="none" normalizeH="0" baseline="0">
+                <a:ln>
+                  <a:noFill/>
+                </a:ln>
+                <a:solidFill>
+                  <a:schemeClr val="tx1"/>
+                </a:solidFill>
+                <a:effectLst/>
+                <a:latin typeface="Arial" panose="020B0604020202020204" pitchFamily="34" charset="0"/>
+              </a:rPr>
+              <a:t>DELETE</a:t>
+            </a:r>
+            <a:r>
+              <a:rPr kumimoji="0" lang="en-US" altLang="en-US" sz="1300" b="0" i="0" u="none" strike="noStrike" cap="none" normalizeH="0" baseline="0">
+                <a:ln>
+                  <a:noFill/>
+                </a:ln>
+                <a:solidFill>
+                  <a:schemeClr val="tx1"/>
+                </a:solidFill>
+                <a:effectLst/>
+                <a:latin typeface="Arial" panose="020B0604020202020204" pitchFamily="34" charset="0"/>
+              </a:rPr>
+              <a:t> kimi metodlar İCAZƏ VERİLMİR.</a:t>
+            </a:r>
+            <a:endParaRPr kumimoji="0" lang="az-Latn-AZ" altLang="en-US" sz="1300" b="0" i="0" u="none" strike="noStrike" cap="none" normalizeH="0" baseline="0">
+              <a:ln>
+                <a:noFill/>
+              </a:ln>
+              <a:solidFill>
+                <a:schemeClr val="tx1"/>
+              </a:solidFill>
+              <a:effectLst/>
+              <a:latin typeface="Arial" panose="020B0604020202020204" pitchFamily="34" charset="0"/>
+            </a:endParaRPr>
+          </a:p>
+          <a:p>
+            <a:pPr>
+              <a:lnSpc>
+                <a:spcPct val="150000"/>
+              </a:lnSpc>
+              <a:buNone/>
+            </a:pPr>
+            <a:endParaRPr lang="az-Latn-AZ" altLang="en-US" sz="1300">
+              <a:latin typeface="Arial" panose="020B0604020202020204" pitchFamily="34" charset="0"/>
+            </a:endParaRPr>
+          </a:p>
+          <a:p>
+            <a:pPr>
+              <a:lnSpc>
+                <a:spcPct val="150000"/>
+              </a:lnSpc>
+              <a:buNone/>
+            </a:pPr>
+            <a:endParaRPr kumimoji="0" lang="en-US" altLang="en-US" sz="1300" b="0" i="0" u="none" strike="noStrike" cap="none" normalizeH="0" baseline="0">
+              <a:ln>
+                <a:noFill/>
+              </a:ln>
+              <a:solidFill>
+                <a:schemeClr val="tx1"/>
+              </a:solidFill>
+              <a:effectLst/>
+              <a:latin typeface="Arial" panose="020B0604020202020204" pitchFamily="34" charset="0"/>
+            </a:endParaRPr>
+          </a:p>
+        </p:txBody>
+      </p:sp>
+      <p:pic>
+        <p:nvPicPr>
+          <p:cNvPr id="4" name="Picture 3">
+            <a:extLst>
+              <a:ext uri="{FF2B5EF4-FFF2-40B4-BE49-F238E27FC236}">
+                <a16:creationId xmlns:a16="http://schemas.microsoft.com/office/drawing/2014/main" id="{A365B9C2-8363-3541-3236-FDAEDB590A4D}"/>
+              </a:ext>
+            </a:extLst>
+          </p:cNvPr>
+          <p:cNvPicPr>
+            <a:picLocks noChangeAspect="1"/>
+          </p:cNvPicPr>
+          <p:nvPr/>
+        </p:nvPicPr>
+        <p:blipFill>
+          <a:blip r:embed="rId2"/>
+          <a:stretch>
+            <a:fillRect/>
+          </a:stretch>
+        </p:blipFill>
+        <p:spPr>
+          <a:xfrm>
+            <a:off x="-9527" y="696307"/>
+            <a:ext cx="7287642" cy="695422"/>
+          </a:xfrm>
+          <a:prstGeom prst="rect">
+            <a:avLst/>
+          </a:prstGeom>
+        </p:spPr>
+      </p:pic>
+      <p:pic>
+        <p:nvPicPr>
+          <p:cNvPr id="6" name="Picture 5">
+            <a:extLst>
+              <a:ext uri="{FF2B5EF4-FFF2-40B4-BE49-F238E27FC236}">
+                <a16:creationId xmlns:a16="http://schemas.microsoft.com/office/drawing/2014/main" id="{CA1967E7-C74D-63E3-74BB-A12D76E3F965}"/>
+              </a:ext>
+            </a:extLst>
+          </p:cNvPr>
+          <p:cNvPicPr>
+            <a:picLocks noChangeAspect="1"/>
+          </p:cNvPicPr>
+          <p:nvPr/>
+        </p:nvPicPr>
+        <p:blipFill>
+          <a:blip r:embed="rId3"/>
+          <a:stretch>
+            <a:fillRect/>
+          </a:stretch>
+        </p:blipFill>
+        <p:spPr>
+          <a:xfrm>
+            <a:off x="0" y="2179962"/>
+            <a:ext cx="7268589" cy="943107"/>
+          </a:xfrm>
+          <a:prstGeom prst="rect">
+            <a:avLst/>
+          </a:prstGeom>
+        </p:spPr>
+      </p:pic>
+    </p:spTree>
+    <p:extLst>
+      <p:ext uri="{BB962C8B-B14F-4D97-AF65-F5344CB8AC3E}">
+        <p14:creationId xmlns:p14="http://schemas.microsoft.com/office/powerpoint/2010/main" val="2486611332"/>
+      </p:ext>
+    </p:extLst>
+  </p:cSld>
+  <p:clrMapOvr>
+    <a:masterClrMapping/>
+  </p:clrMapOvr>
+</p:sld>
+</file>
+
+<file path=ppt/slides/slide20.xml><?xml version="1.0" encoding="utf-8"?>
+<p:sld xmlns:a="http://schemas.openxmlformats.org/drawingml/2006/main" xmlns:r="http://schemas.openxmlformats.org/officeDocument/2006/relationships" xmlns:p="http://schemas.openxmlformats.org/presentationml/2006/main">
+  <p:cSld>
+    <p:spTree>
+      <p:nvGrpSpPr>
+        <p:cNvPr id="1" name="">
+          <a:extLst>
+            <a:ext uri="{FF2B5EF4-FFF2-40B4-BE49-F238E27FC236}">
+              <a16:creationId xmlns:a16="http://schemas.microsoft.com/office/drawing/2014/main" id="{01B541D6-3968-54F1-6A24-ED20BEBCFDB6}"/>
+            </a:ext>
+          </a:extLst>
+        </p:cNvPr>
+        <p:cNvGrpSpPr/>
+        <p:nvPr/>
+      </p:nvGrpSpPr>
+      <p:grpSpPr>
+        <a:xfrm>
+          <a:off x="0" y="0"/>
+          <a:ext cx="0" cy="0"/>
+          <a:chOff x="0" y="0"/>
+          <a:chExt cx="0" cy="0"/>
+        </a:xfrm>
+      </p:grpSpPr>
+      <p:sp>
+        <p:nvSpPr>
+          <p:cNvPr id="3" name="TextBox 2">
+            <a:extLst>
+              <a:ext uri="{FF2B5EF4-FFF2-40B4-BE49-F238E27FC236}">
+                <a16:creationId xmlns:a16="http://schemas.microsoft.com/office/drawing/2014/main" id="{7D4716D9-BC13-DCD1-7EDD-C3B48CE3D05E}"/>
+              </a:ext>
+            </a:extLst>
+          </p:cNvPr>
+          <p:cNvSpPr txBox="1"/>
+          <p:nvPr/>
+        </p:nvSpPr>
+        <p:spPr>
+          <a:xfrm>
+            <a:off x="217714" y="255046"/>
+            <a:ext cx="11756571" cy="5756832"/>
+          </a:xfrm>
+          <a:prstGeom prst="rect">
+            <a:avLst/>
+          </a:prstGeom>
+          <a:noFill/>
+        </p:spPr>
+        <p:txBody>
+          <a:bodyPr wrap="square">
+            <a:spAutoFit/>
+          </a:bodyPr>
+          <a:lstStyle/>
+          <a:p>
+            <a:pPr>
+              <a:lnSpc>
+                <a:spcPct val="150000"/>
+              </a:lnSpc>
+              <a:buNone/>
+            </a:pPr>
+            <a:r>
+              <a:rPr kumimoji="0" lang="en-US" altLang="en-US" sz="1300" b="0" i="0" u="none" strike="noStrike" cap="none" normalizeH="0" baseline="0">
+                <a:ln>
+                  <a:noFill/>
+                </a:ln>
+                <a:solidFill>
+                  <a:schemeClr val="tx1"/>
+                </a:solidFill>
+                <a:effectLst/>
+                <a:latin typeface="Arial" panose="020B0604020202020204" pitchFamily="34" charset="0"/>
+              </a:rPr>
+              <a:t>Bu problem Laravel ya da PHP ilə deyil, HTML ilə bağlı bir sintaksis səhvidir. input sahəsindəki bu sətirə baxaq:</a:t>
+            </a:r>
+            <a:endParaRPr lang="az-Latn-AZ" altLang="en-US" sz="1300">
+              <a:latin typeface="Arial" panose="020B0604020202020204" pitchFamily="34" charset="0"/>
+            </a:endParaRPr>
+          </a:p>
+          <a:p>
+            <a:pPr>
+              <a:lnSpc>
+                <a:spcPct val="150000"/>
+              </a:lnSpc>
+              <a:buNone/>
+            </a:pPr>
+            <a:endParaRPr kumimoji="0" lang="az-Latn-AZ" altLang="en-US" sz="1300" b="0" i="0" u="none" strike="noStrike" cap="none" normalizeH="0" baseline="0">
+              <a:ln>
+                <a:noFill/>
+              </a:ln>
+              <a:solidFill>
+                <a:schemeClr val="tx1"/>
+              </a:solidFill>
+              <a:effectLst/>
+              <a:latin typeface="Arial" panose="020B0604020202020204" pitchFamily="34" charset="0"/>
+            </a:endParaRPr>
+          </a:p>
+          <a:p>
+            <a:pPr>
+              <a:lnSpc>
+                <a:spcPct val="150000"/>
+              </a:lnSpc>
+              <a:buNone/>
+            </a:pPr>
+            <a:endParaRPr lang="az-Latn-AZ" altLang="en-US" sz="1300">
+              <a:latin typeface="Arial" panose="020B0604020202020204" pitchFamily="34" charset="0"/>
+            </a:endParaRPr>
+          </a:p>
+          <a:p>
+            <a:pPr>
+              <a:lnSpc>
+                <a:spcPct val="150000"/>
+              </a:lnSpc>
+              <a:buNone/>
+            </a:pPr>
+            <a:endParaRPr kumimoji="0" lang="az-Latn-AZ" altLang="en-US" sz="1300" b="0" i="0" u="none" strike="noStrike" cap="none" normalizeH="0" baseline="0">
+              <a:ln>
+                <a:noFill/>
+              </a:ln>
+              <a:solidFill>
+                <a:schemeClr val="tx1"/>
+              </a:solidFill>
+              <a:effectLst/>
+              <a:latin typeface="Arial" panose="020B0604020202020204" pitchFamily="34" charset="0"/>
+            </a:endParaRPr>
+          </a:p>
+          <a:p>
+            <a:pPr>
+              <a:lnSpc>
+                <a:spcPct val="150000"/>
+              </a:lnSpc>
+              <a:buNone/>
+            </a:pPr>
+            <a:endParaRPr lang="az-Latn-AZ" altLang="en-US" sz="1300">
+              <a:latin typeface="Arial" panose="020B0604020202020204" pitchFamily="34" charset="0"/>
+            </a:endParaRPr>
+          </a:p>
+          <a:p>
+            <a:pPr>
+              <a:lnSpc>
+                <a:spcPct val="150000"/>
+              </a:lnSpc>
+              <a:buNone/>
+            </a:pPr>
+            <a:endParaRPr kumimoji="0" lang="az-Latn-AZ" altLang="en-US" sz="1300" b="0" i="0" u="none" strike="noStrike" cap="none" normalizeH="0" baseline="0">
+              <a:ln>
+                <a:noFill/>
+              </a:ln>
+              <a:solidFill>
+                <a:schemeClr val="tx1"/>
+              </a:solidFill>
+              <a:effectLst/>
+              <a:latin typeface="Arial" panose="020B0604020202020204" pitchFamily="34" charset="0"/>
+            </a:endParaRPr>
+          </a:p>
+          <a:p>
+            <a:pPr>
+              <a:lnSpc>
+                <a:spcPct val="150000"/>
+              </a:lnSpc>
+              <a:buNone/>
+            </a:pPr>
+            <a:r>
+              <a:rPr kumimoji="0" lang="az-Latn-AZ" altLang="en-US" sz="1300" b="0" i="0" u="none" strike="noStrike" cap="none" normalizeH="0" baseline="0">
+                <a:ln>
+                  <a:noFill/>
+                </a:ln>
+                <a:solidFill>
+                  <a:schemeClr val="tx1"/>
+                </a:solidFill>
+                <a:effectLst/>
+                <a:latin typeface="Arial" panose="020B0604020202020204" pitchFamily="34" charset="0"/>
+              </a:rPr>
+              <a:t>Problem nədir? </a:t>
+            </a:r>
+          </a:p>
+          <a:p>
+            <a:pPr>
+              <a:lnSpc>
+                <a:spcPct val="150000"/>
+              </a:lnSpc>
+              <a:buNone/>
+            </a:pPr>
+            <a:endParaRPr lang="az-Latn-AZ" altLang="en-US" sz="1300">
+              <a:latin typeface="Arial" panose="020B0604020202020204" pitchFamily="34" charset="0"/>
+            </a:endParaRPr>
+          </a:p>
+          <a:p>
+            <a:pPr>
+              <a:lnSpc>
+                <a:spcPct val="150000"/>
+              </a:lnSpc>
+              <a:buNone/>
+            </a:pPr>
+            <a:r>
+              <a:rPr kumimoji="0" lang="az-Latn-AZ" altLang="en-US" sz="1300" b="0" i="0" u="none" strike="noStrike" cap="none" normalizeH="0" baseline="0">
+                <a:ln>
+                  <a:noFill/>
+                </a:ln>
+                <a:solidFill>
+                  <a:schemeClr val="tx1"/>
+                </a:solidFill>
+                <a:effectLst/>
+                <a:latin typeface="Arial" panose="020B0604020202020204" pitchFamily="34" charset="0"/>
+              </a:rPr>
+              <a:t>HTML-də bir </a:t>
+            </a:r>
+            <a:r>
+              <a:rPr kumimoji="0" lang="az-Latn-AZ" altLang="en-US" sz="1300" b="1" i="0" u="none" strike="noStrike" cap="none" normalizeH="0" baseline="0">
+                <a:ln>
+                  <a:noFill/>
+                </a:ln>
+                <a:solidFill>
+                  <a:schemeClr val="tx1"/>
+                </a:solidFill>
+                <a:effectLst/>
+                <a:latin typeface="Arial" panose="020B0604020202020204" pitchFamily="34" charset="0"/>
+              </a:rPr>
+              <a:t>value atributuna </a:t>
+            </a:r>
+            <a:r>
+              <a:rPr kumimoji="0" lang="az-Latn-AZ" altLang="en-US" sz="1300" b="0" i="0" u="none" strike="noStrike" cap="none" normalizeH="0" baseline="0">
+                <a:ln>
+                  <a:noFill/>
+                </a:ln>
+                <a:solidFill>
+                  <a:schemeClr val="tx1"/>
+                </a:solidFill>
+                <a:effectLst/>
+                <a:latin typeface="Arial" panose="020B0604020202020204" pitchFamily="34" charset="0"/>
+              </a:rPr>
+              <a:t>dəyər təyin edərkən dəyər qoşa tırnaq (</a:t>
+            </a:r>
+            <a:r>
+              <a:rPr kumimoji="0" lang="az-Latn-AZ" altLang="en-US" sz="1300" b="1" i="0" u="none" strike="noStrike" cap="none" normalizeH="0" baseline="0">
+                <a:ln>
+                  <a:noFill/>
+                </a:ln>
+                <a:solidFill>
+                  <a:srgbClr val="FF0000"/>
+                </a:solidFill>
+                <a:effectLst/>
+                <a:latin typeface="Arial" panose="020B0604020202020204" pitchFamily="34" charset="0"/>
+              </a:rPr>
+              <a:t>"</a:t>
+            </a:r>
+            <a:r>
+              <a:rPr kumimoji="0" lang="az-Latn-AZ" altLang="en-US" sz="1300" b="0" i="0" u="none" strike="noStrike" cap="none" normalizeH="0" baseline="0">
+                <a:ln>
+                  <a:noFill/>
+                </a:ln>
+                <a:solidFill>
+                  <a:schemeClr val="tx1"/>
+                </a:solidFill>
+                <a:effectLst/>
+                <a:latin typeface="Arial" panose="020B0604020202020204" pitchFamily="34" charset="0"/>
+              </a:rPr>
+              <a:t>) içində olmalıdır. Əgər dəyərin içində boşluq (</a:t>
+            </a:r>
+            <a:r>
+              <a:rPr kumimoji="0" lang="az-Latn-AZ" altLang="en-US" sz="1300" b="1" i="0" u="none" strike="noStrike" cap="none" normalizeH="0" baseline="0">
+                <a:ln>
+                  <a:noFill/>
+                </a:ln>
+                <a:solidFill>
+                  <a:schemeClr val="tx1"/>
+                </a:solidFill>
+                <a:effectLst/>
+                <a:latin typeface="Arial" panose="020B0604020202020204" pitchFamily="34" charset="0"/>
+              </a:rPr>
+              <a:t>space</a:t>
+            </a:r>
+            <a:r>
+              <a:rPr kumimoji="0" lang="az-Latn-AZ" altLang="en-US" sz="1300" b="0" i="0" u="none" strike="noStrike" cap="none" normalizeH="0" baseline="0">
+                <a:ln>
+                  <a:noFill/>
+                </a:ln>
+                <a:solidFill>
+                  <a:schemeClr val="tx1"/>
+                </a:solidFill>
+                <a:effectLst/>
+                <a:latin typeface="Arial" panose="020B0604020202020204" pitchFamily="34" charset="0"/>
+              </a:rPr>
+              <a:t>) varsa və sən </a:t>
+            </a:r>
+          </a:p>
+          <a:p>
+            <a:pPr>
+              <a:lnSpc>
+                <a:spcPct val="150000"/>
+              </a:lnSpc>
+              <a:buNone/>
+            </a:pPr>
+            <a:r>
+              <a:rPr kumimoji="0" lang="az-Latn-AZ" altLang="en-US" sz="1300" b="1" i="0" u="none" strike="noStrike" cap="none" normalizeH="0" baseline="0">
+                <a:ln>
+                  <a:noFill/>
+                </a:ln>
+                <a:solidFill>
+                  <a:schemeClr val="tx1"/>
+                </a:solidFill>
+                <a:effectLst/>
+                <a:latin typeface="Arial" panose="020B0604020202020204" pitchFamily="34" charset="0"/>
+              </a:rPr>
+              <a:t>value={{ $post-&gt;title }}</a:t>
+            </a:r>
+            <a:r>
+              <a:rPr kumimoji="0" lang="az-Latn-AZ" altLang="en-US" sz="1300" b="0" i="0" u="none" strike="noStrike" cap="none" normalizeH="0" baseline="0">
+                <a:ln>
+                  <a:noFill/>
+                </a:ln>
+                <a:solidFill>
+                  <a:schemeClr val="tx1"/>
+                </a:solidFill>
+                <a:effectLst/>
+                <a:latin typeface="Arial" panose="020B0604020202020204" pitchFamily="34" charset="0"/>
+              </a:rPr>
+              <a:t> yazırsansa, HTML təkcə ilk sözü götürür. Bu HTML spesifikasiyasıdır. Eyni qayda textarea, select, alt, placeholder və s. atributlara da aiddir:</a:t>
+            </a:r>
+          </a:p>
+          <a:p>
+            <a:pPr>
+              <a:lnSpc>
+                <a:spcPct val="150000"/>
+              </a:lnSpc>
+              <a:buNone/>
+            </a:pPr>
+            <a:endParaRPr lang="az-Latn-AZ" altLang="en-US" sz="1300">
+              <a:latin typeface="Arial" panose="020B0604020202020204" pitchFamily="34" charset="0"/>
+            </a:endParaRPr>
+          </a:p>
+          <a:p>
+            <a:pPr>
+              <a:lnSpc>
+                <a:spcPct val="150000"/>
+              </a:lnSpc>
+              <a:buNone/>
+            </a:pPr>
+            <a:endParaRPr kumimoji="0" lang="az-Latn-AZ" altLang="en-US" sz="1300" b="0" i="0" u="none" strike="noStrike" cap="none" normalizeH="0" baseline="0">
+              <a:ln>
+                <a:noFill/>
+              </a:ln>
+              <a:solidFill>
+                <a:schemeClr val="tx1"/>
+              </a:solidFill>
+              <a:effectLst/>
+              <a:latin typeface="Arial" panose="020B0604020202020204" pitchFamily="34" charset="0"/>
+            </a:endParaRPr>
+          </a:p>
+          <a:p>
+            <a:pPr>
+              <a:lnSpc>
+                <a:spcPct val="150000"/>
+              </a:lnSpc>
+              <a:buNone/>
+            </a:pPr>
+            <a:r>
+              <a:rPr kumimoji="0" lang="az-Latn-AZ" altLang="en-US" sz="1300" b="0" i="0" u="none" strike="noStrike" cap="none" normalizeH="0" baseline="0">
+                <a:ln>
+                  <a:noFill/>
+                </a:ln>
+                <a:solidFill>
+                  <a:schemeClr val="tx1"/>
+                </a:solidFill>
+                <a:effectLst/>
+                <a:latin typeface="Arial" panose="020B0604020202020204" pitchFamily="34" charset="0"/>
+              </a:rPr>
+              <a:t>Sənin kodun HTML-də belə çevrilir:</a:t>
+            </a:r>
+          </a:p>
+          <a:p>
+            <a:pPr>
+              <a:lnSpc>
+                <a:spcPct val="150000"/>
+              </a:lnSpc>
+              <a:buNone/>
+            </a:pPr>
+            <a:endParaRPr lang="az-Latn-AZ" altLang="en-US" sz="1300">
+              <a:latin typeface="Arial" panose="020B0604020202020204" pitchFamily="34" charset="0"/>
+            </a:endParaRPr>
+          </a:p>
+          <a:p>
+            <a:pPr>
+              <a:lnSpc>
+                <a:spcPct val="150000"/>
+              </a:lnSpc>
+              <a:buNone/>
+            </a:pPr>
+            <a:endParaRPr kumimoji="0" lang="az-Latn-AZ" altLang="en-US" sz="1300" b="0" i="0" u="none" strike="noStrike" cap="none" normalizeH="0" baseline="0">
+              <a:ln>
+                <a:noFill/>
+              </a:ln>
+              <a:solidFill>
+                <a:schemeClr val="tx1"/>
+              </a:solidFill>
+              <a:effectLst/>
+              <a:latin typeface="Arial" panose="020B0604020202020204" pitchFamily="34" charset="0"/>
+            </a:endParaRPr>
+          </a:p>
+          <a:p>
+            <a:pPr>
+              <a:lnSpc>
+                <a:spcPct val="150000"/>
+              </a:lnSpc>
+              <a:buNone/>
+            </a:pPr>
+            <a:endParaRPr lang="az-Latn-AZ" altLang="en-US" sz="1300">
+              <a:latin typeface="Arial" panose="020B0604020202020204" pitchFamily="34" charset="0"/>
+            </a:endParaRPr>
+          </a:p>
+          <a:p>
+            <a:pPr>
+              <a:lnSpc>
+                <a:spcPct val="150000"/>
+              </a:lnSpc>
+              <a:buNone/>
+            </a:pPr>
+            <a:endParaRPr kumimoji="0" lang="az-Latn-AZ" altLang="en-US" sz="1300" b="0" i="0" u="none" strike="noStrike" cap="none" normalizeH="0" baseline="0">
+              <a:ln>
+                <a:noFill/>
+              </a:ln>
+              <a:solidFill>
+                <a:schemeClr val="tx1"/>
+              </a:solidFill>
+              <a:effectLst/>
+              <a:latin typeface="Arial" panose="020B0604020202020204" pitchFamily="34" charset="0"/>
+            </a:endParaRPr>
+          </a:p>
+          <a:p>
+            <a:pPr>
+              <a:lnSpc>
+                <a:spcPct val="150000"/>
+              </a:lnSpc>
+              <a:buNone/>
+            </a:pPr>
+            <a:r>
+              <a:rPr kumimoji="0" lang="az-Latn-AZ" altLang="en-US" sz="1300" b="0" i="0" u="none" strike="noStrike" cap="none" normalizeH="0" baseline="0">
+                <a:ln>
+                  <a:noFill/>
+                </a:ln>
+                <a:solidFill>
+                  <a:schemeClr val="tx1"/>
+                </a:solidFill>
+                <a:effectLst/>
+                <a:latin typeface="Arial" panose="020B0604020202020204" pitchFamily="34" charset="0"/>
+              </a:rPr>
+              <a:t>DÜZGÜN YAZILIŞ:</a:t>
+            </a:r>
+          </a:p>
+        </p:txBody>
+      </p:sp>
+      <p:pic>
+        <p:nvPicPr>
+          <p:cNvPr id="4" name="Picture 3">
+            <a:extLst>
+              <a:ext uri="{FF2B5EF4-FFF2-40B4-BE49-F238E27FC236}">
+                <a16:creationId xmlns:a16="http://schemas.microsoft.com/office/drawing/2014/main" id="{D1C6E05C-2D77-817D-E43E-6F04983198CE}"/>
+              </a:ext>
+            </a:extLst>
+          </p:cNvPr>
+          <p:cNvPicPr>
+            <a:picLocks noChangeAspect="1"/>
+          </p:cNvPicPr>
+          <p:nvPr/>
+        </p:nvPicPr>
+        <p:blipFill>
+          <a:blip r:embed="rId2"/>
+          <a:stretch>
+            <a:fillRect/>
+          </a:stretch>
+        </p:blipFill>
+        <p:spPr>
+          <a:xfrm>
+            <a:off x="0" y="739473"/>
+            <a:ext cx="6439799" cy="552527"/>
+          </a:xfrm>
+          <a:prstGeom prst="rect">
+            <a:avLst/>
+          </a:prstGeom>
+        </p:spPr>
+      </p:pic>
+      <p:pic>
+        <p:nvPicPr>
+          <p:cNvPr id="6" name="Picture 5">
+            <a:extLst>
+              <a:ext uri="{FF2B5EF4-FFF2-40B4-BE49-F238E27FC236}">
+                <a16:creationId xmlns:a16="http://schemas.microsoft.com/office/drawing/2014/main" id="{F6D43F9F-330D-6B77-8E0B-7DD7384BADA8}"/>
+              </a:ext>
+            </a:extLst>
+          </p:cNvPr>
+          <p:cNvPicPr>
+            <a:picLocks noChangeAspect="1"/>
+          </p:cNvPicPr>
+          <p:nvPr/>
+        </p:nvPicPr>
+        <p:blipFill>
+          <a:blip r:embed="rId3"/>
+          <a:stretch>
+            <a:fillRect/>
+          </a:stretch>
+        </p:blipFill>
+        <p:spPr>
+          <a:xfrm>
+            <a:off x="0" y="4566758"/>
+            <a:ext cx="6820852" cy="552527"/>
+          </a:xfrm>
+          <a:prstGeom prst="rect">
+            <a:avLst/>
+          </a:prstGeom>
+        </p:spPr>
+      </p:pic>
+      <p:pic>
+        <p:nvPicPr>
+          <p:cNvPr id="8" name="Picture 7">
+            <a:extLst>
+              <a:ext uri="{FF2B5EF4-FFF2-40B4-BE49-F238E27FC236}">
+                <a16:creationId xmlns:a16="http://schemas.microsoft.com/office/drawing/2014/main" id="{568C8240-5B88-4A15-2068-7A1DEA7B8BFD}"/>
+              </a:ext>
+            </a:extLst>
+          </p:cNvPr>
+          <p:cNvPicPr>
+            <a:picLocks noChangeAspect="1"/>
+          </p:cNvPicPr>
+          <p:nvPr/>
+        </p:nvPicPr>
+        <p:blipFill>
+          <a:blip r:embed="rId4"/>
+          <a:stretch>
+            <a:fillRect/>
+          </a:stretch>
+        </p:blipFill>
+        <p:spPr>
+          <a:xfrm>
+            <a:off x="0" y="5984961"/>
+            <a:ext cx="6792273" cy="581106"/>
+          </a:xfrm>
+          <a:prstGeom prst="rect">
+            <a:avLst/>
+          </a:prstGeom>
+        </p:spPr>
+      </p:pic>
+    </p:spTree>
+    <p:extLst>
+      <p:ext uri="{BB962C8B-B14F-4D97-AF65-F5344CB8AC3E}">
+        <p14:creationId xmlns:p14="http://schemas.microsoft.com/office/powerpoint/2010/main" val="3051822775"/>
+      </p:ext>
+    </p:extLst>
+  </p:cSld>
+  <p:clrMapOvr>
+    <a:masterClrMapping/>
+  </p:clrMapOvr>
+</p:sld>
+</file>
+
+<file path=ppt/slides/slide21.xml><?xml version="1.0" encoding="utf-8"?>
+<p:sld xmlns:a="http://schemas.openxmlformats.org/drawingml/2006/main" xmlns:r="http://schemas.openxmlformats.org/officeDocument/2006/relationships" xmlns:p="http://schemas.openxmlformats.org/presentationml/2006/main">
+  <p:cSld>
+    <p:spTree>
+      <p:nvGrpSpPr>
+        <p:cNvPr id="1" name="">
+          <a:extLst>
+            <a:ext uri="{FF2B5EF4-FFF2-40B4-BE49-F238E27FC236}">
+              <a16:creationId xmlns:a16="http://schemas.microsoft.com/office/drawing/2014/main" id="{8066A0DB-298D-57A7-183D-77E2C42E43C5}"/>
+            </a:ext>
+          </a:extLst>
+        </p:cNvPr>
+        <p:cNvGrpSpPr/>
+        <p:nvPr/>
+      </p:nvGrpSpPr>
+      <p:grpSpPr>
+        <a:xfrm>
+          <a:off x="0" y="0"/>
+          <a:ext cx="0" cy="0"/>
+          <a:chOff x="0" y="0"/>
+          <a:chExt cx="0" cy="0"/>
+        </a:xfrm>
+      </p:grpSpPr>
+      <p:sp>
+        <p:nvSpPr>
+          <p:cNvPr id="3" name="TextBox 2">
+            <a:extLst>
+              <a:ext uri="{FF2B5EF4-FFF2-40B4-BE49-F238E27FC236}">
+                <a16:creationId xmlns:a16="http://schemas.microsoft.com/office/drawing/2014/main" id="{A7B55711-6BC0-C768-5CF1-DBCF55813DB1}"/>
+              </a:ext>
+            </a:extLst>
+          </p:cNvPr>
+          <p:cNvSpPr txBox="1"/>
+          <p:nvPr/>
+        </p:nvSpPr>
+        <p:spPr>
+          <a:xfrm>
+            <a:off x="217714" y="255046"/>
             <a:ext cx="11756571" cy="355354"/>
           </a:xfrm>
           <a:prstGeom prst="rect">
@@ -3471,10 +9056,256 @@
           </a:p>
         </p:txBody>
       </p:sp>
+      <p:pic>
+        <p:nvPicPr>
+          <p:cNvPr id="6" name="Picture 5">
+            <a:extLst>
+              <a:ext uri="{FF2B5EF4-FFF2-40B4-BE49-F238E27FC236}">
+                <a16:creationId xmlns:a16="http://schemas.microsoft.com/office/drawing/2014/main" id="{7FC81DE8-D7F8-88BC-169A-762B11A34AE4}"/>
+              </a:ext>
+            </a:extLst>
+          </p:cNvPr>
+          <p:cNvPicPr>
+            <a:picLocks noChangeAspect="1"/>
+          </p:cNvPicPr>
+          <p:nvPr/>
+        </p:nvPicPr>
+        <p:blipFill>
+          <a:blip r:embed="rId2"/>
+          <a:stretch>
+            <a:fillRect/>
+          </a:stretch>
+        </p:blipFill>
+        <p:spPr>
+          <a:xfrm>
+            <a:off x="1434141" y="0"/>
+            <a:ext cx="9323717" cy="6858000"/>
+          </a:xfrm>
+          <a:prstGeom prst="rect">
+            <a:avLst/>
+          </a:prstGeom>
+        </p:spPr>
+      </p:pic>
     </p:spTree>
     <p:extLst>
       <p:ext uri="{BB962C8B-B14F-4D97-AF65-F5344CB8AC3E}">
-        <p14:creationId xmlns:p14="http://schemas.microsoft.com/office/powerpoint/2010/main" val="2486611332"/>
+        <p14:creationId xmlns:p14="http://schemas.microsoft.com/office/powerpoint/2010/main" val="1162269138"/>
+      </p:ext>
+    </p:extLst>
+  </p:cSld>
+  <p:clrMapOvr>
+    <a:masterClrMapping/>
+  </p:clrMapOvr>
+</p:sld>
+</file>
+
+<file path=ppt/slides/slide22.xml><?xml version="1.0" encoding="utf-8"?>
+<p:sld xmlns:a="http://schemas.openxmlformats.org/drawingml/2006/main" xmlns:r="http://schemas.openxmlformats.org/officeDocument/2006/relationships" xmlns:p="http://schemas.openxmlformats.org/presentationml/2006/main">
+  <p:cSld>
+    <p:spTree>
+      <p:nvGrpSpPr>
+        <p:cNvPr id="1" name="">
+          <a:extLst>
+            <a:ext uri="{FF2B5EF4-FFF2-40B4-BE49-F238E27FC236}">
+              <a16:creationId xmlns:a16="http://schemas.microsoft.com/office/drawing/2014/main" id="{29D19F1C-B120-6EFF-2066-719EC7FAC233}"/>
+            </a:ext>
+          </a:extLst>
+        </p:cNvPr>
+        <p:cNvGrpSpPr/>
+        <p:nvPr/>
+      </p:nvGrpSpPr>
+      <p:grpSpPr>
+        <a:xfrm>
+          <a:off x="0" y="0"/>
+          <a:ext cx="0" cy="0"/>
+          <a:chOff x="0" y="0"/>
+          <a:chExt cx="0" cy="0"/>
+        </a:xfrm>
+      </p:grpSpPr>
+      <p:sp>
+        <p:nvSpPr>
+          <p:cNvPr id="3" name="TextBox 2">
+            <a:extLst>
+              <a:ext uri="{FF2B5EF4-FFF2-40B4-BE49-F238E27FC236}">
+                <a16:creationId xmlns:a16="http://schemas.microsoft.com/office/drawing/2014/main" id="{34C04EE2-76C4-3619-AA01-58D70D4C666A}"/>
+              </a:ext>
+            </a:extLst>
+          </p:cNvPr>
+          <p:cNvSpPr txBox="1"/>
+          <p:nvPr/>
+        </p:nvSpPr>
+        <p:spPr>
+          <a:xfrm>
+            <a:off x="217714" y="255046"/>
+            <a:ext cx="11756571" cy="355354"/>
+          </a:xfrm>
+          <a:prstGeom prst="rect">
+            <a:avLst/>
+          </a:prstGeom>
+          <a:noFill/>
+        </p:spPr>
+        <p:txBody>
+          <a:bodyPr wrap="square">
+            <a:spAutoFit/>
+          </a:bodyPr>
+          <a:lstStyle/>
+          <a:p>
+            <a:pPr>
+              <a:lnSpc>
+                <a:spcPct val="150000"/>
+              </a:lnSpc>
+              <a:buNone/>
+            </a:pPr>
+            <a:r>
+              <a:rPr kumimoji="0" lang="en-US" altLang="en-US" sz="1300" b="0" i="0" u="none" strike="noStrike" cap="none" normalizeH="0" baseline="0">
+                <a:ln>
+                  <a:noFill/>
+                </a:ln>
+                <a:solidFill>
+                  <a:schemeClr val="tx1"/>
+                </a:solidFill>
+                <a:effectLst/>
+                <a:latin typeface="Arial" panose="020B0604020202020204" pitchFamily="34" charset="0"/>
+              </a:rPr>
+              <a:t>.</a:t>
+            </a:r>
+          </a:p>
+        </p:txBody>
+      </p:sp>
+      <p:pic>
+        <p:nvPicPr>
+          <p:cNvPr id="4" name="Picture 3">
+            <a:extLst>
+              <a:ext uri="{FF2B5EF4-FFF2-40B4-BE49-F238E27FC236}">
+                <a16:creationId xmlns:a16="http://schemas.microsoft.com/office/drawing/2014/main" id="{0FAC28A6-4ED9-B568-B12E-2C28DD53B66B}"/>
+              </a:ext>
+            </a:extLst>
+          </p:cNvPr>
+          <p:cNvPicPr>
+            <a:picLocks noChangeAspect="1"/>
+          </p:cNvPicPr>
+          <p:nvPr/>
+        </p:nvPicPr>
+        <p:blipFill>
+          <a:blip r:embed="rId2"/>
+          <a:stretch>
+            <a:fillRect/>
+          </a:stretch>
+        </p:blipFill>
+        <p:spPr>
+          <a:xfrm>
+            <a:off x="830494" y="0"/>
+            <a:ext cx="10531011" cy="6858000"/>
+          </a:xfrm>
+          <a:prstGeom prst="rect">
+            <a:avLst/>
+          </a:prstGeom>
+          <a:ln w="38100" cap="sq">
+            <a:solidFill>
+              <a:srgbClr val="000000"/>
+            </a:solidFill>
+            <a:prstDash val="solid"/>
+            <a:miter lim="800000"/>
+          </a:ln>
+          <a:effectLst>
+            <a:outerShdw blurRad="50800" dist="38100" dir="2700000" algn="tl" rotWithShape="0">
+              <a:srgbClr val="000000">
+                <a:alpha val="43000"/>
+              </a:srgbClr>
+            </a:outerShdw>
+          </a:effectLst>
+        </p:spPr>
+      </p:pic>
+    </p:spTree>
+    <p:extLst>
+      <p:ext uri="{BB962C8B-B14F-4D97-AF65-F5344CB8AC3E}">
+        <p14:creationId xmlns:p14="http://schemas.microsoft.com/office/powerpoint/2010/main" val="3097534334"/>
+      </p:ext>
+    </p:extLst>
+  </p:cSld>
+  <p:clrMapOvr>
+    <a:masterClrMapping/>
+  </p:clrMapOvr>
+</p:sld>
+</file>
+
+<file path=ppt/slides/slide23.xml><?xml version="1.0" encoding="utf-8"?>
+<p:sld xmlns:a="http://schemas.openxmlformats.org/drawingml/2006/main" xmlns:r="http://schemas.openxmlformats.org/officeDocument/2006/relationships" xmlns:p="http://schemas.openxmlformats.org/presentationml/2006/main">
+  <p:cSld>
+    <p:spTree>
+      <p:nvGrpSpPr>
+        <p:cNvPr id="1" name="">
+          <a:extLst>
+            <a:ext uri="{FF2B5EF4-FFF2-40B4-BE49-F238E27FC236}">
+              <a16:creationId xmlns:a16="http://schemas.microsoft.com/office/drawing/2014/main" id="{11DD17C9-62AD-5949-BAB5-1DF338415313}"/>
+            </a:ext>
+          </a:extLst>
+        </p:cNvPr>
+        <p:cNvGrpSpPr/>
+        <p:nvPr/>
+      </p:nvGrpSpPr>
+      <p:grpSpPr>
+        <a:xfrm>
+          <a:off x="0" y="0"/>
+          <a:ext cx="0" cy="0"/>
+          <a:chOff x="0" y="0"/>
+          <a:chExt cx="0" cy="0"/>
+        </a:xfrm>
+      </p:grpSpPr>
+      <p:sp>
+        <p:nvSpPr>
+          <p:cNvPr id="3" name="TextBox 2">
+            <a:extLst>
+              <a:ext uri="{FF2B5EF4-FFF2-40B4-BE49-F238E27FC236}">
+                <a16:creationId xmlns:a16="http://schemas.microsoft.com/office/drawing/2014/main" id="{BD457A51-95BD-2A90-6A6F-21DDC865088E}"/>
+              </a:ext>
+            </a:extLst>
+          </p:cNvPr>
+          <p:cNvSpPr txBox="1"/>
+          <p:nvPr/>
+        </p:nvSpPr>
+        <p:spPr>
+          <a:xfrm>
+            <a:off x="217714" y="255046"/>
+            <a:ext cx="11756571" cy="355354"/>
+          </a:xfrm>
+          <a:prstGeom prst="rect">
+            <a:avLst/>
+          </a:prstGeom>
+          <a:noFill/>
+        </p:spPr>
+        <p:txBody>
+          <a:bodyPr wrap="square">
+            <a:spAutoFit/>
+          </a:bodyPr>
+          <a:lstStyle/>
+          <a:p>
+            <a:pPr>
+              <a:lnSpc>
+                <a:spcPct val="150000"/>
+              </a:lnSpc>
+              <a:buNone/>
+            </a:pPr>
+            <a:r>
+              <a:rPr kumimoji="0" lang="en-US" altLang="en-US" sz="1300" b="0" i="0" u="none" strike="noStrike" cap="none" normalizeH="0" baseline="0">
+                <a:ln>
+                  <a:noFill/>
+                </a:ln>
+                <a:solidFill>
+                  <a:schemeClr val="tx1"/>
+                </a:solidFill>
+                <a:effectLst/>
+                <a:latin typeface="Arial" panose="020B0604020202020204" pitchFamily="34" charset="0"/>
+              </a:rPr>
+              <a:t>.</a:t>
+            </a:r>
+          </a:p>
+        </p:txBody>
+      </p:sp>
+    </p:spTree>
+    <p:extLst>
+      <p:ext uri="{BB962C8B-B14F-4D97-AF65-F5344CB8AC3E}">
+        <p14:creationId xmlns:p14="http://schemas.microsoft.com/office/powerpoint/2010/main" val="2035198597"/>
       </p:ext>
     </p:extLst>
   </p:cSld>
@@ -3522,7 +9353,7 @@
         <p:spPr>
           <a:xfrm>
             <a:off x="217714" y="255046"/>
-            <a:ext cx="11756571" cy="355354"/>
+            <a:ext cx="11756571" cy="5156668"/>
           </a:xfrm>
           <a:prstGeom prst="rect">
             <a:avLst/>
@@ -3552,11 +9383,594 @@
                 <a:effectLst/>
                 <a:latin typeface="Arial" panose="020B0604020202020204" pitchFamily="34" charset="0"/>
               </a:rPr>
-              <a:t>.</a:t>
-            </a:r>
+              <a:t>❌</a:t>
+            </a:r>
+            <a:r>
+              <a:rPr kumimoji="0" lang="az-Latn-AZ" altLang="en-US" sz="1300" b="0" i="0" u="none" strike="noStrike" cap="none" normalizeH="0" baseline="0">
+                <a:ln>
+                  <a:noFill/>
+                </a:ln>
+                <a:solidFill>
+                  <a:schemeClr val="tx1"/>
+                </a:solidFill>
+                <a:effectLst/>
+                <a:latin typeface="Arial" panose="020B0604020202020204" pitchFamily="34" charset="0"/>
+              </a:rPr>
+              <a:t> </a:t>
+            </a:r>
+            <a:r>
+              <a:rPr kumimoji="0" lang="en-US" altLang="en-US" sz="1300" b="0" i="0" u="none" strike="noStrike" cap="none" normalizeH="0" baseline="0">
+                <a:ln>
+                  <a:noFill/>
+                </a:ln>
+                <a:solidFill>
+                  <a:schemeClr val="tx1"/>
+                </a:solidFill>
+                <a:effectLst/>
+                <a:latin typeface="Arial" panose="020B0604020202020204" pitchFamily="34" charset="0"/>
+              </a:rPr>
+              <a:t>1-ci formdakı:</a:t>
+            </a:r>
+            <a:endParaRPr kumimoji="0" lang="az-Latn-AZ" altLang="en-US" sz="1300" b="0" i="0" u="none" strike="noStrike" cap="none" normalizeH="0" baseline="0">
+              <a:ln>
+                <a:noFill/>
+              </a:ln>
+              <a:solidFill>
+                <a:schemeClr val="tx1"/>
+              </a:solidFill>
+              <a:effectLst/>
+              <a:latin typeface="Arial" panose="020B0604020202020204" pitchFamily="34" charset="0"/>
+            </a:endParaRPr>
+          </a:p>
+          <a:p>
+            <a:pPr>
+              <a:lnSpc>
+                <a:spcPct val="150000"/>
+              </a:lnSpc>
+              <a:buNone/>
+            </a:pPr>
+            <a:endParaRPr lang="az-Latn-AZ" altLang="en-US" sz="1300">
+              <a:latin typeface="Arial" panose="020B0604020202020204" pitchFamily="34" charset="0"/>
+            </a:endParaRPr>
+          </a:p>
+          <a:p>
+            <a:pPr>
+              <a:lnSpc>
+                <a:spcPct val="150000"/>
+              </a:lnSpc>
+              <a:buNone/>
+            </a:pPr>
+            <a:endParaRPr kumimoji="0" lang="az-Latn-AZ" altLang="en-US" sz="1300" b="0" i="0" u="none" strike="noStrike" cap="none" normalizeH="0" baseline="0">
+              <a:ln>
+                <a:noFill/>
+              </a:ln>
+              <a:solidFill>
+                <a:schemeClr val="tx1"/>
+              </a:solidFill>
+              <a:effectLst/>
+              <a:latin typeface="Arial" panose="020B0604020202020204" pitchFamily="34" charset="0"/>
+            </a:endParaRPr>
+          </a:p>
+          <a:p>
+            <a:pPr>
+              <a:lnSpc>
+                <a:spcPct val="150000"/>
+              </a:lnSpc>
+              <a:buNone/>
+            </a:pPr>
+            <a:endParaRPr kumimoji="0" lang="az-Latn-AZ" altLang="en-US" sz="1300" b="0" i="0" u="none" strike="noStrike" cap="none" normalizeH="0" baseline="0">
+              <a:ln>
+                <a:noFill/>
+              </a:ln>
+              <a:solidFill>
+                <a:schemeClr val="tx1"/>
+              </a:solidFill>
+              <a:effectLst/>
+              <a:latin typeface="Arial" panose="020B0604020202020204" pitchFamily="34" charset="0"/>
+            </a:endParaRPr>
+          </a:p>
+          <a:p>
+            <a:pPr marL="285750" indent="-285750">
+              <a:lnSpc>
+                <a:spcPct val="150000"/>
+              </a:lnSpc>
+              <a:buFont typeface="Arial" panose="020B0604020202020204" pitchFamily="34" charset="0"/>
+              <a:buChar char="•"/>
+            </a:pPr>
+            <a:r>
+              <a:rPr kumimoji="0" lang="en-US" altLang="en-US" sz="1300" b="0" i="0" u="none" strike="noStrike" cap="none" normalizeH="0" baseline="0">
+                <a:ln>
+                  <a:noFill/>
+                </a:ln>
+                <a:solidFill>
+                  <a:schemeClr val="tx1"/>
+                </a:solidFill>
+                <a:effectLst/>
+                <a:latin typeface="Arial" panose="020B0604020202020204" pitchFamily="34" charset="0"/>
+              </a:rPr>
+              <a:t>Bu HTML üçün yanlışdır – brauzer </a:t>
+            </a:r>
+            <a:r>
+              <a:rPr kumimoji="0" lang="en-US" altLang="en-US" sz="1300" b="1" i="0" u="none" strike="noStrike" cap="none" normalizeH="0" baseline="0">
+                <a:ln>
+                  <a:noFill/>
+                </a:ln>
+                <a:solidFill>
+                  <a:schemeClr val="tx1"/>
+                </a:solidFill>
+                <a:effectLst/>
+                <a:latin typeface="Arial" panose="020B0604020202020204" pitchFamily="34" charset="0"/>
+              </a:rPr>
+              <a:t>PUT</a:t>
+            </a:r>
+            <a:r>
+              <a:rPr kumimoji="0" lang="en-US" altLang="en-US" sz="1300" b="0" i="0" u="none" strike="noStrike" cap="none" normalizeH="0" baseline="0">
+                <a:ln>
+                  <a:noFill/>
+                </a:ln>
+                <a:solidFill>
+                  <a:schemeClr val="tx1"/>
+                </a:solidFill>
+                <a:effectLst/>
+                <a:latin typeface="Arial" panose="020B0604020202020204" pitchFamily="34" charset="0"/>
+              </a:rPr>
+              <a:t> metodunu tanımır.</a:t>
+            </a:r>
+          </a:p>
+          <a:p>
+            <a:pPr marL="285750" indent="-285750">
+              <a:lnSpc>
+                <a:spcPct val="150000"/>
+              </a:lnSpc>
+              <a:buFont typeface="Arial" panose="020B0604020202020204" pitchFamily="34" charset="0"/>
+              <a:buChar char="•"/>
+            </a:pPr>
+            <a:r>
+              <a:rPr kumimoji="0" lang="en-US" altLang="en-US" sz="1300" b="0" i="0" u="none" strike="noStrike" cap="none" normalizeH="0" baseline="0">
+                <a:ln>
+                  <a:noFill/>
+                </a:ln>
+                <a:solidFill>
+                  <a:schemeClr val="tx1"/>
+                </a:solidFill>
+                <a:effectLst/>
+                <a:latin typeface="Arial" panose="020B0604020202020204" pitchFamily="34" charset="0"/>
+              </a:rPr>
+              <a:t>Laravel buna görə bu </a:t>
+            </a:r>
+            <a:r>
+              <a:rPr kumimoji="0" lang="en-US" altLang="en-US" sz="1300" b="1" i="0" u="none" strike="noStrike" cap="none" normalizeH="0" baseline="0">
+                <a:ln>
+                  <a:noFill/>
+                </a:ln>
+                <a:solidFill>
+                  <a:schemeClr val="tx1"/>
+                </a:solidFill>
+                <a:effectLst/>
+                <a:latin typeface="Arial" panose="020B0604020202020204" pitchFamily="34" charset="0"/>
+              </a:rPr>
+              <a:t>formu</a:t>
+            </a:r>
+            <a:r>
+              <a:rPr kumimoji="0" lang="en-US" altLang="en-US" sz="1300" b="0" i="0" u="none" strike="noStrike" cap="none" normalizeH="0" baseline="0">
+                <a:ln>
+                  <a:noFill/>
+                </a:ln>
+                <a:solidFill>
+                  <a:schemeClr val="tx1"/>
+                </a:solidFill>
+                <a:effectLst/>
+                <a:latin typeface="Arial" panose="020B0604020202020204" pitchFamily="34" charset="0"/>
+              </a:rPr>
+              <a:t> heç cür qəbul edə bilməz, çünki </a:t>
+            </a:r>
+            <a:r>
+              <a:rPr kumimoji="0" lang="en-US" altLang="en-US" sz="1300" b="1" i="0" u="none" strike="noStrike" cap="none" normalizeH="0" baseline="0">
+                <a:ln>
+                  <a:noFill/>
+                </a:ln>
+                <a:solidFill>
+                  <a:schemeClr val="tx1"/>
+                </a:solidFill>
+                <a:effectLst/>
+                <a:latin typeface="Arial" panose="020B0604020202020204" pitchFamily="34" charset="0"/>
+              </a:rPr>
+              <a:t>request</a:t>
+            </a:r>
+            <a:r>
+              <a:rPr kumimoji="0" lang="en-US" altLang="en-US" sz="1300" b="0" i="0" u="none" strike="noStrike" cap="none" normalizeH="0" baseline="0">
+                <a:ln>
+                  <a:noFill/>
+                </a:ln>
+                <a:solidFill>
+                  <a:schemeClr val="tx1"/>
+                </a:solidFill>
+                <a:effectLst/>
+                <a:latin typeface="Arial" panose="020B0604020202020204" pitchFamily="34" charset="0"/>
+              </a:rPr>
+              <a:t> ümumiyyətlə göndərilmir və ya düzgün tanınmır.</a:t>
+            </a:r>
+            <a:endParaRPr kumimoji="0" lang="az-Latn-AZ" altLang="en-US" sz="1300" b="0" i="0" u="none" strike="noStrike" cap="none" normalizeH="0" baseline="0">
+              <a:ln>
+                <a:noFill/>
+              </a:ln>
+              <a:solidFill>
+                <a:schemeClr val="tx1"/>
+              </a:solidFill>
+              <a:effectLst/>
+              <a:latin typeface="Arial" panose="020B0604020202020204" pitchFamily="34" charset="0"/>
+            </a:endParaRPr>
+          </a:p>
+          <a:p>
+            <a:pPr>
+              <a:lnSpc>
+                <a:spcPct val="150000"/>
+              </a:lnSpc>
+              <a:buNone/>
+            </a:pPr>
+            <a:endParaRPr lang="az-Latn-AZ" altLang="en-US" sz="1300">
+              <a:latin typeface="Arial" panose="020B0604020202020204" pitchFamily="34" charset="0"/>
+            </a:endParaRPr>
+          </a:p>
+          <a:p>
+            <a:pPr>
+              <a:lnSpc>
+                <a:spcPct val="150000"/>
+              </a:lnSpc>
+              <a:buNone/>
+            </a:pPr>
+            <a:endParaRPr kumimoji="0" lang="az-Latn-AZ" altLang="en-US" sz="1300" b="0" i="0" u="none" strike="noStrike" cap="none" normalizeH="0" baseline="0">
+              <a:ln>
+                <a:noFill/>
+              </a:ln>
+              <a:solidFill>
+                <a:schemeClr val="tx1"/>
+              </a:solidFill>
+              <a:effectLst/>
+              <a:latin typeface="Arial" panose="020B0604020202020204" pitchFamily="34" charset="0"/>
+            </a:endParaRPr>
+          </a:p>
+          <a:p>
+            <a:pPr>
+              <a:lnSpc>
+                <a:spcPct val="150000"/>
+              </a:lnSpc>
+              <a:buNone/>
+            </a:pPr>
+            <a:endParaRPr lang="az-Latn-AZ" altLang="en-US" sz="1300">
+              <a:latin typeface="Arial" panose="020B0604020202020204" pitchFamily="34" charset="0"/>
+            </a:endParaRPr>
+          </a:p>
+          <a:p>
+            <a:pPr>
+              <a:lnSpc>
+                <a:spcPct val="150000"/>
+              </a:lnSpc>
+              <a:buNone/>
+            </a:pPr>
+            <a:endParaRPr kumimoji="0" lang="az-Latn-AZ" altLang="en-US" sz="1300" b="0" i="0" u="none" strike="noStrike" cap="none" normalizeH="0" baseline="0">
+              <a:ln>
+                <a:noFill/>
+              </a:ln>
+              <a:solidFill>
+                <a:schemeClr val="tx1"/>
+              </a:solidFill>
+              <a:effectLst/>
+              <a:latin typeface="Arial" panose="020B0604020202020204" pitchFamily="34" charset="0"/>
+            </a:endParaRPr>
+          </a:p>
+          <a:p>
+            <a:pPr>
+              <a:lnSpc>
+                <a:spcPct val="150000"/>
+              </a:lnSpc>
+              <a:buNone/>
+            </a:pPr>
+            <a:endParaRPr kumimoji="0" lang="az-Latn-AZ" altLang="en-US" sz="1300" b="0" i="0" u="none" strike="noStrike" cap="none" normalizeH="0" baseline="0">
+              <a:ln>
+                <a:noFill/>
+              </a:ln>
+              <a:solidFill>
+                <a:schemeClr val="tx1"/>
+              </a:solidFill>
+              <a:effectLst/>
+              <a:latin typeface="Arial" panose="020B0604020202020204" pitchFamily="34" charset="0"/>
+            </a:endParaRPr>
+          </a:p>
+          <a:p>
+            <a:pPr>
+              <a:lnSpc>
+                <a:spcPct val="150000"/>
+              </a:lnSpc>
+              <a:buNone/>
+            </a:pPr>
+            <a:r>
+              <a:rPr kumimoji="0" lang="en-US" altLang="en-US" sz="1300" b="0" i="0" u="none" strike="noStrike" cap="none" normalizeH="0" baseline="0">
+                <a:ln>
+                  <a:noFill/>
+                </a:ln>
+                <a:solidFill>
+                  <a:schemeClr val="tx1"/>
+                </a:solidFill>
+                <a:effectLst/>
+                <a:latin typeface="Arial" panose="020B0604020202020204" pitchFamily="34" charset="0"/>
+              </a:rPr>
+              <a:t>✅ 2-ci form nə edir?</a:t>
+            </a:r>
+            <a:endParaRPr lang="az-Latn-AZ" altLang="en-US" sz="1300">
+              <a:latin typeface="Arial" panose="020B0604020202020204" pitchFamily="34" charset="0"/>
+            </a:endParaRPr>
+          </a:p>
+          <a:p>
+            <a:pPr marL="285750" indent="-285750">
+              <a:lnSpc>
+                <a:spcPct val="150000"/>
+              </a:lnSpc>
+              <a:buFont typeface="Arial" panose="020B0604020202020204" pitchFamily="34" charset="0"/>
+              <a:buChar char="•"/>
+            </a:pPr>
+            <a:r>
+              <a:rPr kumimoji="0" lang="en-US" altLang="en-US" sz="1300" b="1" i="0" u="none" strike="noStrike" cap="none" normalizeH="0" baseline="0">
+                <a:ln>
+                  <a:noFill/>
+                </a:ln>
+                <a:solidFill>
+                  <a:schemeClr val="tx1"/>
+                </a:solidFill>
+                <a:effectLst/>
+                <a:latin typeface="Arial" panose="020B0604020202020204" pitchFamily="34" charset="0"/>
+              </a:rPr>
+              <a:t>method="POST" </a:t>
+            </a:r>
+            <a:r>
+              <a:rPr kumimoji="0" lang="en-US" altLang="en-US" sz="1300" b="0" i="0" u="none" strike="noStrike" cap="none" normalizeH="0" baseline="0">
+                <a:ln>
+                  <a:noFill/>
+                </a:ln>
+                <a:solidFill>
+                  <a:schemeClr val="tx1"/>
+                </a:solidFill>
+                <a:effectLst/>
+                <a:latin typeface="Arial" panose="020B0604020202020204" pitchFamily="34" charset="0"/>
+              </a:rPr>
+              <a:t>yazılır → bu </a:t>
+            </a:r>
+            <a:r>
+              <a:rPr kumimoji="0" lang="en-US" altLang="en-US" sz="1300" b="1" i="0" u="none" strike="noStrike" cap="none" normalizeH="0" baseline="0">
+                <a:ln>
+                  <a:noFill/>
+                </a:ln>
+                <a:solidFill>
+                  <a:schemeClr val="tx1"/>
+                </a:solidFill>
+                <a:effectLst/>
+                <a:latin typeface="Arial" panose="020B0604020202020204" pitchFamily="34" charset="0"/>
+              </a:rPr>
+              <a:t>HTML</a:t>
+            </a:r>
+            <a:r>
+              <a:rPr kumimoji="0" lang="en-US" altLang="en-US" sz="1300" b="0" i="0" u="none" strike="noStrike" cap="none" normalizeH="0" baseline="0">
+                <a:ln>
+                  <a:noFill/>
+                </a:ln>
+                <a:solidFill>
+                  <a:schemeClr val="tx1"/>
+                </a:solidFill>
+                <a:effectLst/>
+                <a:latin typeface="Arial" panose="020B0604020202020204" pitchFamily="34" charset="0"/>
+              </a:rPr>
+              <a:t>-də keçərlidir.</a:t>
+            </a:r>
+          </a:p>
+          <a:p>
+            <a:pPr marL="285750" indent="-285750">
+              <a:lnSpc>
+                <a:spcPct val="150000"/>
+              </a:lnSpc>
+              <a:buFont typeface="Arial" panose="020B0604020202020204" pitchFamily="34" charset="0"/>
+              <a:buChar char="•"/>
+            </a:pPr>
+            <a:r>
+              <a:rPr kumimoji="0" lang="en-US" altLang="en-US" sz="1300" b="1" i="0" u="none" strike="noStrike" cap="none" normalizeH="0" baseline="0">
+                <a:ln>
+                  <a:noFill/>
+                </a:ln>
+                <a:solidFill>
+                  <a:schemeClr val="tx1"/>
+                </a:solidFill>
+                <a:effectLst/>
+                <a:latin typeface="Arial" panose="020B0604020202020204" pitchFamily="34" charset="0"/>
+              </a:rPr>
+              <a:t>@method('PUT') </a:t>
+            </a:r>
+            <a:r>
+              <a:rPr kumimoji="0" lang="en-US" altLang="en-US" sz="1300" b="0" i="0" u="none" strike="noStrike" cap="none" normalizeH="0" baseline="0">
+                <a:ln>
+                  <a:noFill/>
+                </a:ln>
+                <a:solidFill>
+                  <a:schemeClr val="tx1"/>
+                </a:solidFill>
+                <a:effectLst/>
+                <a:latin typeface="Arial" panose="020B0604020202020204" pitchFamily="34" charset="0"/>
+              </a:rPr>
+              <a:t>isə Laravel-ə "bu əslində </a:t>
+            </a:r>
+            <a:r>
+              <a:rPr kumimoji="0" lang="en-US" altLang="en-US" sz="1300" b="1" i="0" u="none" strike="noStrike" cap="none" normalizeH="0" baseline="0">
+                <a:ln>
+                  <a:noFill/>
+                </a:ln>
+                <a:solidFill>
+                  <a:schemeClr val="tx1"/>
+                </a:solidFill>
+                <a:effectLst/>
+                <a:latin typeface="Arial" panose="020B0604020202020204" pitchFamily="34" charset="0"/>
+              </a:rPr>
+              <a:t>PUT</a:t>
+            </a:r>
+            <a:r>
+              <a:rPr kumimoji="0" lang="en-US" altLang="en-US" sz="1300" b="0" i="0" u="none" strike="noStrike" cap="none" normalizeH="0" baseline="0">
+                <a:ln>
+                  <a:noFill/>
+                </a:ln>
+                <a:solidFill>
+                  <a:schemeClr val="tx1"/>
+                </a:solidFill>
+                <a:effectLst/>
+                <a:latin typeface="Arial" panose="020B0604020202020204" pitchFamily="34" charset="0"/>
+              </a:rPr>
+              <a:t> metodudur" deyir.</a:t>
+            </a:r>
+            <a:endParaRPr kumimoji="0" lang="az-Latn-AZ" altLang="en-US" sz="1300" b="0" i="0" u="none" strike="noStrike" cap="none" normalizeH="0" baseline="0">
+              <a:ln>
+                <a:noFill/>
+              </a:ln>
+              <a:solidFill>
+                <a:schemeClr val="tx1"/>
+              </a:solidFill>
+              <a:effectLst/>
+              <a:latin typeface="Arial" panose="020B0604020202020204" pitchFamily="34" charset="0"/>
+            </a:endParaRPr>
+          </a:p>
+          <a:p>
+            <a:pPr>
+              <a:lnSpc>
+                <a:spcPct val="150000"/>
+              </a:lnSpc>
+              <a:buNone/>
+            </a:pPr>
+            <a:endParaRPr lang="az-Latn-AZ" altLang="en-US" sz="1300">
+              <a:latin typeface="Arial" panose="020B0604020202020204" pitchFamily="34" charset="0"/>
+            </a:endParaRPr>
+          </a:p>
+          <a:p>
+            <a:pPr>
+              <a:lnSpc>
+                <a:spcPct val="150000"/>
+              </a:lnSpc>
+              <a:buNone/>
+            </a:pPr>
+            <a:r>
+              <a:rPr kumimoji="0" lang="az-Latn-AZ" altLang="en-US" sz="1300" b="0" i="0" u="none" strike="noStrike" cap="none" normalizeH="0" baseline="0">
+                <a:ln>
+                  <a:noFill/>
+                </a:ln>
+                <a:solidFill>
+                  <a:schemeClr val="tx1"/>
+                </a:solidFill>
+                <a:effectLst/>
+                <a:latin typeface="Arial" panose="020B0604020202020204" pitchFamily="34" charset="0"/>
+              </a:rPr>
+              <a:t>Bu, Laravel-in </a:t>
+            </a:r>
+            <a:r>
+              <a:rPr kumimoji="0" lang="az-Latn-AZ" altLang="en-US" sz="1300" b="1" u="none" strike="noStrike" cap="none" normalizeH="0" baseline="0">
+                <a:ln>
+                  <a:noFill/>
+                </a:ln>
+                <a:solidFill>
+                  <a:schemeClr val="tx1"/>
+                </a:solidFill>
+                <a:effectLst/>
+                <a:latin typeface="Arial" panose="020B0604020202020204" pitchFamily="34" charset="0"/>
+              </a:rPr>
+              <a:t>form spoofing </a:t>
+            </a:r>
+            <a:r>
+              <a:rPr kumimoji="0" lang="az-Latn-AZ" altLang="en-US" sz="1300" b="0" i="0" u="none" strike="noStrike" cap="none" normalizeH="0" baseline="0">
+                <a:ln>
+                  <a:noFill/>
+                </a:ln>
+                <a:solidFill>
+                  <a:schemeClr val="tx1"/>
+                </a:solidFill>
+                <a:effectLst/>
+                <a:latin typeface="Arial" panose="020B0604020202020204" pitchFamily="34" charset="0"/>
+              </a:rPr>
+              <a:t>funksiyasıdır: Bu gizli input, Laravel-ə bildirir ki, baxmayaraq ki, POST sorğusu kimi gəlib, biz onu PUT kimi qəbul etməliyik.</a:t>
+            </a:r>
+          </a:p>
+          <a:p>
+            <a:pPr>
+              <a:lnSpc>
+                <a:spcPct val="150000"/>
+              </a:lnSpc>
+              <a:buNone/>
+            </a:pPr>
+            <a:endParaRPr kumimoji="0" lang="en-US" altLang="en-US" sz="1300" b="0" i="0" u="none" strike="noStrike" cap="none" normalizeH="0" baseline="0">
+              <a:ln>
+                <a:noFill/>
+              </a:ln>
+              <a:solidFill>
+                <a:schemeClr val="tx1"/>
+              </a:solidFill>
+              <a:effectLst/>
+              <a:latin typeface="Arial" panose="020B0604020202020204" pitchFamily="34" charset="0"/>
+            </a:endParaRPr>
           </a:p>
         </p:txBody>
       </p:sp>
+      <p:pic>
+        <p:nvPicPr>
+          <p:cNvPr id="6" name="Picture 5">
+            <a:extLst>
+              <a:ext uri="{FF2B5EF4-FFF2-40B4-BE49-F238E27FC236}">
+                <a16:creationId xmlns:a16="http://schemas.microsoft.com/office/drawing/2014/main" id="{E679FAA8-5CF1-5531-2A43-6B1C37F578EF}"/>
+              </a:ext>
+            </a:extLst>
+          </p:cNvPr>
+          <p:cNvPicPr>
+            <a:picLocks noChangeAspect="1"/>
+          </p:cNvPicPr>
+          <p:nvPr/>
+        </p:nvPicPr>
+        <p:blipFill>
+          <a:blip r:embed="rId2"/>
+          <a:stretch>
+            <a:fillRect/>
+          </a:stretch>
+        </p:blipFill>
+        <p:spPr>
+          <a:xfrm>
+            <a:off x="0" y="720620"/>
+            <a:ext cx="2353003" cy="552527"/>
+          </a:xfrm>
+          <a:prstGeom prst="rect">
+            <a:avLst/>
+          </a:prstGeom>
+        </p:spPr>
+      </p:pic>
+      <p:pic>
+        <p:nvPicPr>
+          <p:cNvPr id="8" name="Picture 7">
+            <a:extLst>
+              <a:ext uri="{FF2B5EF4-FFF2-40B4-BE49-F238E27FC236}">
+                <a16:creationId xmlns:a16="http://schemas.microsoft.com/office/drawing/2014/main" id="{38C70633-7C2A-9139-3064-5C510CFD6643}"/>
+              </a:ext>
+            </a:extLst>
+          </p:cNvPr>
+          <p:cNvPicPr>
+            <a:picLocks noChangeAspect="1"/>
+          </p:cNvPicPr>
+          <p:nvPr/>
+        </p:nvPicPr>
+        <p:blipFill>
+          <a:blip r:embed="rId3"/>
+          <a:stretch>
+            <a:fillRect/>
+          </a:stretch>
+        </p:blipFill>
+        <p:spPr>
+          <a:xfrm>
+            <a:off x="0" y="5245785"/>
+            <a:ext cx="4191585" cy="495369"/>
+          </a:xfrm>
+          <a:prstGeom prst="rect">
+            <a:avLst/>
+          </a:prstGeom>
+        </p:spPr>
+      </p:pic>
     </p:spTree>
     <p:extLst>
       <p:ext uri="{BB962C8B-B14F-4D97-AF65-F5344CB8AC3E}">
@@ -3638,15 +10052,2349 @@
                 <a:effectLst/>
                 <a:latin typeface="Arial" panose="020B0604020202020204" pitchFamily="34" charset="0"/>
               </a:rPr>
-              <a:t>.</a:t>
+              <a:t>✅ </a:t>
+            </a:r>
+            <a:r>
+              <a:rPr kumimoji="0" lang="en-US" altLang="en-US" sz="1300" b="1" i="0" u="none" strike="noStrike" cap="none" normalizeH="0" baseline="0">
+                <a:ln>
+                  <a:noFill/>
+                </a:ln>
+                <a:solidFill>
+                  <a:schemeClr val="tx1"/>
+                </a:solidFill>
+                <a:effectLst/>
+                <a:latin typeface="Arial" panose="020B0604020202020204" pitchFamily="34" charset="0"/>
+              </a:rPr>
+              <a:t>Nəticə</a:t>
+            </a:r>
+            <a:r>
+              <a:rPr kumimoji="0" lang="en-US" altLang="en-US" sz="1300" b="0" i="0" u="none" strike="noStrike" cap="none" normalizeH="0" baseline="0">
+                <a:ln>
+                  <a:noFill/>
+                </a:ln>
+                <a:solidFill>
+                  <a:schemeClr val="tx1"/>
+                </a:solidFill>
+                <a:effectLst/>
+                <a:latin typeface="Arial" panose="020B0604020202020204" pitchFamily="34" charset="0"/>
+              </a:rPr>
+              <a:t>:</a:t>
             </a:r>
           </a:p>
         </p:txBody>
       </p:sp>
+      <p:graphicFrame>
+        <p:nvGraphicFramePr>
+          <p:cNvPr id="2" name="Table 1">
+            <a:extLst>
+              <a:ext uri="{FF2B5EF4-FFF2-40B4-BE49-F238E27FC236}">
+                <a16:creationId xmlns:a16="http://schemas.microsoft.com/office/drawing/2014/main" id="{4C8EF4BF-6694-6A3A-6C7E-658D32DC5338}"/>
+              </a:ext>
+            </a:extLst>
+          </p:cNvPr>
+          <p:cNvGraphicFramePr>
+            <a:graphicFrameLocks noGrp="1"/>
+          </p:cNvGraphicFramePr>
+          <p:nvPr>
+            <p:extLst>
+              <p:ext uri="{D42A27DB-BD31-4B8C-83A1-F6EECF244321}">
+                <p14:modId xmlns:p14="http://schemas.microsoft.com/office/powerpoint/2010/main" val="981067312"/>
+              </p:ext>
+            </p:extLst>
+          </p:nvPr>
+        </p:nvGraphicFramePr>
+        <p:xfrm>
+          <a:off x="217714" y="978640"/>
+          <a:ext cx="11840852" cy="2280728"/>
+        </p:xfrm>
+        <a:graphic>
+          <a:graphicData uri="http://schemas.openxmlformats.org/drawingml/2006/table">
+            <a:tbl>
+              <a:tblPr/>
+              <a:tblGrid>
+                <a:gridCol w="891500">
+                  <a:extLst>
+                    <a:ext uri="{9D8B030D-6E8A-4147-A177-3AD203B41FA5}">
+                      <a16:colId xmlns:a16="http://schemas.microsoft.com/office/drawing/2014/main" val="2544907840"/>
+                    </a:ext>
+                  </a:extLst>
+                </a:gridCol>
+                <a:gridCol w="3532389">
+                  <a:extLst>
+                    <a:ext uri="{9D8B030D-6E8A-4147-A177-3AD203B41FA5}">
+                      <a16:colId xmlns:a16="http://schemas.microsoft.com/office/drawing/2014/main" val="951725435"/>
+                    </a:ext>
+                  </a:extLst>
+                </a:gridCol>
+                <a:gridCol w="2635351">
+                  <a:extLst>
+                    <a:ext uri="{9D8B030D-6E8A-4147-A177-3AD203B41FA5}">
+                      <a16:colId xmlns:a16="http://schemas.microsoft.com/office/drawing/2014/main" val="1086841334"/>
+                    </a:ext>
+                  </a:extLst>
+                </a:gridCol>
+                <a:gridCol w="4781612">
+                  <a:extLst>
+                    <a:ext uri="{9D8B030D-6E8A-4147-A177-3AD203B41FA5}">
+                      <a16:colId xmlns:a16="http://schemas.microsoft.com/office/drawing/2014/main" val="3929436834"/>
+                    </a:ext>
+                  </a:extLst>
+                </a:gridCol>
+              </a:tblGrid>
+              <a:tr h="506828">
+                <a:tc>
+                  <a:txBody>
+                    <a:bodyPr/>
+                    <a:lstStyle/>
+                    <a:p>
+                      <a:r>
+                        <a:rPr lang="en-US" b="1"/>
+                        <a:t>Nömrə</a:t>
+                      </a:r>
+                    </a:p>
+                  </a:txBody>
+                  <a:tcPr anchor="ctr">
+                    <a:lnL w="12700" cap="flat" cmpd="sng" algn="ctr">
+                      <a:solidFill>
+                        <a:schemeClr val="tx1"/>
+                      </a:solidFill>
+                      <a:prstDash val="solid"/>
+                      <a:round/>
+                      <a:headEnd type="none" w="med" len="med"/>
+                      <a:tailEnd type="none" w="med" len="med"/>
+                    </a:lnL>
+                    <a:lnR w="12700" cap="flat" cmpd="sng" algn="ctr">
+                      <a:solidFill>
+                        <a:schemeClr val="tx1"/>
+                      </a:solidFill>
+                      <a:prstDash val="solid"/>
+                      <a:round/>
+                      <a:headEnd type="none" w="med" len="med"/>
+                      <a:tailEnd type="none" w="med" len="med"/>
+                    </a:lnR>
+                    <a:lnT w="12700" cap="flat" cmpd="sng" algn="ctr">
+                      <a:solidFill>
+                        <a:schemeClr val="tx1"/>
+                      </a:solidFill>
+                      <a:prstDash val="solid"/>
+                      <a:round/>
+                      <a:headEnd type="none" w="med" len="med"/>
+                      <a:tailEnd type="none" w="med" len="med"/>
+                    </a:lnT>
+                    <a:lnB w="12700" cap="flat" cmpd="sng" algn="ctr">
+                      <a:solidFill>
+                        <a:schemeClr val="tx1"/>
+                      </a:solidFill>
+                      <a:prstDash val="solid"/>
+                      <a:round/>
+                      <a:headEnd type="none" w="med" len="med"/>
+                      <a:tailEnd type="none" w="med" len="med"/>
+                    </a:lnB>
+                    <a:solidFill>
+                      <a:schemeClr val="accent2"/>
+                    </a:solidFill>
+                  </a:tcPr>
+                </a:tc>
+                <a:tc>
+                  <a:txBody>
+                    <a:bodyPr/>
+                    <a:lstStyle/>
+                    <a:p>
+                      <a:r>
+                        <a:rPr lang="en-US" b="1"/>
+                        <a:t>Form</a:t>
+                      </a:r>
+                    </a:p>
+                  </a:txBody>
+                  <a:tcPr anchor="ctr">
+                    <a:lnL w="12700" cap="flat" cmpd="sng" algn="ctr">
+                      <a:solidFill>
+                        <a:schemeClr val="tx1"/>
+                      </a:solidFill>
+                      <a:prstDash val="solid"/>
+                      <a:round/>
+                      <a:headEnd type="none" w="med" len="med"/>
+                      <a:tailEnd type="none" w="med" len="med"/>
+                    </a:lnL>
+                    <a:lnR w="12700" cap="flat" cmpd="sng" algn="ctr">
+                      <a:solidFill>
+                        <a:schemeClr val="tx1"/>
+                      </a:solidFill>
+                      <a:prstDash val="solid"/>
+                      <a:round/>
+                      <a:headEnd type="none" w="med" len="med"/>
+                      <a:tailEnd type="none" w="med" len="med"/>
+                    </a:lnR>
+                    <a:lnT w="12700" cap="flat" cmpd="sng" algn="ctr">
+                      <a:solidFill>
+                        <a:schemeClr val="tx1"/>
+                      </a:solidFill>
+                      <a:prstDash val="solid"/>
+                      <a:round/>
+                      <a:headEnd type="none" w="med" len="med"/>
+                      <a:tailEnd type="none" w="med" len="med"/>
+                    </a:lnT>
+                    <a:lnB w="12700" cap="flat" cmpd="sng" algn="ctr">
+                      <a:solidFill>
+                        <a:schemeClr val="tx1"/>
+                      </a:solidFill>
+                      <a:prstDash val="solid"/>
+                      <a:round/>
+                      <a:headEnd type="none" w="med" len="med"/>
+                      <a:tailEnd type="none" w="med" len="med"/>
+                    </a:lnB>
+                    <a:solidFill>
+                      <a:schemeClr val="accent2"/>
+                    </a:solidFill>
+                  </a:tcPr>
+                </a:tc>
+                <a:tc>
+                  <a:txBody>
+                    <a:bodyPr/>
+                    <a:lstStyle/>
+                    <a:p>
+                      <a:r>
+                        <a:rPr lang="en-US" b="1"/>
+                        <a:t>Düzgün?</a:t>
+                      </a:r>
+                    </a:p>
+                  </a:txBody>
+                  <a:tcPr anchor="ctr">
+                    <a:lnL w="12700" cap="flat" cmpd="sng" algn="ctr">
+                      <a:solidFill>
+                        <a:schemeClr val="tx1"/>
+                      </a:solidFill>
+                      <a:prstDash val="solid"/>
+                      <a:round/>
+                      <a:headEnd type="none" w="med" len="med"/>
+                      <a:tailEnd type="none" w="med" len="med"/>
+                    </a:lnL>
+                    <a:lnR w="12700" cap="flat" cmpd="sng" algn="ctr">
+                      <a:solidFill>
+                        <a:schemeClr val="tx1"/>
+                      </a:solidFill>
+                      <a:prstDash val="solid"/>
+                      <a:round/>
+                      <a:headEnd type="none" w="med" len="med"/>
+                      <a:tailEnd type="none" w="med" len="med"/>
+                    </a:lnR>
+                    <a:lnT w="12700" cap="flat" cmpd="sng" algn="ctr">
+                      <a:solidFill>
+                        <a:schemeClr val="tx1"/>
+                      </a:solidFill>
+                      <a:prstDash val="solid"/>
+                      <a:round/>
+                      <a:headEnd type="none" w="med" len="med"/>
+                      <a:tailEnd type="none" w="med" len="med"/>
+                    </a:lnT>
+                    <a:lnB w="12700" cap="flat" cmpd="sng" algn="ctr">
+                      <a:solidFill>
+                        <a:schemeClr val="tx1"/>
+                      </a:solidFill>
+                      <a:prstDash val="solid"/>
+                      <a:round/>
+                      <a:headEnd type="none" w="med" len="med"/>
+                      <a:tailEnd type="none" w="med" len="med"/>
+                    </a:lnB>
+                    <a:solidFill>
+                      <a:schemeClr val="accent2"/>
+                    </a:solidFill>
+                  </a:tcPr>
+                </a:tc>
+                <a:tc>
+                  <a:txBody>
+                    <a:bodyPr/>
+                    <a:lstStyle/>
+                    <a:p>
+                      <a:r>
+                        <a:rPr lang="en-US" b="1"/>
+                        <a:t>İzah</a:t>
+                      </a:r>
+                    </a:p>
+                  </a:txBody>
+                  <a:tcPr anchor="ctr">
+                    <a:lnL w="12700" cap="flat" cmpd="sng" algn="ctr">
+                      <a:solidFill>
+                        <a:schemeClr val="tx1"/>
+                      </a:solidFill>
+                      <a:prstDash val="solid"/>
+                      <a:round/>
+                      <a:headEnd type="none" w="med" len="med"/>
+                      <a:tailEnd type="none" w="med" len="med"/>
+                    </a:lnL>
+                    <a:lnR w="12700" cap="flat" cmpd="sng" algn="ctr">
+                      <a:solidFill>
+                        <a:schemeClr val="tx1"/>
+                      </a:solidFill>
+                      <a:prstDash val="solid"/>
+                      <a:round/>
+                      <a:headEnd type="none" w="med" len="med"/>
+                      <a:tailEnd type="none" w="med" len="med"/>
+                    </a:lnR>
+                    <a:lnT w="12700" cap="flat" cmpd="sng" algn="ctr">
+                      <a:solidFill>
+                        <a:schemeClr val="tx1"/>
+                      </a:solidFill>
+                      <a:prstDash val="solid"/>
+                      <a:round/>
+                      <a:headEnd type="none" w="med" len="med"/>
+                      <a:tailEnd type="none" w="med" len="med"/>
+                    </a:lnT>
+                    <a:lnB w="12700" cap="flat" cmpd="sng" algn="ctr">
+                      <a:solidFill>
+                        <a:schemeClr val="tx1"/>
+                      </a:solidFill>
+                      <a:prstDash val="solid"/>
+                      <a:round/>
+                      <a:headEnd type="none" w="med" len="med"/>
+                      <a:tailEnd type="none" w="med" len="med"/>
+                    </a:lnB>
+                    <a:solidFill>
+                      <a:schemeClr val="accent2"/>
+                    </a:solidFill>
+                  </a:tcPr>
+                </a:tc>
+                <a:extLst>
+                  <a:ext uri="{0D108BD9-81ED-4DB2-BD59-A6C34878D82A}">
+                    <a16:rowId xmlns:a16="http://schemas.microsoft.com/office/drawing/2014/main" val="1459413977"/>
+                  </a:ext>
+                </a:extLst>
+              </a:tr>
+              <a:tr h="886950">
+                <a:tc>
+                  <a:txBody>
+                    <a:bodyPr/>
+                    <a:lstStyle/>
+                    <a:p>
+                      <a:r>
+                        <a:rPr lang="en-US"/>
+                        <a:t>1</a:t>
+                      </a:r>
+                    </a:p>
+                  </a:txBody>
+                  <a:tcPr anchor="ctr">
+                    <a:lnL w="12700" cap="flat" cmpd="sng" algn="ctr">
+                      <a:solidFill>
+                        <a:schemeClr val="tx1"/>
+                      </a:solidFill>
+                      <a:prstDash val="solid"/>
+                      <a:round/>
+                      <a:headEnd type="none" w="med" len="med"/>
+                      <a:tailEnd type="none" w="med" len="med"/>
+                    </a:lnL>
+                    <a:lnR w="12700" cap="flat" cmpd="sng" algn="ctr">
+                      <a:solidFill>
+                        <a:schemeClr val="tx1"/>
+                      </a:solidFill>
+                      <a:prstDash val="solid"/>
+                      <a:round/>
+                      <a:headEnd type="none" w="med" len="med"/>
+                      <a:tailEnd type="none" w="med" len="med"/>
+                    </a:lnR>
+                    <a:lnT w="12700" cap="flat" cmpd="sng" algn="ctr">
+                      <a:solidFill>
+                        <a:schemeClr val="tx1"/>
+                      </a:solidFill>
+                      <a:prstDash val="solid"/>
+                      <a:round/>
+                      <a:headEnd type="none" w="med" len="med"/>
+                      <a:tailEnd type="none" w="med" len="med"/>
+                    </a:lnT>
+                    <a:lnB w="12700" cap="flat" cmpd="sng" algn="ctr">
+                      <a:solidFill>
+                        <a:schemeClr val="tx1"/>
+                      </a:solidFill>
+                      <a:prstDash val="solid"/>
+                      <a:round/>
+                      <a:headEnd type="none" w="med" len="med"/>
+                      <a:tailEnd type="none" w="med" len="med"/>
+                    </a:lnB>
+                    <a:noFill/>
+                  </a:tcPr>
+                </a:tc>
+                <a:tc>
+                  <a:txBody>
+                    <a:bodyPr/>
+                    <a:lstStyle/>
+                    <a:p>
+                      <a:r>
+                        <a:rPr lang="en-US"/>
+                        <a:t>method="PUT"</a:t>
+                      </a:r>
+                    </a:p>
+                  </a:txBody>
+                  <a:tcPr anchor="ctr">
+                    <a:lnL w="12700" cap="flat" cmpd="sng" algn="ctr">
+                      <a:solidFill>
+                        <a:schemeClr val="tx1"/>
+                      </a:solidFill>
+                      <a:prstDash val="solid"/>
+                      <a:round/>
+                      <a:headEnd type="none" w="med" len="med"/>
+                      <a:tailEnd type="none" w="med" len="med"/>
+                    </a:lnL>
+                    <a:lnR w="12700" cap="flat" cmpd="sng" algn="ctr">
+                      <a:solidFill>
+                        <a:schemeClr val="tx1"/>
+                      </a:solidFill>
+                      <a:prstDash val="solid"/>
+                      <a:round/>
+                      <a:headEnd type="none" w="med" len="med"/>
+                      <a:tailEnd type="none" w="med" len="med"/>
+                    </a:lnR>
+                    <a:lnT w="12700" cap="flat" cmpd="sng" algn="ctr">
+                      <a:solidFill>
+                        <a:schemeClr val="tx1"/>
+                      </a:solidFill>
+                      <a:prstDash val="solid"/>
+                      <a:round/>
+                      <a:headEnd type="none" w="med" len="med"/>
+                      <a:tailEnd type="none" w="med" len="med"/>
+                    </a:lnT>
+                    <a:lnB w="12700" cap="flat" cmpd="sng" algn="ctr">
+                      <a:solidFill>
+                        <a:schemeClr val="tx1"/>
+                      </a:solidFill>
+                      <a:prstDash val="solid"/>
+                      <a:round/>
+                      <a:headEnd type="none" w="med" len="med"/>
+                      <a:tailEnd type="none" w="med" len="med"/>
+                    </a:lnB>
+                    <a:noFill/>
+                  </a:tcPr>
+                </a:tc>
+                <a:tc>
+                  <a:txBody>
+                    <a:bodyPr/>
+                    <a:lstStyle/>
+                    <a:p>
+                      <a:r>
+                        <a:rPr lang="en-US"/>
+                        <a:t>❌ Yanlışdır</a:t>
+                      </a:r>
+                    </a:p>
+                  </a:txBody>
+                  <a:tcPr anchor="ctr">
+                    <a:lnL w="12700" cap="flat" cmpd="sng" algn="ctr">
+                      <a:solidFill>
+                        <a:schemeClr val="tx1"/>
+                      </a:solidFill>
+                      <a:prstDash val="solid"/>
+                      <a:round/>
+                      <a:headEnd type="none" w="med" len="med"/>
+                      <a:tailEnd type="none" w="med" len="med"/>
+                    </a:lnL>
+                    <a:lnR w="12700" cap="flat" cmpd="sng" algn="ctr">
+                      <a:solidFill>
+                        <a:schemeClr val="tx1"/>
+                      </a:solidFill>
+                      <a:prstDash val="solid"/>
+                      <a:round/>
+                      <a:headEnd type="none" w="med" len="med"/>
+                      <a:tailEnd type="none" w="med" len="med"/>
+                    </a:lnR>
+                    <a:lnT w="12700" cap="flat" cmpd="sng" algn="ctr">
+                      <a:solidFill>
+                        <a:schemeClr val="tx1"/>
+                      </a:solidFill>
+                      <a:prstDash val="solid"/>
+                      <a:round/>
+                      <a:headEnd type="none" w="med" len="med"/>
+                      <a:tailEnd type="none" w="med" len="med"/>
+                    </a:lnT>
+                    <a:lnB w="12700" cap="flat" cmpd="sng" algn="ctr">
+                      <a:solidFill>
+                        <a:schemeClr val="tx1"/>
+                      </a:solidFill>
+                      <a:prstDash val="solid"/>
+                      <a:round/>
+                      <a:headEnd type="none" w="med" len="med"/>
+                      <a:tailEnd type="none" w="med" len="med"/>
+                    </a:lnB>
+                    <a:noFill/>
+                  </a:tcPr>
+                </a:tc>
+                <a:tc>
+                  <a:txBody>
+                    <a:bodyPr/>
+                    <a:lstStyle/>
+                    <a:p>
+                      <a:r>
+                        <a:rPr lang="en-US"/>
+                        <a:t>HTML PUT dəstəkləmir. Laravel bu request-i qəbul edə bilməz.</a:t>
+                      </a:r>
+                    </a:p>
+                  </a:txBody>
+                  <a:tcPr anchor="ctr">
+                    <a:lnL w="12700" cap="flat" cmpd="sng" algn="ctr">
+                      <a:solidFill>
+                        <a:schemeClr val="tx1"/>
+                      </a:solidFill>
+                      <a:prstDash val="solid"/>
+                      <a:round/>
+                      <a:headEnd type="none" w="med" len="med"/>
+                      <a:tailEnd type="none" w="med" len="med"/>
+                    </a:lnL>
+                    <a:lnR w="12700" cap="flat" cmpd="sng" algn="ctr">
+                      <a:solidFill>
+                        <a:schemeClr val="tx1"/>
+                      </a:solidFill>
+                      <a:prstDash val="solid"/>
+                      <a:round/>
+                      <a:headEnd type="none" w="med" len="med"/>
+                      <a:tailEnd type="none" w="med" len="med"/>
+                    </a:lnR>
+                    <a:lnT w="12700" cap="flat" cmpd="sng" algn="ctr">
+                      <a:solidFill>
+                        <a:schemeClr val="tx1"/>
+                      </a:solidFill>
+                      <a:prstDash val="solid"/>
+                      <a:round/>
+                      <a:headEnd type="none" w="med" len="med"/>
+                      <a:tailEnd type="none" w="med" len="med"/>
+                    </a:lnT>
+                    <a:lnB w="12700" cap="flat" cmpd="sng" algn="ctr">
+                      <a:solidFill>
+                        <a:schemeClr val="tx1"/>
+                      </a:solidFill>
+                      <a:prstDash val="solid"/>
+                      <a:round/>
+                      <a:headEnd type="none" w="med" len="med"/>
+                      <a:tailEnd type="none" w="med" len="med"/>
+                    </a:lnB>
+                    <a:noFill/>
+                  </a:tcPr>
+                </a:tc>
+                <a:extLst>
+                  <a:ext uri="{0D108BD9-81ED-4DB2-BD59-A6C34878D82A}">
+                    <a16:rowId xmlns:a16="http://schemas.microsoft.com/office/drawing/2014/main" val="1422294891"/>
+                  </a:ext>
+                </a:extLst>
+              </a:tr>
+              <a:tr h="886950">
+                <a:tc>
+                  <a:txBody>
+                    <a:bodyPr/>
+                    <a:lstStyle/>
+                    <a:p>
+                      <a:r>
+                        <a:rPr lang="en-US"/>
+                        <a:t>2</a:t>
+                      </a:r>
+                    </a:p>
+                  </a:txBody>
+                  <a:tcPr anchor="ctr">
+                    <a:lnL w="12700" cap="flat" cmpd="sng" algn="ctr">
+                      <a:solidFill>
+                        <a:schemeClr val="tx1"/>
+                      </a:solidFill>
+                      <a:prstDash val="solid"/>
+                      <a:round/>
+                      <a:headEnd type="none" w="med" len="med"/>
+                      <a:tailEnd type="none" w="med" len="med"/>
+                    </a:lnL>
+                    <a:lnR w="12700" cap="flat" cmpd="sng" algn="ctr">
+                      <a:solidFill>
+                        <a:schemeClr val="tx1"/>
+                      </a:solidFill>
+                      <a:prstDash val="solid"/>
+                      <a:round/>
+                      <a:headEnd type="none" w="med" len="med"/>
+                      <a:tailEnd type="none" w="med" len="med"/>
+                    </a:lnR>
+                    <a:lnT w="12700" cap="flat" cmpd="sng" algn="ctr">
+                      <a:solidFill>
+                        <a:schemeClr val="tx1"/>
+                      </a:solidFill>
+                      <a:prstDash val="solid"/>
+                      <a:round/>
+                      <a:headEnd type="none" w="med" len="med"/>
+                      <a:tailEnd type="none" w="med" len="med"/>
+                    </a:lnT>
+                    <a:lnB w="12700" cap="flat" cmpd="sng" algn="ctr">
+                      <a:solidFill>
+                        <a:schemeClr val="tx1"/>
+                      </a:solidFill>
+                      <a:prstDash val="solid"/>
+                      <a:round/>
+                      <a:headEnd type="none" w="med" len="med"/>
+                      <a:tailEnd type="none" w="med" len="med"/>
+                    </a:lnB>
+                    <a:noFill/>
+                  </a:tcPr>
+                </a:tc>
+                <a:tc>
+                  <a:txBody>
+                    <a:bodyPr/>
+                    <a:lstStyle/>
+                    <a:p>
+                      <a:r>
+                        <a:rPr lang="en-US"/>
+                        <a:t>method="POST" + @method('PUT')</a:t>
+                      </a:r>
+                    </a:p>
+                  </a:txBody>
+                  <a:tcPr anchor="ctr">
+                    <a:lnL w="12700" cap="flat" cmpd="sng" algn="ctr">
+                      <a:solidFill>
+                        <a:schemeClr val="tx1"/>
+                      </a:solidFill>
+                      <a:prstDash val="solid"/>
+                      <a:round/>
+                      <a:headEnd type="none" w="med" len="med"/>
+                      <a:tailEnd type="none" w="med" len="med"/>
+                    </a:lnL>
+                    <a:lnR w="12700" cap="flat" cmpd="sng" algn="ctr">
+                      <a:solidFill>
+                        <a:schemeClr val="tx1"/>
+                      </a:solidFill>
+                      <a:prstDash val="solid"/>
+                      <a:round/>
+                      <a:headEnd type="none" w="med" len="med"/>
+                      <a:tailEnd type="none" w="med" len="med"/>
+                    </a:lnR>
+                    <a:lnT w="12700" cap="flat" cmpd="sng" algn="ctr">
+                      <a:solidFill>
+                        <a:schemeClr val="tx1"/>
+                      </a:solidFill>
+                      <a:prstDash val="solid"/>
+                      <a:round/>
+                      <a:headEnd type="none" w="med" len="med"/>
+                      <a:tailEnd type="none" w="med" len="med"/>
+                    </a:lnT>
+                    <a:lnB w="12700" cap="flat" cmpd="sng" algn="ctr">
+                      <a:solidFill>
+                        <a:schemeClr val="tx1"/>
+                      </a:solidFill>
+                      <a:prstDash val="solid"/>
+                      <a:round/>
+                      <a:headEnd type="none" w="med" len="med"/>
+                      <a:tailEnd type="none" w="med" len="med"/>
+                    </a:lnB>
+                    <a:noFill/>
+                  </a:tcPr>
+                </a:tc>
+                <a:tc>
+                  <a:txBody>
+                    <a:bodyPr/>
+                    <a:lstStyle/>
+                    <a:p>
+                      <a:r>
+                        <a:rPr lang="en-US"/>
+                        <a:t>✅ Doğrudur</a:t>
+                      </a:r>
+                    </a:p>
+                  </a:txBody>
+                  <a:tcPr anchor="ctr">
+                    <a:lnL w="12700" cap="flat" cmpd="sng" algn="ctr">
+                      <a:solidFill>
+                        <a:schemeClr val="tx1"/>
+                      </a:solidFill>
+                      <a:prstDash val="solid"/>
+                      <a:round/>
+                      <a:headEnd type="none" w="med" len="med"/>
+                      <a:tailEnd type="none" w="med" len="med"/>
+                    </a:lnL>
+                    <a:lnR w="12700" cap="flat" cmpd="sng" algn="ctr">
+                      <a:solidFill>
+                        <a:schemeClr val="tx1"/>
+                      </a:solidFill>
+                      <a:prstDash val="solid"/>
+                      <a:round/>
+                      <a:headEnd type="none" w="med" len="med"/>
+                      <a:tailEnd type="none" w="med" len="med"/>
+                    </a:lnR>
+                    <a:lnT w="12700" cap="flat" cmpd="sng" algn="ctr">
+                      <a:solidFill>
+                        <a:schemeClr val="tx1"/>
+                      </a:solidFill>
+                      <a:prstDash val="solid"/>
+                      <a:round/>
+                      <a:headEnd type="none" w="med" len="med"/>
+                      <a:tailEnd type="none" w="med" len="med"/>
+                    </a:lnT>
+                    <a:lnB w="12700" cap="flat" cmpd="sng" algn="ctr">
+                      <a:solidFill>
+                        <a:schemeClr val="tx1"/>
+                      </a:solidFill>
+                      <a:prstDash val="solid"/>
+                      <a:round/>
+                      <a:headEnd type="none" w="med" len="med"/>
+                      <a:tailEnd type="none" w="med" len="med"/>
+                    </a:lnB>
+                    <a:noFill/>
+                  </a:tcPr>
+                </a:tc>
+                <a:tc>
+                  <a:txBody>
+                    <a:bodyPr/>
+                    <a:lstStyle/>
+                    <a:p>
+                      <a:r>
+                        <a:rPr lang="en-US"/>
+                        <a:t>HTML uyğundur və Laravel üçün PUT request kimi işləyir.</a:t>
+                      </a:r>
+                    </a:p>
+                  </a:txBody>
+                  <a:tcPr anchor="ctr">
+                    <a:lnL w="12700" cap="flat" cmpd="sng" algn="ctr">
+                      <a:solidFill>
+                        <a:schemeClr val="tx1"/>
+                      </a:solidFill>
+                      <a:prstDash val="solid"/>
+                      <a:round/>
+                      <a:headEnd type="none" w="med" len="med"/>
+                      <a:tailEnd type="none" w="med" len="med"/>
+                    </a:lnL>
+                    <a:lnR w="12700" cap="flat" cmpd="sng" algn="ctr">
+                      <a:solidFill>
+                        <a:schemeClr val="tx1"/>
+                      </a:solidFill>
+                      <a:prstDash val="solid"/>
+                      <a:round/>
+                      <a:headEnd type="none" w="med" len="med"/>
+                      <a:tailEnd type="none" w="med" len="med"/>
+                    </a:lnR>
+                    <a:lnT w="12700" cap="flat" cmpd="sng" algn="ctr">
+                      <a:solidFill>
+                        <a:schemeClr val="tx1"/>
+                      </a:solidFill>
+                      <a:prstDash val="solid"/>
+                      <a:round/>
+                      <a:headEnd type="none" w="med" len="med"/>
+                      <a:tailEnd type="none" w="med" len="med"/>
+                    </a:lnT>
+                    <a:lnB w="12700" cap="flat" cmpd="sng" algn="ctr">
+                      <a:solidFill>
+                        <a:schemeClr val="tx1"/>
+                      </a:solidFill>
+                      <a:prstDash val="solid"/>
+                      <a:round/>
+                      <a:headEnd type="none" w="med" len="med"/>
+                      <a:tailEnd type="none" w="med" len="med"/>
+                    </a:lnB>
+                    <a:noFill/>
+                  </a:tcPr>
+                </a:tc>
+                <a:extLst>
+                  <a:ext uri="{0D108BD9-81ED-4DB2-BD59-A6C34878D82A}">
+                    <a16:rowId xmlns:a16="http://schemas.microsoft.com/office/drawing/2014/main" val="3110505721"/>
+                  </a:ext>
+                </a:extLst>
+              </a:tr>
+            </a:tbl>
+          </a:graphicData>
+        </a:graphic>
+      </p:graphicFrame>
     </p:spTree>
     <p:extLst>
       <p:ext uri="{BB962C8B-B14F-4D97-AF65-F5344CB8AC3E}">
         <p14:creationId xmlns:p14="http://schemas.microsoft.com/office/powerpoint/2010/main" val="3095838342"/>
+      </p:ext>
+    </p:extLst>
+  </p:cSld>
+  <p:clrMapOvr>
+    <a:masterClrMapping/>
+  </p:clrMapOvr>
+</p:sld>
+</file>
+
+<file path=ppt/slides/slide5.xml><?xml version="1.0" encoding="utf-8"?>
+<p:sld xmlns:a="http://schemas.openxmlformats.org/drawingml/2006/main" xmlns:r="http://schemas.openxmlformats.org/officeDocument/2006/relationships" xmlns:p="http://schemas.openxmlformats.org/presentationml/2006/main">
+  <p:cSld>
+    <p:spTree>
+      <p:nvGrpSpPr>
+        <p:cNvPr id="1" name="">
+          <a:extLst>
+            <a:ext uri="{FF2B5EF4-FFF2-40B4-BE49-F238E27FC236}">
+              <a16:creationId xmlns:a16="http://schemas.microsoft.com/office/drawing/2014/main" id="{24C357AC-3FE1-D8A4-A91B-83279316AEA0}"/>
+            </a:ext>
+          </a:extLst>
+        </p:cNvPr>
+        <p:cNvGrpSpPr/>
+        <p:nvPr/>
+      </p:nvGrpSpPr>
+      <p:grpSpPr>
+        <a:xfrm>
+          <a:off x="0" y="0"/>
+          <a:ext cx="0" cy="0"/>
+          <a:chOff x="0" y="0"/>
+          <a:chExt cx="0" cy="0"/>
+        </a:xfrm>
+      </p:grpSpPr>
+      <p:sp>
+        <p:nvSpPr>
+          <p:cNvPr id="3" name="TextBox 2">
+            <a:extLst>
+              <a:ext uri="{FF2B5EF4-FFF2-40B4-BE49-F238E27FC236}">
+                <a16:creationId xmlns:a16="http://schemas.microsoft.com/office/drawing/2014/main" id="{A47C1E44-FEF6-CF29-1013-2FA6448CD8A7}"/>
+              </a:ext>
+            </a:extLst>
+          </p:cNvPr>
+          <p:cNvSpPr txBox="1"/>
+          <p:nvPr/>
+        </p:nvSpPr>
+        <p:spPr>
+          <a:xfrm>
+            <a:off x="217714" y="255046"/>
+            <a:ext cx="11756571" cy="955518"/>
+          </a:xfrm>
+          <a:prstGeom prst="rect">
+            <a:avLst/>
+          </a:prstGeom>
+          <a:noFill/>
+        </p:spPr>
+        <p:txBody>
+          <a:bodyPr wrap="square">
+            <a:spAutoFit/>
+          </a:bodyPr>
+          <a:lstStyle/>
+          <a:p>
+            <a:pPr>
+              <a:lnSpc>
+                <a:spcPct val="150000"/>
+              </a:lnSpc>
+              <a:buNone/>
+            </a:pPr>
+            <a:r>
+              <a:rPr kumimoji="0" lang="en-US" altLang="en-US" sz="1300" b="0" i="0" u="none" strike="noStrike" cap="none" normalizeH="0" baseline="0">
+                <a:ln>
+                  <a:noFill/>
+                </a:ln>
+                <a:solidFill>
+                  <a:schemeClr val="tx1"/>
+                </a:solidFill>
+                <a:effectLst/>
+                <a:latin typeface="Arial" panose="020B0604020202020204" pitchFamily="34" charset="0"/>
+              </a:rPr>
+              <a:t>3) </a:t>
+            </a:r>
+            <a:r>
+              <a:rPr kumimoji="0" lang="en-US" altLang="en-US" sz="1300" b="1" i="0" u="none" strike="noStrike" cap="none" normalizeH="0" baseline="0">
+                <a:ln>
+                  <a:noFill/>
+                </a:ln>
+                <a:solidFill>
+                  <a:schemeClr val="tx1"/>
+                </a:solidFill>
+                <a:effectLst/>
+                <a:latin typeface="Arial" panose="020B0604020202020204" pitchFamily="34" charset="0"/>
+              </a:rPr>
+              <a:t>PUT</a:t>
+            </a:r>
+            <a:r>
+              <a:rPr kumimoji="0" lang="en-US" altLang="en-US" sz="1300" b="0" i="0" u="none" strike="noStrike" cap="none" normalizeH="0" baseline="0">
+                <a:ln>
+                  <a:noFill/>
+                </a:ln>
+                <a:solidFill>
+                  <a:schemeClr val="tx1"/>
+                </a:solidFill>
+                <a:effectLst/>
+                <a:latin typeface="Arial" panose="020B0604020202020204" pitchFamily="34" charset="0"/>
+              </a:rPr>
+              <a:t> və </a:t>
+            </a:r>
+            <a:r>
+              <a:rPr kumimoji="0" lang="en-US" altLang="en-US" sz="1300" b="1" i="0" u="none" strike="noStrike" cap="none" normalizeH="0" baseline="0">
+                <a:ln>
+                  <a:noFill/>
+                </a:ln>
+                <a:solidFill>
+                  <a:schemeClr val="tx1"/>
+                </a:solidFill>
+                <a:effectLst/>
+                <a:latin typeface="Arial" panose="020B0604020202020204" pitchFamily="34" charset="0"/>
+              </a:rPr>
+              <a:t>PATCH</a:t>
+            </a:r>
+            <a:r>
+              <a:rPr kumimoji="0" lang="en-US" altLang="en-US" sz="1300" b="0" i="0" u="none" strike="noStrike" cap="none" normalizeH="0" baseline="0">
+                <a:ln>
+                  <a:noFill/>
+                </a:ln>
+                <a:solidFill>
+                  <a:schemeClr val="tx1"/>
+                </a:solidFill>
+                <a:effectLst/>
+                <a:latin typeface="Arial" panose="020B0604020202020204" pitchFamily="34" charset="0"/>
+              </a:rPr>
+              <a:t> arasındakı fərq nədir?</a:t>
+            </a:r>
+          </a:p>
+          <a:p>
+            <a:pPr>
+              <a:lnSpc>
+                <a:spcPct val="150000"/>
+              </a:lnSpc>
+              <a:buNone/>
+            </a:pPr>
+            <a:endParaRPr lang="en-US" altLang="en-US" sz="1300">
+              <a:latin typeface="Arial" panose="020B0604020202020204" pitchFamily="34" charset="0"/>
+            </a:endParaRPr>
+          </a:p>
+          <a:p>
+            <a:pPr>
+              <a:lnSpc>
+                <a:spcPct val="150000"/>
+              </a:lnSpc>
+              <a:buNone/>
+            </a:pPr>
+            <a:r>
+              <a:rPr kumimoji="0" lang="en-US" altLang="en-US" sz="1300" b="0" i="0" u="none" strike="noStrike" cap="none" normalizeH="0" baseline="0">
+                <a:ln>
+                  <a:noFill/>
+                </a:ln>
+                <a:solidFill>
+                  <a:schemeClr val="tx1"/>
+                </a:solidFill>
+                <a:effectLst/>
+                <a:latin typeface="Arial" panose="020B0604020202020204" pitchFamily="34" charset="0"/>
+              </a:rPr>
+              <a:t>Laravel və ümumiyyətlə </a:t>
+            </a:r>
+            <a:r>
+              <a:rPr kumimoji="0" lang="en-US" altLang="en-US" sz="1300" b="1" i="0" u="none" strike="noStrike" cap="none" normalizeH="0" baseline="0">
+                <a:ln>
+                  <a:noFill/>
+                </a:ln>
+                <a:solidFill>
+                  <a:schemeClr val="tx1"/>
+                </a:solidFill>
+                <a:effectLst/>
+                <a:latin typeface="Arial" panose="020B0604020202020204" pitchFamily="34" charset="0"/>
+              </a:rPr>
+              <a:t>RESTful API </a:t>
+            </a:r>
+            <a:r>
+              <a:rPr kumimoji="0" lang="en-US" altLang="en-US" sz="1300" b="0" i="0" u="none" strike="noStrike" cap="none" normalizeH="0" baseline="0">
+                <a:ln>
+                  <a:noFill/>
+                </a:ln>
+                <a:solidFill>
+                  <a:schemeClr val="tx1"/>
+                </a:solidFill>
+                <a:effectLst/>
+                <a:latin typeface="Arial" panose="020B0604020202020204" pitchFamily="34" charset="0"/>
+              </a:rPr>
+              <a:t>dizaynı baxımından bu iki metodun fərqləri bunlardır:</a:t>
+            </a:r>
+          </a:p>
+        </p:txBody>
+      </p:sp>
+      <p:graphicFrame>
+        <p:nvGraphicFramePr>
+          <p:cNvPr id="2" name="Table 1">
+            <a:extLst>
+              <a:ext uri="{FF2B5EF4-FFF2-40B4-BE49-F238E27FC236}">
+                <a16:creationId xmlns:a16="http://schemas.microsoft.com/office/drawing/2014/main" id="{8840FD1A-2BC5-1F0E-16A8-5535B3901F94}"/>
+              </a:ext>
+            </a:extLst>
+          </p:cNvPr>
+          <p:cNvGraphicFramePr>
+            <a:graphicFrameLocks noGrp="1"/>
+          </p:cNvGraphicFramePr>
+          <p:nvPr>
+            <p:extLst>
+              <p:ext uri="{D42A27DB-BD31-4B8C-83A1-F6EECF244321}">
+                <p14:modId xmlns:p14="http://schemas.microsoft.com/office/powerpoint/2010/main" val="120245505"/>
+              </p:ext>
+            </p:extLst>
+          </p:nvPr>
+        </p:nvGraphicFramePr>
+        <p:xfrm>
+          <a:off x="217714" y="1585204"/>
+          <a:ext cx="11136086" cy="2232651"/>
+        </p:xfrm>
+        <a:graphic>
+          <a:graphicData uri="http://schemas.openxmlformats.org/drawingml/2006/table">
+            <a:tbl>
+              <a:tblPr/>
+              <a:tblGrid>
+                <a:gridCol w="876487">
+                  <a:extLst>
+                    <a:ext uri="{9D8B030D-6E8A-4147-A177-3AD203B41FA5}">
+                      <a16:colId xmlns:a16="http://schemas.microsoft.com/office/drawing/2014/main" val="1088881649"/>
+                    </a:ext>
+                  </a:extLst>
+                </a:gridCol>
+                <a:gridCol w="3998371">
+                  <a:extLst>
+                    <a:ext uri="{9D8B030D-6E8A-4147-A177-3AD203B41FA5}">
+                      <a16:colId xmlns:a16="http://schemas.microsoft.com/office/drawing/2014/main" val="2935960637"/>
+                    </a:ext>
+                  </a:extLst>
+                </a:gridCol>
+                <a:gridCol w="6261228">
+                  <a:extLst>
+                    <a:ext uri="{9D8B030D-6E8A-4147-A177-3AD203B41FA5}">
+                      <a16:colId xmlns:a16="http://schemas.microsoft.com/office/drawing/2014/main" val="4133180798"/>
+                    </a:ext>
+                  </a:extLst>
+                </a:gridCol>
+              </a:tblGrid>
+              <a:tr h="744217">
+                <a:tc>
+                  <a:txBody>
+                    <a:bodyPr/>
+                    <a:lstStyle/>
+                    <a:p>
+                      <a:r>
+                        <a:rPr lang="en-US" b="1"/>
+                        <a:t>Metod</a:t>
+                      </a:r>
+                    </a:p>
+                  </a:txBody>
+                  <a:tcPr anchor="ctr">
+                    <a:lnL w="12700" cap="flat" cmpd="sng" algn="ctr">
+                      <a:solidFill>
+                        <a:schemeClr val="tx1"/>
+                      </a:solidFill>
+                      <a:prstDash val="solid"/>
+                      <a:round/>
+                      <a:headEnd type="none" w="med" len="med"/>
+                      <a:tailEnd type="none" w="med" len="med"/>
+                    </a:lnL>
+                    <a:lnR w="12700" cap="flat" cmpd="sng" algn="ctr">
+                      <a:solidFill>
+                        <a:schemeClr val="tx1"/>
+                      </a:solidFill>
+                      <a:prstDash val="solid"/>
+                      <a:round/>
+                      <a:headEnd type="none" w="med" len="med"/>
+                      <a:tailEnd type="none" w="med" len="med"/>
+                    </a:lnR>
+                    <a:lnT w="12700" cap="flat" cmpd="sng" algn="ctr">
+                      <a:solidFill>
+                        <a:schemeClr val="tx1"/>
+                      </a:solidFill>
+                      <a:prstDash val="solid"/>
+                      <a:round/>
+                      <a:headEnd type="none" w="med" len="med"/>
+                      <a:tailEnd type="none" w="med" len="med"/>
+                    </a:lnT>
+                    <a:lnB w="12700" cap="flat" cmpd="sng" algn="ctr">
+                      <a:solidFill>
+                        <a:schemeClr val="tx1"/>
+                      </a:solidFill>
+                      <a:prstDash val="solid"/>
+                      <a:round/>
+                      <a:headEnd type="none" w="med" len="med"/>
+                      <a:tailEnd type="none" w="med" len="med"/>
+                    </a:lnB>
+                    <a:solidFill>
+                      <a:schemeClr val="accent2"/>
+                    </a:solidFill>
+                  </a:tcPr>
+                </a:tc>
+                <a:tc>
+                  <a:txBody>
+                    <a:bodyPr/>
+                    <a:lstStyle/>
+                    <a:p>
+                      <a:r>
+                        <a:rPr lang="en-US" b="1"/>
+                        <a:t>Nə iş görür?</a:t>
+                      </a:r>
+                    </a:p>
+                  </a:txBody>
+                  <a:tcPr anchor="ctr">
+                    <a:lnL w="12700" cap="flat" cmpd="sng" algn="ctr">
+                      <a:solidFill>
+                        <a:schemeClr val="tx1"/>
+                      </a:solidFill>
+                      <a:prstDash val="solid"/>
+                      <a:round/>
+                      <a:headEnd type="none" w="med" len="med"/>
+                      <a:tailEnd type="none" w="med" len="med"/>
+                    </a:lnL>
+                    <a:lnR w="12700" cap="flat" cmpd="sng" algn="ctr">
+                      <a:solidFill>
+                        <a:schemeClr val="tx1"/>
+                      </a:solidFill>
+                      <a:prstDash val="solid"/>
+                      <a:round/>
+                      <a:headEnd type="none" w="med" len="med"/>
+                      <a:tailEnd type="none" w="med" len="med"/>
+                    </a:lnR>
+                    <a:lnT w="12700" cap="flat" cmpd="sng" algn="ctr">
+                      <a:solidFill>
+                        <a:schemeClr val="tx1"/>
+                      </a:solidFill>
+                      <a:prstDash val="solid"/>
+                      <a:round/>
+                      <a:headEnd type="none" w="med" len="med"/>
+                      <a:tailEnd type="none" w="med" len="med"/>
+                    </a:lnT>
+                    <a:lnB w="12700" cap="flat" cmpd="sng" algn="ctr">
+                      <a:solidFill>
+                        <a:schemeClr val="tx1"/>
+                      </a:solidFill>
+                      <a:prstDash val="solid"/>
+                      <a:round/>
+                      <a:headEnd type="none" w="med" len="med"/>
+                      <a:tailEnd type="none" w="med" len="med"/>
+                    </a:lnB>
+                    <a:solidFill>
+                      <a:schemeClr val="accent2"/>
+                    </a:solidFill>
+                  </a:tcPr>
+                </a:tc>
+                <a:tc>
+                  <a:txBody>
+                    <a:bodyPr/>
+                    <a:lstStyle/>
+                    <a:p>
+                      <a:r>
+                        <a:rPr lang="en-US" b="1"/>
+                        <a:t>Əsas fərq</a:t>
+                      </a:r>
+                    </a:p>
+                  </a:txBody>
+                  <a:tcPr anchor="ctr">
+                    <a:lnL w="12700" cap="flat" cmpd="sng" algn="ctr">
+                      <a:solidFill>
+                        <a:schemeClr val="tx1"/>
+                      </a:solidFill>
+                      <a:prstDash val="solid"/>
+                      <a:round/>
+                      <a:headEnd type="none" w="med" len="med"/>
+                      <a:tailEnd type="none" w="med" len="med"/>
+                    </a:lnL>
+                    <a:lnR w="12700" cap="flat" cmpd="sng" algn="ctr">
+                      <a:solidFill>
+                        <a:schemeClr val="tx1"/>
+                      </a:solidFill>
+                      <a:prstDash val="solid"/>
+                      <a:round/>
+                      <a:headEnd type="none" w="med" len="med"/>
+                      <a:tailEnd type="none" w="med" len="med"/>
+                    </a:lnR>
+                    <a:lnT w="12700" cap="flat" cmpd="sng" algn="ctr">
+                      <a:solidFill>
+                        <a:schemeClr val="tx1"/>
+                      </a:solidFill>
+                      <a:prstDash val="solid"/>
+                      <a:round/>
+                      <a:headEnd type="none" w="med" len="med"/>
+                      <a:tailEnd type="none" w="med" len="med"/>
+                    </a:lnT>
+                    <a:lnB w="12700" cap="flat" cmpd="sng" algn="ctr">
+                      <a:solidFill>
+                        <a:schemeClr val="tx1"/>
+                      </a:solidFill>
+                      <a:prstDash val="solid"/>
+                      <a:round/>
+                      <a:headEnd type="none" w="med" len="med"/>
+                      <a:tailEnd type="none" w="med" len="med"/>
+                    </a:lnB>
+                    <a:solidFill>
+                      <a:schemeClr val="accent2"/>
+                    </a:solidFill>
+                  </a:tcPr>
+                </a:tc>
+                <a:extLst>
+                  <a:ext uri="{0D108BD9-81ED-4DB2-BD59-A6C34878D82A}">
+                    <a16:rowId xmlns:a16="http://schemas.microsoft.com/office/drawing/2014/main" val="2826261809"/>
+                  </a:ext>
+                </a:extLst>
+              </a:tr>
+              <a:tr h="744217">
+                <a:tc>
+                  <a:txBody>
+                    <a:bodyPr/>
+                    <a:lstStyle/>
+                    <a:p>
+                      <a:r>
+                        <a:rPr lang="en-US"/>
+                        <a:t>PUT</a:t>
+                      </a:r>
+                    </a:p>
+                  </a:txBody>
+                  <a:tcPr anchor="ctr">
+                    <a:lnL w="12700" cap="flat" cmpd="sng" algn="ctr">
+                      <a:solidFill>
+                        <a:schemeClr val="tx1"/>
+                      </a:solidFill>
+                      <a:prstDash val="solid"/>
+                      <a:round/>
+                      <a:headEnd type="none" w="med" len="med"/>
+                      <a:tailEnd type="none" w="med" len="med"/>
+                    </a:lnL>
+                    <a:lnR w="12700" cap="flat" cmpd="sng" algn="ctr">
+                      <a:solidFill>
+                        <a:schemeClr val="tx1"/>
+                      </a:solidFill>
+                      <a:prstDash val="solid"/>
+                      <a:round/>
+                      <a:headEnd type="none" w="med" len="med"/>
+                      <a:tailEnd type="none" w="med" len="med"/>
+                    </a:lnR>
+                    <a:lnT w="12700" cap="flat" cmpd="sng" algn="ctr">
+                      <a:solidFill>
+                        <a:schemeClr val="tx1"/>
+                      </a:solidFill>
+                      <a:prstDash val="solid"/>
+                      <a:round/>
+                      <a:headEnd type="none" w="med" len="med"/>
+                      <a:tailEnd type="none" w="med" len="med"/>
+                    </a:lnT>
+                    <a:lnB w="12700" cap="flat" cmpd="sng" algn="ctr">
+                      <a:solidFill>
+                        <a:schemeClr val="tx1"/>
+                      </a:solidFill>
+                      <a:prstDash val="solid"/>
+                      <a:round/>
+                      <a:headEnd type="none" w="med" len="med"/>
+                      <a:tailEnd type="none" w="med" len="med"/>
+                    </a:lnB>
+                    <a:noFill/>
+                  </a:tcPr>
+                </a:tc>
+                <a:tc>
+                  <a:txBody>
+                    <a:bodyPr/>
+                    <a:lstStyle/>
+                    <a:p>
+                      <a:r>
+                        <a:rPr lang="en-US"/>
+                        <a:t>Mövcud resursu </a:t>
+                      </a:r>
+                      <a:r>
+                        <a:rPr lang="en-US" b="1"/>
+                        <a:t>tamamilə əvəz edir</a:t>
+                      </a:r>
+                      <a:endParaRPr lang="en-US"/>
+                    </a:p>
+                  </a:txBody>
+                  <a:tcPr anchor="ctr">
+                    <a:lnL w="12700" cap="flat" cmpd="sng" algn="ctr">
+                      <a:solidFill>
+                        <a:schemeClr val="tx1"/>
+                      </a:solidFill>
+                      <a:prstDash val="solid"/>
+                      <a:round/>
+                      <a:headEnd type="none" w="med" len="med"/>
+                      <a:tailEnd type="none" w="med" len="med"/>
+                    </a:lnL>
+                    <a:lnR w="12700" cap="flat" cmpd="sng" algn="ctr">
+                      <a:solidFill>
+                        <a:schemeClr val="tx1"/>
+                      </a:solidFill>
+                      <a:prstDash val="solid"/>
+                      <a:round/>
+                      <a:headEnd type="none" w="med" len="med"/>
+                      <a:tailEnd type="none" w="med" len="med"/>
+                    </a:lnR>
+                    <a:lnT w="12700" cap="flat" cmpd="sng" algn="ctr">
+                      <a:solidFill>
+                        <a:schemeClr val="tx1"/>
+                      </a:solidFill>
+                      <a:prstDash val="solid"/>
+                      <a:round/>
+                      <a:headEnd type="none" w="med" len="med"/>
+                      <a:tailEnd type="none" w="med" len="med"/>
+                    </a:lnT>
+                    <a:lnB w="12700" cap="flat" cmpd="sng" algn="ctr">
+                      <a:solidFill>
+                        <a:schemeClr val="tx1"/>
+                      </a:solidFill>
+                      <a:prstDash val="solid"/>
+                      <a:round/>
+                      <a:headEnd type="none" w="med" len="med"/>
+                      <a:tailEnd type="none" w="med" len="med"/>
+                    </a:lnB>
+                    <a:noFill/>
+                  </a:tcPr>
+                </a:tc>
+                <a:tc>
+                  <a:txBody>
+                    <a:bodyPr/>
+                    <a:lstStyle/>
+                    <a:p>
+                      <a:r>
+                        <a:rPr lang="en-US"/>
+                        <a:t>Yəni </a:t>
+                      </a:r>
+                      <a:r>
+                        <a:rPr lang="en-US" b="1"/>
+                        <a:t>bütün sahələri</a:t>
+                      </a:r>
+                      <a:r>
+                        <a:rPr lang="en-US"/>
+                        <a:t> yeniləməlisən (və ya default qoyulacaq).</a:t>
+                      </a:r>
+                    </a:p>
+                  </a:txBody>
+                  <a:tcPr anchor="ctr">
+                    <a:lnL w="12700" cap="flat" cmpd="sng" algn="ctr">
+                      <a:solidFill>
+                        <a:schemeClr val="tx1"/>
+                      </a:solidFill>
+                      <a:prstDash val="solid"/>
+                      <a:round/>
+                      <a:headEnd type="none" w="med" len="med"/>
+                      <a:tailEnd type="none" w="med" len="med"/>
+                    </a:lnL>
+                    <a:lnR w="12700" cap="flat" cmpd="sng" algn="ctr">
+                      <a:solidFill>
+                        <a:schemeClr val="tx1"/>
+                      </a:solidFill>
+                      <a:prstDash val="solid"/>
+                      <a:round/>
+                      <a:headEnd type="none" w="med" len="med"/>
+                      <a:tailEnd type="none" w="med" len="med"/>
+                    </a:lnR>
+                    <a:lnT w="12700" cap="flat" cmpd="sng" algn="ctr">
+                      <a:solidFill>
+                        <a:schemeClr val="tx1"/>
+                      </a:solidFill>
+                      <a:prstDash val="solid"/>
+                      <a:round/>
+                      <a:headEnd type="none" w="med" len="med"/>
+                      <a:tailEnd type="none" w="med" len="med"/>
+                    </a:lnT>
+                    <a:lnB w="12700" cap="flat" cmpd="sng" algn="ctr">
+                      <a:solidFill>
+                        <a:schemeClr val="tx1"/>
+                      </a:solidFill>
+                      <a:prstDash val="solid"/>
+                      <a:round/>
+                      <a:headEnd type="none" w="med" len="med"/>
+                      <a:tailEnd type="none" w="med" len="med"/>
+                    </a:lnB>
+                    <a:noFill/>
+                  </a:tcPr>
+                </a:tc>
+                <a:extLst>
+                  <a:ext uri="{0D108BD9-81ED-4DB2-BD59-A6C34878D82A}">
+                    <a16:rowId xmlns:a16="http://schemas.microsoft.com/office/drawing/2014/main" val="3200253286"/>
+                  </a:ext>
+                </a:extLst>
+              </a:tr>
+              <a:tr h="744217">
+                <a:tc>
+                  <a:txBody>
+                    <a:bodyPr/>
+                    <a:lstStyle/>
+                    <a:p>
+                      <a:r>
+                        <a:rPr lang="en-US"/>
+                        <a:t>PATCH</a:t>
+                      </a:r>
+                    </a:p>
+                  </a:txBody>
+                  <a:tcPr anchor="ctr">
+                    <a:lnL w="12700" cap="flat" cmpd="sng" algn="ctr">
+                      <a:solidFill>
+                        <a:schemeClr val="tx1"/>
+                      </a:solidFill>
+                      <a:prstDash val="solid"/>
+                      <a:round/>
+                      <a:headEnd type="none" w="med" len="med"/>
+                      <a:tailEnd type="none" w="med" len="med"/>
+                    </a:lnL>
+                    <a:lnR w="12700" cap="flat" cmpd="sng" algn="ctr">
+                      <a:solidFill>
+                        <a:schemeClr val="tx1"/>
+                      </a:solidFill>
+                      <a:prstDash val="solid"/>
+                      <a:round/>
+                      <a:headEnd type="none" w="med" len="med"/>
+                      <a:tailEnd type="none" w="med" len="med"/>
+                    </a:lnR>
+                    <a:lnT w="12700" cap="flat" cmpd="sng" algn="ctr">
+                      <a:solidFill>
+                        <a:schemeClr val="tx1"/>
+                      </a:solidFill>
+                      <a:prstDash val="solid"/>
+                      <a:round/>
+                      <a:headEnd type="none" w="med" len="med"/>
+                      <a:tailEnd type="none" w="med" len="med"/>
+                    </a:lnT>
+                    <a:lnB w="12700" cap="flat" cmpd="sng" algn="ctr">
+                      <a:solidFill>
+                        <a:schemeClr val="tx1"/>
+                      </a:solidFill>
+                      <a:prstDash val="solid"/>
+                      <a:round/>
+                      <a:headEnd type="none" w="med" len="med"/>
+                      <a:tailEnd type="none" w="med" len="med"/>
+                    </a:lnB>
+                    <a:noFill/>
+                  </a:tcPr>
+                </a:tc>
+                <a:tc>
+                  <a:txBody>
+                    <a:bodyPr/>
+                    <a:lstStyle/>
+                    <a:p>
+                      <a:r>
+                        <a:rPr lang="en-US"/>
+                        <a:t>Mövcud resursu </a:t>
+                      </a:r>
+                      <a:r>
+                        <a:rPr lang="en-US" b="1"/>
+                        <a:t>qismən yeniləyir</a:t>
+                      </a:r>
+                      <a:endParaRPr lang="en-US"/>
+                    </a:p>
+                  </a:txBody>
+                  <a:tcPr anchor="ctr">
+                    <a:lnL w="12700" cap="flat" cmpd="sng" algn="ctr">
+                      <a:solidFill>
+                        <a:schemeClr val="tx1"/>
+                      </a:solidFill>
+                      <a:prstDash val="solid"/>
+                      <a:round/>
+                      <a:headEnd type="none" w="med" len="med"/>
+                      <a:tailEnd type="none" w="med" len="med"/>
+                    </a:lnL>
+                    <a:lnR w="12700" cap="flat" cmpd="sng" algn="ctr">
+                      <a:solidFill>
+                        <a:schemeClr val="tx1"/>
+                      </a:solidFill>
+                      <a:prstDash val="solid"/>
+                      <a:round/>
+                      <a:headEnd type="none" w="med" len="med"/>
+                      <a:tailEnd type="none" w="med" len="med"/>
+                    </a:lnR>
+                    <a:lnT w="12700" cap="flat" cmpd="sng" algn="ctr">
+                      <a:solidFill>
+                        <a:schemeClr val="tx1"/>
+                      </a:solidFill>
+                      <a:prstDash val="solid"/>
+                      <a:round/>
+                      <a:headEnd type="none" w="med" len="med"/>
+                      <a:tailEnd type="none" w="med" len="med"/>
+                    </a:lnT>
+                    <a:lnB w="12700" cap="flat" cmpd="sng" algn="ctr">
+                      <a:solidFill>
+                        <a:schemeClr val="tx1"/>
+                      </a:solidFill>
+                      <a:prstDash val="solid"/>
+                      <a:round/>
+                      <a:headEnd type="none" w="med" len="med"/>
+                      <a:tailEnd type="none" w="med" len="med"/>
+                    </a:lnB>
+                    <a:noFill/>
+                  </a:tcPr>
+                </a:tc>
+                <a:tc>
+                  <a:txBody>
+                    <a:bodyPr/>
+                    <a:lstStyle/>
+                    <a:p>
+                      <a:r>
+                        <a:rPr lang="en-US"/>
+                        <a:t>Yalnız </a:t>
+                      </a:r>
+                      <a:r>
+                        <a:rPr lang="en-US" b="1"/>
+                        <a:t>dəyişiklik olan sahələri</a:t>
+                      </a:r>
+                      <a:r>
+                        <a:rPr lang="en-US"/>
+                        <a:t> göndərmək kifayətdir.</a:t>
+                      </a:r>
+                    </a:p>
+                  </a:txBody>
+                  <a:tcPr anchor="ctr">
+                    <a:lnL w="12700" cap="flat" cmpd="sng" algn="ctr">
+                      <a:solidFill>
+                        <a:schemeClr val="tx1"/>
+                      </a:solidFill>
+                      <a:prstDash val="solid"/>
+                      <a:round/>
+                      <a:headEnd type="none" w="med" len="med"/>
+                      <a:tailEnd type="none" w="med" len="med"/>
+                    </a:lnL>
+                    <a:lnR w="12700" cap="flat" cmpd="sng" algn="ctr">
+                      <a:solidFill>
+                        <a:schemeClr val="tx1"/>
+                      </a:solidFill>
+                      <a:prstDash val="solid"/>
+                      <a:round/>
+                      <a:headEnd type="none" w="med" len="med"/>
+                      <a:tailEnd type="none" w="med" len="med"/>
+                    </a:lnR>
+                    <a:lnT w="12700" cap="flat" cmpd="sng" algn="ctr">
+                      <a:solidFill>
+                        <a:schemeClr val="tx1"/>
+                      </a:solidFill>
+                      <a:prstDash val="solid"/>
+                      <a:round/>
+                      <a:headEnd type="none" w="med" len="med"/>
+                      <a:tailEnd type="none" w="med" len="med"/>
+                    </a:lnT>
+                    <a:lnB w="12700" cap="flat" cmpd="sng" algn="ctr">
+                      <a:solidFill>
+                        <a:schemeClr val="tx1"/>
+                      </a:solidFill>
+                      <a:prstDash val="solid"/>
+                      <a:round/>
+                      <a:headEnd type="none" w="med" len="med"/>
+                      <a:tailEnd type="none" w="med" len="med"/>
+                    </a:lnB>
+                    <a:noFill/>
+                  </a:tcPr>
+                </a:tc>
+                <a:extLst>
+                  <a:ext uri="{0D108BD9-81ED-4DB2-BD59-A6C34878D82A}">
+                    <a16:rowId xmlns:a16="http://schemas.microsoft.com/office/drawing/2014/main" val="2771478459"/>
+                  </a:ext>
+                </a:extLst>
+              </a:tr>
+            </a:tbl>
+          </a:graphicData>
+        </a:graphic>
+      </p:graphicFrame>
+    </p:spTree>
+    <p:extLst>
+      <p:ext uri="{BB962C8B-B14F-4D97-AF65-F5344CB8AC3E}">
+        <p14:creationId xmlns:p14="http://schemas.microsoft.com/office/powerpoint/2010/main" val="2323525334"/>
+      </p:ext>
+    </p:extLst>
+  </p:cSld>
+  <p:clrMapOvr>
+    <a:masterClrMapping/>
+  </p:clrMapOvr>
+</p:sld>
+</file>
+
+<file path=ppt/slides/slide6.xml><?xml version="1.0" encoding="utf-8"?>
+<p:sld xmlns:a="http://schemas.openxmlformats.org/drawingml/2006/main" xmlns:r="http://schemas.openxmlformats.org/officeDocument/2006/relationships" xmlns:p="http://schemas.openxmlformats.org/presentationml/2006/main">
+  <p:cSld>
+    <p:spTree>
+      <p:nvGrpSpPr>
+        <p:cNvPr id="1" name="">
+          <a:extLst>
+            <a:ext uri="{FF2B5EF4-FFF2-40B4-BE49-F238E27FC236}">
+              <a16:creationId xmlns:a16="http://schemas.microsoft.com/office/drawing/2014/main" id="{8A22F7AD-F58F-B72E-A718-D86E20BFDB87}"/>
+            </a:ext>
+          </a:extLst>
+        </p:cNvPr>
+        <p:cNvGrpSpPr/>
+        <p:nvPr/>
+      </p:nvGrpSpPr>
+      <p:grpSpPr>
+        <a:xfrm>
+          <a:off x="0" y="0"/>
+          <a:ext cx="0" cy="0"/>
+          <a:chOff x="0" y="0"/>
+          <a:chExt cx="0" cy="0"/>
+        </a:xfrm>
+      </p:grpSpPr>
+      <p:sp>
+        <p:nvSpPr>
+          <p:cNvPr id="3" name="TextBox 2">
+            <a:extLst>
+              <a:ext uri="{FF2B5EF4-FFF2-40B4-BE49-F238E27FC236}">
+                <a16:creationId xmlns:a16="http://schemas.microsoft.com/office/drawing/2014/main" id="{23607CD7-9A57-4D9E-DF88-9FD52002FE9A}"/>
+              </a:ext>
+            </a:extLst>
+          </p:cNvPr>
+          <p:cNvSpPr txBox="1"/>
+          <p:nvPr/>
+        </p:nvSpPr>
+        <p:spPr>
+          <a:xfrm>
+            <a:off x="217714" y="255046"/>
+            <a:ext cx="11756571" cy="4256422"/>
+          </a:xfrm>
+          <a:prstGeom prst="rect">
+            <a:avLst/>
+          </a:prstGeom>
+          <a:noFill/>
+        </p:spPr>
+        <p:txBody>
+          <a:bodyPr wrap="square">
+            <a:spAutoFit/>
+          </a:bodyPr>
+          <a:lstStyle/>
+          <a:p>
+            <a:pPr>
+              <a:lnSpc>
+                <a:spcPct val="150000"/>
+              </a:lnSpc>
+              <a:buNone/>
+            </a:pPr>
+            <a:r>
+              <a:rPr kumimoji="0" lang="en-US" altLang="en-US" sz="1300" b="0" i="0" u="none" strike="noStrike" cap="none" normalizeH="0" baseline="0">
+                <a:ln>
+                  <a:noFill/>
+                </a:ln>
+                <a:solidFill>
+                  <a:schemeClr val="tx1"/>
+                </a:solidFill>
+                <a:effectLst/>
+                <a:latin typeface="Arial" panose="020B0604020202020204" pitchFamily="34" charset="0"/>
+              </a:rPr>
+              <a:t>Məsələn, </a:t>
+            </a:r>
+            <a:r>
+              <a:rPr kumimoji="0" lang="en-US" altLang="en-US" sz="1300" b="1" i="0" u="none" strike="noStrike" cap="none" normalizeH="0" baseline="0">
+                <a:ln>
+                  <a:noFill/>
+                </a:ln>
+                <a:solidFill>
+                  <a:schemeClr val="tx1"/>
+                </a:solidFill>
+                <a:effectLst/>
+                <a:latin typeface="Arial" panose="020B0604020202020204" pitchFamily="34" charset="0"/>
+              </a:rPr>
+              <a:t>posts</a:t>
+            </a:r>
+            <a:r>
+              <a:rPr kumimoji="0" lang="en-US" altLang="en-US" sz="1300" b="0" i="0" u="none" strike="noStrike" cap="none" normalizeH="0" baseline="0">
+                <a:ln>
+                  <a:noFill/>
+                </a:ln>
+                <a:solidFill>
+                  <a:schemeClr val="tx1"/>
+                </a:solidFill>
+                <a:effectLst/>
+                <a:latin typeface="Arial" panose="020B0604020202020204" pitchFamily="34" charset="0"/>
+              </a:rPr>
+              <a:t> cədvəlində belə sahələr var:</a:t>
+            </a:r>
+          </a:p>
+          <a:p>
+            <a:pPr>
+              <a:lnSpc>
+                <a:spcPct val="150000"/>
+              </a:lnSpc>
+              <a:buNone/>
+            </a:pPr>
+            <a:endParaRPr lang="en-US" altLang="en-US" sz="1300">
+              <a:latin typeface="Arial" panose="020B0604020202020204" pitchFamily="34" charset="0"/>
+            </a:endParaRPr>
+          </a:p>
+          <a:p>
+            <a:pPr>
+              <a:lnSpc>
+                <a:spcPct val="150000"/>
+              </a:lnSpc>
+              <a:buNone/>
+            </a:pPr>
+            <a:endParaRPr kumimoji="0" lang="en-US" altLang="en-US" sz="1300" b="0" i="0" u="none" strike="noStrike" cap="none" normalizeH="0" baseline="0">
+              <a:ln>
+                <a:noFill/>
+              </a:ln>
+              <a:solidFill>
+                <a:schemeClr val="tx1"/>
+              </a:solidFill>
+              <a:effectLst/>
+              <a:latin typeface="Arial" panose="020B0604020202020204" pitchFamily="34" charset="0"/>
+            </a:endParaRPr>
+          </a:p>
+          <a:p>
+            <a:pPr>
+              <a:lnSpc>
+                <a:spcPct val="150000"/>
+              </a:lnSpc>
+              <a:buNone/>
+            </a:pPr>
+            <a:endParaRPr lang="en-US" altLang="en-US" sz="1300">
+              <a:latin typeface="Arial" panose="020B0604020202020204" pitchFamily="34" charset="0"/>
+            </a:endParaRPr>
+          </a:p>
+          <a:p>
+            <a:pPr>
+              <a:lnSpc>
+                <a:spcPct val="150000"/>
+              </a:lnSpc>
+              <a:buNone/>
+            </a:pPr>
+            <a:endParaRPr kumimoji="0" lang="en-US" altLang="en-US" sz="1300" b="0" i="0" u="none" strike="noStrike" cap="none" normalizeH="0" baseline="0">
+              <a:ln>
+                <a:noFill/>
+              </a:ln>
+              <a:solidFill>
+                <a:schemeClr val="tx1"/>
+              </a:solidFill>
+              <a:effectLst/>
+              <a:latin typeface="Arial" panose="020B0604020202020204" pitchFamily="34" charset="0"/>
+            </a:endParaRPr>
+          </a:p>
+          <a:p>
+            <a:pPr>
+              <a:lnSpc>
+                <a:spcPct val="150000"/>
+              </a:lnSpc>
+              <a:buNone/>
+            </a:pPr>
+            <a:r>
+              <a:rPr kumimoji="0" lang="en-US" altLang="en-US" sz="1300" b="1" i="0" u="none" strike="noStrike" cap="none" normalizeH="0" baseline="0">
+                <a:ln>
+                  <a:noFill/>
+                </a:ln>
+                <a:solidFill>
+                  <a:schemeClr val="tx1"/>
+                </a:solidFill>
+                <a:effectLst/>
+                <a:latin typeface="Arial" panose="020B0604020202020204" pitchFamily="34" charset="0"/>
+              </a:rPr>
+              <a:t>PUT ilə</a:t>
+            </a:r>
+            <a:r>
+              <a:rPr kumimoji="0" lang="en-US" altLang="en-US" sz="1300" b="0" i="0" u="none" strike="noStrike" cap="none" normalizeH="0" baseline="0">
+                <a:ln>
+                  <a:noFill/>
+                </a:ln>
+                <a:solidFill>
+                  <a:schemeClr val="tx1"/>
+                </a:solidFill>
+                <a:effectLst/>
+                <a:latin typeface="Arial" panose="020B0604020202020204" pitchFamily="34" charset="0"/>
+              </a:rPr>
+              <a:t>: Sən bütün bu sahələri göndərməlisən. Əks halda, göndərmədiyin sahələr boş və ya null ola bilər.</a:t>
+            </a:r>
+          </a:p>
+          <a:p>
+            <a:pPr>
+              <a:lnSpc>
+                <a:spcPct val="150000"/>
+              </a:lnSpc>
+              <a:buNone/>
+            </a:pPr>
+            <a:endParaRPr kumimoji="0" lang="en-US" altLang="en-US" sz="1300" b="0" i="0" u="none" strike="noStrike" cap="none" normalizeH="0" baseline="0">
+              <a:ln>
+                <a:noFill/>
+              </a:ln>
+              <a:solidFill>
+                <a:schemeClr val="tx1"/>
+              </a:solidFill>
+              <a:effectLst/>
+              <a:latin typeface="Arial" panose="020B0604020202020204" pitchFamily="34" charset="0"/>
+            </a:endParaRPr>
+          </a:p>
+          <a:p>
+            <a:pPr>
+              <a:lnSpc>
+                <a:spcPct val="150000"/>
+              </a:lnSpc>
+              <a:buNone/>
+            </a:pPr>
+            <a:endParaRPr lang="en-US" altLang="en-US" sz="1300">
+              <a:latin typeface="Arial" panose="020B0604020202020204" pitchFamily="34" charset="0"/>
+            </a:endParaRPr>
+          </a:p>
+          <a:p>
+            <a:pPr>
+              <a:lnSpc>
+                <a:spcPct val="150000"/>
+              </a:lnSpc>
+              <a:buNone/>
+            </a:pPr>
+            <a:endParaRPr kumimoji="0" lang="en-US" altLang="en-US" sz="1300" b="0" i="0" u="none" strike="noStrike" cap="none" normalizeH="0" baseline="0">
+              <a:ln>
+                <a:noFill/>
+              </a:ln>
+              <a:solidFill>
+                <a:schemeClr val="tx1"/>
+              </a:solidFill>
+              <a:effectLst/>
+              <a:latin typeface="Arial" panose="020B0604020202020204" pitchFamily="34" charset="0"/>
+            </a:endParaRPr>
+          </a:p>
+          <a:p>
+            <a:pPr>
+              <a:lnSpc>
+                <a:spcPct val="150000"/>
+              </a:lnSpc>
+              <a:buNone/>
+            </a:pPr>
+            <a:r>
+              <a:rPr kumimoji="0" lang="en-US" altLang="en-US" sz="1300" b="1" i="0" u="none" strike="noStrike" cap="none" normalizeH="0" baseline="0">
+                <a:ln>
+                  <a:noFill/>
+                </a:ln>
+                <a:solidFill>
+                  <a:schemeClr val="tx1"/>
+                </a:solidFill>
+                <a:effectLst/>
+                <a:latin typeface="Arial" panose="020B0604020202020204" pitchFamily="34" charset="0"/>
+              </a:rPr>
+              <a:t>PATCH ilə</a:t>
+            </a:r>
+            <a:r>
+              <a:rPr kumimoji="0" lang="en-US" altLang="en-US" sz="1300" b="0" i="0" u="none" strike="noStrike" cap="none" normalizeH="0" baseline="0">
+                <a:ln>
+                  <a:noFill/>
+                </a:ln>
+                <a:solidFill>
+                  <a:schemeClr val="tx1"/>
+                </a:solidFill>
+                <a:effectLst/>
+                <a:latin typeface="Arial" panose="020B0604020202020204" pitchFamily="34" charset="0"/>
+              </a:rPr>
+              <a:t>: Sən yalnız dəyişmək istədiyin sahəni göndərə bilərsən (məsələn, təkcə title).</a:t>
+            </a:r>
+          </a:p>
+          <a:p>
+            <a:pPr>
+              <a:lnSpc>
+                <a:spcPct val="150000"/>
+              </a:lnSpc>
+              <a:buNone/>
+            </a:pPr>
+            <a:endParaRPr kumimoji="0" lang="en-US" altLang="en-US" sz="1300" b="0" i="0" u="none" strike="noStrike" cap="none" normalizeH="0" baseline="0">
+              <a:ln>
+                <a:noFill/>
+              </a:ln>
+              <a:solidFill>
+                <a:schemeClr val="tx1"/>
+              </a:solidFill>
+              <a:effectLst/>
+              <a:latin typeface="Arial" panose="020B0604020202020204" pitchFamily="34" charset="0"/>
+            </a:endParaRPr>
+          </a:p>
+          <a:p>
+            <a:pPr>
+              <a:lnSpc>
+                <a:spcPct val="150000"/>
+              </a:lnSpc>
+              <a:buNone/>
+            </a:pPr>
+            <a:endParaRPr kumimoji="0" lang="en-US" altLang="en-US" sz="1300" b="0" i="0" u="none" strike="noStrike" cap="none" normalizeH="0" baseline="0">
+              <a:ln>
+                <a:noFill/>
+              </a:ln>
+              <a:solidFill>
+                <a:schemeClr val="tx1"/>
+              </a:solidFill>
+              <a:effectLst/>
+              <a:latin typeface="Arial" panose="020B0604020202020204" pitchFamily="34" charset="0"/>
+            </a:endParaRPr>
+          </a:p>
+          <a:p>
+            <a:pPr>
+              <a:lnSpc>
+                <a:spcPct val="150000"/>
+              </a:lnSpc>
+              <a:buNone/>
+            </a:pPr>
+            <a:endParaRPr lang="en-US" altLang="en-US" sz="1300">
+              <a:latin typeface="Arial" panose="020B0604020202020204" pitchFamily="34" charset="0"/>
+            </a:endParaRPr>
+          </a:p>
+          <a:p>
+            <a:pPr>
+              <a:lnSpc>
+                <a:spcPct val="150000"/>
+              </a:lnSpc>
+              <a:buNone/>
+            </a:pPr>
+            <a:r>
+              <a:rPr kumimoji="0" lang="az-Latn-AZ" altLang="en-US" sz="1300" b="0" i="0" u="none" strike="noStrike" cap="none" normalizeH="0" baseline="0">
+                <a:ln>
+                  <a:noFill/>
+                </a:ln>
+                <a:solidFill>
+                  <a:schemeClr val="tx1"/>
+                </a:solidFill>
+                <a:effectLst/>
+                <a:latin typeface="Arial" panose="020B0604020202020204" pitchFamily="34" charset="0"/>
+              </a:rPr>
+              <a:t>Bu hissəyə o qədərdə indilik fikir vermirik.</a:t>
+            </a:r>
+            <a:endParaRPr kumimoji="0" lang="en-US" altLang="en-US" sz="1300" b="0" i="0" u="none" strike="noStrike" cap="none" normalizeH="0" baseline="0">
+              <a:ln>
+                <a:noFill/>
+              </a:ln>
+              <a:solidFill>
+                <a:schemeClr val="tx1"/>
+              </a:solidFill>
+              <a:effectLst/>
+              <a:latin typeface="Arial" panose="020B0604020202020204" pitchFamily="34" charset="0"/>
+            </a:endParaRPr>
+          </a:p>
+        </p:txBody>
+      </p:sp>
+      <p:pic>
+        <p:nvPicPr>
+          <p:cNvPr id="4" name="Picture 3">
+            <a:extLst>
+              <a:ext uri="{FF2B5EF4-FFF2-40B4-BE49-F238E27FC236}">
+                <a16:creationId xmlns:a16="http://schemas.microsoft.com/office/drawing/2014/main" id="{6597E52E-E0BA-D4EA-9A43-846832DCCDD4}"/>
+              </a:ext>
+            </a:extLst>
+          </p:cNvPr>
+          <p:cNvPicPr>
+            <a:picLocks noChangeAspect="1"/>
+          </p:cNvPicPr>
+          <p:nvPr/>
+        </p:nvPicPr>
+        <p:blipFill>
+          <a:blip r:embed="rId2"/>
+          <a:stretch>
+            <a:fillRect/>
+          </a:stretch>
+        </p:blipFill>
+        <p:spPr>
+          <a:xfrm>
+            <a:off x="0" y="885638"/>
+            <a:ext cx="3210373" cy="543001"/>
+          </a:xfrm>
+          <a:prstGeom prst="rect">
+            <a:avLst/>
+          </a:prstGeom>
+        </p:spPr>
+      </p:pic>
+    </p:spTree>
+    <p:extLst>
+      <p:ext uri="{BB962C8B-B14F-4D97-AF65-F5344CB8AC3E}">
+        <p14:creationId xmlns:p14="http://schemas.microsoft.com/office/powerpoint/2010/main" val="2488783172"/>
+      </p:ext>
+    </p:extLst>
+  </p:cSld>
+  <p:clrMapOvr>
+    <a:masterClrMapping/>
+  </p:clrMapOvr>
+</p:sld>
+</file>
+
+<file path=ppt/slides/slide7.xml><?xml version="1.0" encoding="utf-8"?>
+<p:sld xmlns:a="http://schemas.openxmlformats.org/drawingml/2006/main" xmlns:r="http://schemas.openxmlformats.org/officeDocument/2006/relationships" xmlns:p="http://schemas.openxmlformats.org/presentationml/2006/main">
+  <p:cSld>
+    <p:spTree>
+      <p:nvGrpSpPr>
+        <p:cNvPr id="1" name="">
+          <a:extLst>
+            <a:ext uri="{FF2B5EF4-FFF2-40B4-BE49-F238E27FC236}">
+              <a16:creationId xmlns:a16="http://schemas.microsoft.com/office/drawing/2014/main" id="{67274471-345D-8E89-3D16-CB71CE29F34F}"/>
+            </a:ext>
+          </a:extLst>
+        </p:cNvPr>
+        <p:cNvGrpSpPr/>
+        <p:nvPr/>
+      </p:nvGrpSpPr>
+      <p:grpSpPr>
+        <a:xfrm>
+          <a:off x="0" y="0"/>
+          <a:ext cx="0" cy="0"/>
+          <a:chOff x="0" y="0"/>
+          <a:chExt cx="0" cy="0"/>
+        </a:xfrm>
+      </p:grpSpPr>
+      <p:sp>
+        <p:nvSpPr>
+          <p:cNvPr id="3" name="TextBox 2">
+            <a:extLst>
+              <a:ext uri="{FF2B5EF4-FFF2-40B4-BE49-F238E27FC236}">
+                <a16:creationId xmlns:a16="http://schemas.microsoft.com/office/drawing/2014/main" id="{D6DC8C90-BBF0-A719-1B34-22CE79A04AD8}"/>
+              </a:ext>
+            </a:extLst>
+          </p:cNvPr>
+          <p:cNvSpPr txBox="1"/>
+          <p:nvPr/>
+        </p:nvSpPr>
+        <p:spPr>
+          <a:xfrm>
+            <a:off x="217714" y="255046"/>
+            <a:ext cx="11756571" cy="698717"/>
+          </a:xfrm>
+          <a:prstGeom prst="rect">
+            <a:avLst/>
+          </a:prstGeom>
+          <a:noFill/>
+        </p:spPr>
+        <p:txBody>
+          <a:bodyPr wrap="square">
+            <a:spAutoFit/>
+          </a:bodyPr>
+          <a:lstStyle/>
+          <a:p>
+            <a:pPr>
+              <a:lnSpc>
+                <a:spcPct val="150000"/>
+              </a:lnSpc>
+              <a:buNone/>
+            </a:pPr>
+            <a:r>
+              <a:rPr lang="az-Latn-AZ" altLang="en-US" sz="1400" b="1">
+                <a:solidFill>
+                  <a:srgbClr val="0070C0"/>
+                </a:solidFill>
+                <a:latin typeface="Arial" panose="020B0604020202020204" pitchFamily="34" charset="0"/>
+              </a:rPr>
+              <a:t>name</a:t>
+            </a:r>
+            <a:r>
+              <a:rPr lang="az-Latn-AZ" altLang="en-US" sz="1400">
+                <a:latin typeface="Arial" panose="020B0604020202020204" pitchFamily="34" charset="0"/>
+              </a:rPr>
+              <a:t> atributlarına </a:t>
+            </a:r>
+          </a:p>
+          <a:p>
+            <a:pPr>
+              <a:lnSpc>
+                <a:spcPct val="150000"/>
+              </a:lnSpc>
+              <a:buNone/>
+            </a:pPr>
+            <a:r>
+              <a:rPr lang="az-Latn-AZ" altLang="en-US" sz="1400">
+                <a:latin typeface="Arial" panose="020B0604020202020204" pitchFamily="34" charset="0"/>
+              </a:rPr>
+              <a:t>dəyər veririk.</a:t>
+            </a:r>
+            <a:endParaRPr lang="en-US" altLang="en-US" sz="1400">
+              <a:latin typeface="Arial" panose="020B0604020202020204" pitchFamily="34" charset="0"/>
+            </a:endParaRPr>
+          </a:p>
+        </p:txBody>
+      </p:sp>
+      <p:pic>
+        <p:nvPicPr>
+          <p:cNvPr id="4" name="Picture 3">
+            <a:extLst>
+              <a:ext uri="{FF2B5EF4-FFF2-40B4-BE49-F238E27FC236}">
+                <a16:creationId xmlns:a16="http://schemas.microsoft.com/office/drawing/2014/main" id="{5FD2CEE8-8497-F715-B9AA-00F8F570E60F}"/>
+              </a:ext>
+            </a:extLst>
+          </p:cNvPr>
+          <p:cNvPicPr>
+            <a:picLocks noChangeAspect="1"/>
+          </p:cNvPicPr>
+          <p:nvPr/>
+        </p:nvPicPr>
+        <p:blipFill>
+          <a:blip r:embed="rId2"/>
+          <a:stretch>
+            <a:fillRect/>
+          </a:stretch>
+        </p:blipFill>
+        <p:spPr>
+          <a:xfrm>
+            <a:off x="2400176" y="0"/>
+            <a:ext cx="9791824" cy="6858000"/>
+          </a:xfrm>
+          <a:prstGeom prst="rect">
+            <a:avLst/>
+          </a:prstGeom>
+        </p:spPr>
+      </p:pic>
+    </p:spTree>
+    <p:extLst>
+      <p:ext uri="{BB962C8B-B14F-4D97-AF65-F5344CB8AC3E}">
+        <p14:creationId xmlns:p14="http://schemas.microsoft.com/office/powerpoint/2010/main" val="370582645"/>
+      </p:ext>
+    </p:extLst>
+  </p:cSld>
+  <p:clrMapOvr>
+    <a:masterClrMapping/>
+  </p:clrMapOvr>
+</p:sld>
+</file>
+
+<file path=ppt/slides/slide8.xml><?xml version="1.0" encoding="utf-8"?>
+<p:sld xmlns:a="http://schemas.openxmlformats.org/drawingml/2006/main" xmlns:r="http://schemas.openxmlformats.org/officeDocument/2006/relationships" xmlns:p="http://schemas.openxmlformats.org/presentationml/2006/main">
+  <p:cSld>
+    <p:spTree>
+      <p:nvGrpSpPr>
+        <p:cNvPr id="1" name="">
+          <a:extLst>
+            <a:ext uri="{FF2B5EF4-FFF2-40B4-BE49-F238E27FC236}">
+              <a16:creationId xmlns:a16="http://schemas.microsoft.com/office/drawing/2014/main" id="{1BC4EABA-CF1B-F961-AEF9-910646A742C1}"/>
+            </a:ext>
+          </a:extLst>
+        </p:cNvPr>
+        <p:cNvGrpSpPr/>
+        <p:nvPr/>
+      </p:nvGrpSpPr>
+      <p:grpSpPr>
+        <a:xfrm>
+          <a:off x="0" y="0"/>
+          <a:ext cx="0" cy="0"/>
+          <a:chOff x="0" y="0"/>
+          <a:chExt cx="0" cy="0"/>
+        </a:xfrm>
+      </p:grpSpPr>
+      <p:sp>
+        <p:nvSpPr>
+          <p:cNvPr id="3" name="TextBox 2">
+            <a:extLst>
+              <a:ext uri="{FF2B5EF4-FFF2-40B4-BE49-F238E27FC236}">
+                <a16:creationId xmlns:a16="http://schemas.microsoft.com/office/drawing/2014/main" id="{228BA917-8D33-F386-86F9-A805B5F02397}"/>
+              </a:ext>
+            </a:extLst>
+          </p:cNvPr>
+          <p:cNvSpPr txBox="1"/>
+          <p:nvPr/>
+        </p:nvSpPr>
+        <p:spPr>
+          <a:xfrm>
+            <a:off x="217714" y="255046"/>
+            <a:ext cx="11756571" cy="355354"/>
+          </a:xfrm>
+          <a:prstGeom prst="rect">
+            <a:avLst/>
+          </a:prstGeom>
+          <a:noFill/>
+        </p:spPr>
+        <p:txBody>
+          <a:bodyPr wrap="square">
+            <a:spAutoFit/>
+          </a:bodyPr>
+          <a:lstStyle/>
+          <a:p>
+            <a:pPr>
+              <a:lnSpc>
+                <a:spcPct val="150000"/>
+              </a:lnSpc>
+              <a:buNone/>
+            </a:pPr>
+            <a:r>
+              <a:rPr lang="en-US" altLang="en-US" sz="1300">
+                <a:latin typeface="Arial" panose="020B0604020202020204" pitchFamily="34" charset="0"/>
+              </a:rPr>
+              <a:t>Controller -d</a:t>
+            </a:r>
+            <a:r>
+              <a:rPr lang="az-Latn-AZ" altLang="en-US" sz="1300">
+                <a:latin typeface="Arial" panose="020B0604020202020204" pitchFamily="34" charset="0"/>
+              </a:rPr>
+              <a:t>ə gələn dəyərləri </a:t>
+            </a:r>
+            <a:r>
+              <a:rPr lang="az-Latn-AZ" altLang="en-US" sz="1300" b="1">
+                <a:latin typeface="Arial" panose="020B0604020202020204" pitchFamily="34" charset="0"/>
+              </a:rPr>
+              <a:t>return</a:t>
+            </a:r>
+            <a:r>
+              <a:rPr lang="az-Latn-AZ" altLang="en-US" sz="1300">
+                <a:latin typeface="Arial" panose="020B0604020202020204" pitchFamily="34" charset="0"/>
+              </a:rPr>
+              <a:t> edirik. </a:t>
+            </a:r>
+            <a:endParaRPr kumimoji="0" lang="en-US" altLang="en-US" sz="1300" b="0" i="0" u="none" strike="noStrike" cap="none" normalizeH="0" baseline="0">
+              <a:ln>
+                <a:noFill/>
+              </a:ln>
+              <a:solidFill>
+                <a:schemeClr val="tx1"/>
+              </a:solidFill>
+              <a:effectLst/>
+              <a:latin typeface="Arial" panose="020B0604020202020204" pitchFamily="34" charset="0"/>
+            </a:endParaRPr>
+          </a:p>
+        </p:txBody>
+      </p:sp>
+      <p:pic>
+        <p:nvPicPr>
+          <p:cNvPr id="4" name="Picture 3">
+            <a:extLst>
+              <a:ext uri="{FF2B5EF4-FFF2-40B4-BE49-F238E27FC236}">
+                <a16:creationId xmlns:a16="http://schemas.microsoft.com/office/drawing/2014/main" id="{66451152-FDDB-7C80-F5E8-487F7C74B6AD}"/>
+              </a:ext>
+            </a:extLst>
+          </p:cNvPr>
+          <p:cNvPicPr>
+            <a:picLocks noChangeAspect="1"/>
+          </p:cNvPicPr>
+          <p:nvPr/>
+        </p:nvPicPr>
+        <p:blipFill>
+          <a:blip r:embed="rId2"/>
+          <a:stretch>
+            <a:fillRect/>
+          </a:stretch>
+        </p:blipFill>
+        <p:spPr>
+          <a:xfrm>
+            <a:off x="6657203" y="332464"/>
+            <a:ext cx="5534797" cy="6525536"/>
+          </a:xfrm>
+          <a:prstGeom prst="rect">
+            <a:avLst/>
+          </a:prstGeom>
+        </p:spPr>
+      </p:pic>
+    </p:spTree>
+    <p:extLst>
+      <p:ext uri="{BB962C8B-B14F-4D97-AF65-F5344CB8AC3E}">
+        <p14:creationId xmlns:p14="http://schemas.microsoft.com/office/powerpoint/2010/main" val="1104937064"/>
+      </p:ext>
+    </p:extLst>
+  </p:cSld>
+  <p:clrMapOvr>
+    <a:masterClrMapping/>
+  </p:clrMapOvr>
+</p:sld>
+</file>
+
+<file path=ppt/slides/slide9.xml><?xml version="1.0" encoding="utf-8"?>
+<p:sld xmlns:a="http://schemas.openxmlformats.org/drawingml/2006/main" xmlns:r="http://schemas.openxmlformats.org/officeDocument/2006/relationships" xmlns:p="http://schemas.openxmlformats.org/presentationml/2006/main">
+  <p:cSld>
+    <p:spTree>
+      <p:nvGrpSpPr>
+        <p:cNvPr id="1" name="">
+          <a:extLst>
+            <a:ext uri="{FF2B5EF4-FFF2-40B4-BE49-F238E27FC236}">
+              <a16:creationId xmlns:a16="http://schemas.microsoft.com/office/drawing/2014/main" id="{D13B5F81-707E-7B54-1F61-669C4B414332}"/>
+            </a:ext>
+          </a:extLst>
+        </p:cNvPr>
+        <p:cNvGrpSpPr/>
+        <p:nvPr/>
+      </p:nvGrpSpPr>
+      <p:grpSpPr>
+        <a:xfrm>
+          <a:off x="0" y="0"/>
+          <a:ext cx="0" cy="0"/>
+          <a:chOff x="0" y="0"/>
+          <a:chExt cx="0" cy="0"/>
+        </a:xfrm>
+      </p:grpSpPr>
+      <p:sp>
+        <p:nvSpPr>
+          <p:cNvPr id="3" name="TextBox 2">
+            <a:extLst>
+              <a:ext uri="{FF2B5EF4-FFF2-40B4-BE49-F238E27FC236}">
+                <a16:creationId xmlns:a16="http://schemas.microsoft.com/office/drawing/2014/main" id="{75B9EC61-7C74-350C-0467-65BF2B39FDC7}"/>
+              </a:ext>
+            </a:extLst>
+          </p:cNvPr>
+          <p:cNvSpPr txBox="1"/>
+          <p:nvPr/>
+        </p:nvSpPr>
+        <p:spPr>
+          <a:xfrm>
+            <a:off x="217714" y="255046"/>
+            <a:ext cx="11756571" cy="355354"/>
+          </a:xfrm>
+          <a:prstGeom prst="rect">
+            <a:avLst/>
+          </a:prstGeom>
+          <a:noFill/>
+        </p:spPr>
+        <p:txBody>
+          <a:bodyPr wrap="square">
+            <a:spAutoFit/>
+          </a:bodyPr>
+          <a:lstStyle/>
+          <a:p>
+            <a:pPr>
+              <a:lnSpc>
+                <a:spcPct val="150000"/>
+              </a:lnSpc>
+              <a:buNone/>
+            </a:pPr>
+            <a:r>
+              <a:rPr lang="az-Latn-AZ" altLang="en-US" sz="1300">
+                <a:latin typeface="Arial" panose="020B0604020202020204" pitchFamily="34" charset="0"/>
+              </a:rPr>
+              <a:t>Nəticə bu cür olmalıdır.</a:t>
+            </a:r>
+            <a:endParaRPr kumimoji="0" lang="en-US" altLang="en-US" sz="1300" b="0" i="0" u="none" strike="noStrike" cap="none" normalizeH="0" baseline="0">
+              <a:ln>
+                <a:noFill/>
+              </a:ln>
+              <a:solidFill>
+                <a:schemeClr val="tx1"/>
+              </a:solidFill>
+              <a:effectLst/>
+              <a:latin typeface="Arial" panose="020B0604020202020204" pitchFamily="34" charset="0"/>
+            </a:endParaRPr>
+          </a:p>
+        </p:txBody>
+      </p:sp>
+      <p:pic>
+        <p:nvPicPr>
+          <p:cNvPr id="4" name="Picture 3">
+            <a:extLst>
+              <a:ext uri="{FF2B5EF4-FFF2-40B4-BE49-F238E27FC236}">
+                <a16:creationId xmlns:a16="http://schemas.microsoft.com/office/drawing/2014/main" id="{DD12019B-7D82-3218-325B-1B2AAFDEB61D}"/>
+              </a:ext>
+            </a:extLst>
+          </p:cNvPr>
+          <p:cNvPicPr>
+            <a:picLocks noChangeAspect="1"/>
+          </p:cNvPicPr>
+          <p:nvPr/>
+        </p:nvPicPr>
+        <p:blipFill>
+          <a:blip r:embed="rId2"/>
+          <a:stretch>
+            <a:fillRect/>
+          </a:stretch>
+        </p:blipFill>
+        <p:spPr>
+          <a:xfrm>
+            <a:off x="95166" y="1911725"/>
+            <a:ext cx="5718058" cy="3654802"/>
+          </a:xfrm>
+          <a:prstGeom prst="rect">
+            <a:avLst/>
+          </a:prstGeom>
+          <a:ln w="38100" cap="sq">
+            <a:solidFill>
+              <a:srgbClr val="000000"/>
+            </a:solidFill>
+            <a:prstDash val="solid"/>
+            <a:miter lim="800000"/>
+          </a:ln>
+          <a:effectLst>
+            <a:outerShdw blurRad="50800" dist="38100" dir="2700000" algn="tl" rotWithShape="0">
+              <a:srgbClr val="000000">
+                <a:alpha val="43000"/>
+              </a:srgbClr>
+            </a:outerShdw>
+          </a:effectLst>
+        </p:spPr>
+      </p:pic>
+      <p:pic>
+        <p:nvPicPr>
+          <p:cNvPr id="6" name="Picture 5">
+            <a:extLst>
+              <a:ext uri="{FF2B5EF4-FFF2-40B4-BE49-F238E27FC236}">
+                <a16:creationId xmlns:a16="http://schemas.microsoft.com/office/drawing/2014/main" id="{712EC5CD-4B39-D344-3878-8D052D752074}"/>
+              </a:ext>
+            </a:extLst>
+          </p:cNvPr>
+          <p:cNvPicPr>
+            <a:picLocks noChangeAspect="1"/>
+          </p:cNvPicPr>
+          <p:nvPr/>
+        </p:nvPicPr>
+        <p:blipFill>
+          <a:blip r:embed="rId3"/>
+          <a:stretch>
+            <a:fillRect/>
+          </a:stretch>
+        </p:blipFill>
+        <p:spPr>
+          <a:xfrm>
+            <a:off x="6150375" y="1911725"/>
+            <a:ext cx="5946459" cy="3654801"/>
+          </a:xfrm>
+          <a:prstGeom prst="rect">
+            <a:avLst/>
+          </a:prstGeom>
+          <a:ln w="38100" cap="sq">
+            <a:solidFill>
+              <a:srgbClr val="000000"/>
+            </a:solidFill>
+            <a:prstDash val="solid"/>
+            <a:miter lim="800000"/>
+          </a:ln>
+          <a:effectLst>
+            <a:outerShdw blurRad="50800" dist="38100" dir="2700000" algn="tl" rotWithShape="0">
+              <a:srgbClr val="000000">
+                <a:alpha val="43000"/>
+              </a:srgbClr>
+            </a:outerShdw>
+          </a:effectLst>
+        </p:spPr>
+      </p:pic>
+    </p:spTree>
+    <p:extLst>
+      <p:ext uri="{BB962C8B-B14F-4D97-AF65-F5344CB8AC3E}">
+        <p14:creationId xmlns:p14="http://schemas.microsoft.com/office/powerpoint/2010/main" val="1666814076"/>
       </p:ext>
     </p:extLst>
   </p:cSld>
